--- a/docs/主治医意見書読み取り_概要.pptx
+++ b/docs/主治医意見書読み取り_概要.pptx
@@ -25,6 +25,7 @@
     <p:sldId id="273" r:id="rId24"/>
     <p:sldId id="274" r:id="rId25"/>
     <p:sldId id="275" r:id="rId26"/>
+    <p:sldId id="276" r:id="rId27"/>
   </p:sldIdLst>
   <p:sldSz cx="12191695" cy="6858000" type="screen4x3"/>
   <p:notesSz cx="6858000" cy="9144000"/>
@@ -3304,7 +3305,7 @@
                 </a:solidFill>
                 <a:latin typeface="Yu Gothic"/>
               </a:rPr>
-              <a:t>2026年9月12日</a:t>
+              <a:t>2026年9月23日</a:t>
             </a:r>
           </a:p>
         </p:txBody>
@@ -3361,7 +3362,7 @@
                 </a:solidFill>
                 <a:latin typeface="Yu Gothic"/>
               </a:rPr>
-              <a:t>医療辞書と医療機関一覧</a:t>
+              <a:t>ベンチマーク④ 数字の欄と、記述欄の検算</a:t>
             </a:r>
           </a:p>
         </p:txBody>
@@ -3410,16 +3411,383 @@
           </a:p>
         </p:txBody>
       </p:sp>
-      <p:sp>
-        <p:nvSpPr>
-          <p:cNvPr id="4" name="TextBox 3"/>
+      <p:graphicFrame>
+        <p:nvGraphicFramePr>
+          <p:cNvPr id="4" name="Table 3"/>
+          <p:cNvGraphicFramePr>
+            <a:graphicFrameLocks noGrp="1"/>
+          </p:cNvGraphicFramePr>
+          <p:nvPr/>
+        </p:nvGraphicFramePr>
+        <p:xfrm>
+          <a:off x="685800" y="1783080"/>
+          <a:ext cx="10789920" cy="2011680"/>
+        </p:xfrm>
+        <a:graphic>
+          <a:graphicData uri="http://schemas.openxmlformats.org/drawingml/2006/table">
+            <a:tbl>
+              <a:tblPr firstRow="1" bandRow="1">
+                <a:tableStyleId>{5C22544A-7EE6-4342-B048-85BDC9FD1C3A}</a:tableStyleId>
+              </a:tblPr>
+              <a:tblGrid>
+                <a:gridCol w="3057144"/>
+                <a:gridCol w="4675632"/>
+                <a:gridCol w="3057144"/>
+              </a:tblGrid>
+              <a:tr h="402336">
+                <a:tc>
+                  <a:txBody>
+                    <a:bodyPr/>
+                    <a:lstStyle/>
+                    <a:p>
+                      <a:r>
+                        <a:rPr sz="1250" b="1">
+                          <a:solidFill>
+                            <a:srgbClr val="FFFFFF"/>
+                          </a:solidFill>
+                          <a:latin typeface="Yu Gothic"/>
+                        </a:rPr>
+                        <a:t>対象</a:t>
+                      </a:r>
+                    </a:p>
+                  </a:txBody>
+                  <a:tcPr marT="38100" marB="38100">
+                    <a:solidFill>
+                      <a:srgbClr val="1E5AA8"/>
+                    </a:solidFill>
+                  </a:tcPr>
+                </a:tc>
+                <a:tc>
+                  <a:txBody>
+                    <a:bodyPr/>
+                    <a:lstStyle/>
+                    <a:p>
+                      <a:r>
+                        <a:rPr sz="1250" b="1">
+                          <a:solidFill>
+                            <a:srgbClr val="FFFFFF"/>
+                          </a:solidFill>
+                          <a:latin typeface="Yu Gothic"/>
+                        </a:rPr>
+                        <a:t>やり方</a:t>
+                      </a:r>
+                    </a:p>
+                  </a:txBody>
+                  <a:tcPr marT="38100" marB="38100">
+                    <a:solidFill>
+                      <a:srgbClr val="1E5AA8"/>
+                    </a:solidFill>
+                  </a:tcPr>
+                </a:tc>
+                <a:tc>
+                  <a:txBody>
+                    <a:bodyPr/>
+                    <a:lstStyle/>
+                    <a:p>
+                      <a:r>
+                        <a:rPr sz="1250" b="1">
+                          <a:solidFill>
+                            <a:srgbClr val="FFFFFF"/>
+                          </a:solidFill>
+                          <a:latin typeface="Yu Gothic"/>
+                        </a:rPr>
+                        <a:t>結果</a:t>
+                      </a:r>
+                    </a:p>
+                  </a:txBody>
+                  <a:tcPr marT="38100" marB="38100">
+                    <a:solidFill>
+                      <a:srgbClr val="1E5AA8"/>
+                    </a:solidFill>
+                  </a:tcPr>
+                </a:tc>
+              </a:tr>
+              <a:tr h="402336">
+                <a:tc>
+                  <a:txBody>
+                    <a:bodyPr/>
+                    <a:lstStyle/>
+                    <a:p>
+                      <a:r>
+                        <a:rPr sz="1250" b="0">
+                          <a:solidFill>
+                            <a:srgbClr val="1B1F24"/>
+                          </a:solidFill>
+                          <a:latin typeface="Yu Gothic"/>
+                        </a:rPr>
+                        <a:t>記入日・生年月日・最終診察日・発症年月日</a:t>
+                      </a:r>
+                    </a:p>
+                  </a:txBody>
+                  <a:tcPr marT="38100" marB="38100">
+                    <a:solidFill>
+                      <a:srgbClr val="FFFFFF"/>
+                    </a:solidFill>
+                  </a:tcPr>
+                </a:tc>
+                <a:tc>
+                  <a:txBody>
+                    <a:bodyPr/>
+                    <a:lstStyle/>
+                    <a:p>
+                      <a:r>
+                        <a:rPr sz="1250" b="0">
+                          <a:solidFill>
+                            <a:srgbClr val="1B1F24"/>
+                          </a:solidFill>
+                          <a:latin typeface="Yu Gothic"/>
+                        </a:rPr>
+                        <a:t>元号は読まず数字だけを読み、印刷された年／月／日で区切る</a:t>
+                      </a:r>
+                    </a:p>
+                  </a:txBody>
+                  <a:tcPr marT="38100" marB="38100">
+                    <a:solidFill>
+                      <a:srgbClr val="FFFFFF"/>
+                    </a:solidFill>
+                  </a:tcPr>
+                </a:tc>
+                <a:tc>
+                  <a:txBody>
+                    <a:bodyPr/>
+                    <a:lstStyle/>
+                    <a:p>
+                      <a:r>
+                        <a:rPr sz="1250" b="0">
+                          <a:solidFill>
+                            <a:srgbClr val="1B1F24"/>
+                          </a:solidFill>
+                          <a:latin typeface="Yu Gothic"/>
+                        </a:rPr>
+                        <a:t>10 / 10 正解</a:t>
+                      </a:r>
+                    </a:p>
+                  </a:txBody>
+                  <a:tcPr marT="38100" marB="38100">
+                    <a:solidFill>
+                      <a:srgbClr val="FFFFFF"/>
+                    </a:solidFill>
+                  </a:tcPr>
+                </a:tc>
+              </a:tr>
+              <a:tr h="402336">
+                <a:tc>
+                  <a:txBody>
+                    <a:bodyPr/>
+                    <a:lstStyle/>
+                    <a:p>
+                      <a:r>
+                        <a:rPr sz="1250" b="0">
+                          <a:solidFill>
+                            <a:srgbClr val="1B1F24"/>
+                          </a:solidFill>
+                          <a:latin typeface="Yu Gothic"/>
+                        </a:rPr>
+                        <a:t>電話番号・郵便番号</a:t>
+                      </a:r>
+                    </a:p>
+                  </a:txBody>
+                  <a:tcPr marT="38100" marB="38100">
+                    <a:solidFill>
+                      <a:srgbClr val="F2F5F9"/>
+                    </a:solidFill>
+                  </a:tcPr>
+                </a:tc>
+                <a:tc>
+                  <a:txBody>
+                    <a:bodyPr/>
+                    <a:lstStyle/>
+                    <a:p>
+                      <a:r>
+                        <a:rPr sz="1250" b="0">
+                          <a:solidFill>
+                            <a:srgbClr val="1B1F24"/>
+                          </a:solidFill>
+                          <a:latin typeface="Yu Gothic"/>
+                        </a:rPr>
+                        <a:t>文字種を限定し、書式を整える</a:t>
+                      </a:r>
+                    </a:p>
+                  </a:txBody>
+                  <a:tcPr marT="38100" marB="38100">
+                    <a:solidFill>
+                      <a:srgbClr val="F2F5F9"/>
+                    </a:solidFill>
+                  </a:tcPr>
+                </a:tc>
+                <a:tc>
+                  <a:txBody>
+                    <a:bodyPr/>
+                    <a:lstStyle/>
+                    <a:p>
+                      <a:r>
+                        <a:rPr sz="1250" b="0">
+                          <a:solidFill>
+                            <a:srgbClr val="1B1F24"/>
+                          </a:solidFill>
+                          <a:latin typeface="Yu Gothic"/>
+                        </a:rPr>
+                        <a:t>029-873-3111 の形に統一</a:t>
+                      </a:r>
+                    </a:p>
+                  </a:txBody>
+                  <a:tcPr marT="38100" marB="38100">
+                    <a:solidFill>
+                      <a:srgbClr val="F2F5F9"/>
+                    </a:solidFill>
+                  </a:tcPr>
+                </a:tc>
+              </a:tr>
+              <a:tr h="402336">
+                <a:tc>
+                  <a:txBody>
+                    <a:bodyPr/>
+                    <a:lstStyle/>
+                    <a:p>
+                      <a:r>
+                        <a:rPr sz="1250" b="0">
+                          <a:solidFill>
+                            <a:srgbClr val="1B1F24"/>
+                          </a:solidFill>
+                          <a:latin typeface="Yu Gothic"/>
+                        </a:rPr>
+                        <a:t>記述欄の左端</a:t>
+                      </a:r>
+                    </a:p>
+                  </a:txBody>
+                  <a:tcPr marT="38100" marB="38100">
+                    <a:solidFill>
+                      <a:srgbClr val="FFFFFF"/>
+                    </a:solidFill>
+                  </a:tcPr>
+                </a:tc>
+                <a:tc>
+                  <a:txBody>
+                    <a:bodyPr/>
+                    <a:lstStyle/>
+                    <a:p>
+                      <a:r>
+                        <a:rPr sz="1250" b="0">
+                          <a:solidFill>
+                            <a:srgbClr val="1B1F24"/>
+                          </a:solidFill>
+                          <a:latin typeface="Yu Gothic"/>
+                        </a:rPr>
+                        <a:t>白紙様式を見て、印刷にぶつからない範囲で読み取り枠を広げる</a:t>
+                      </a:r>
+                    </a:p>
+                  </a:txBody>
+                  <a:tcPr marT="38100" marB="38100">
+                    <a:solidFill>
+                      <a:srgbClr val="FFFFFF"/>
+                    </a:solidFill>
+                  </a:tcPr>
+                </a:tc>
+                <a:tc>
+                  <a:txBody>
+                    <a:bodyPr/>
+                    <a:lstStyle/>
+                    <a:p>
+                      <a:r>
+                        <a:rPr sz="1250" b="0">
+                          <a:solidFill>
+                            <a:srgbClr val="1B1F24"/>
+                          </a:solidFill>
+                          <a:latin typeface="Yu Gothic"/>
+                        </a:rPr>
+                        <a:t>症状名は9件中9件で先頭が切れていた → 解消</a:t>
+                      </a:r>
+                    </a:p>
+                  </a:txBody>
+                  <a:tcPr marT="38100" marB="38100">
+                    <a:solidFill>
+                      <a:srgbClr val="FFFFFF"/>
+                    </a:solidFill>
+                  </a:tcPr>
+                </a:tc>
+              </a:tr>
+              <a:tr h="402336">
+                <a:tc>
+                  <a:txBody>
+                    <a:bodyPr/>
+                    <a:lstStyle/>
+                    <a:p>
+                      <a:r>
+                        <a:rPr sz="1250" b="0">
+                          <a:solidFill>
+                            <a:srgbClr val="1B1F24"/>
+                          </a:solidFill>
+                          <a:latin typeface="Yu Gothic"/>
+                        </a:rPr>
+                        <a:t>記入が無い欄の拾い読み</a:t>
+                      </a:r>
+                    </a:p>
+                  </a:txBody>
+                  <a:tcPr marT="38100" marB="38100">
+                    <a:solidFill>
+                      <a:srgbClr val="F2F5F9"/>
+                    </a:solidFill>
+                  </a:tcPr>
+                </a:tc>
+                <a:tc>
+                  <a:txBody>
+                    <a:bodyPr/>
+                    <a:lstStyle/>
+                    <a:p>
+                      <a:r>
+                        <a:rPr sz="1250" b="0">
+                          <a:solidFill>
+                            <a:srgbClr val="1B1F24"/>
+                          </a:solidFill>
+                          <a:latin typeface="Yu Gothic"/>
+                        </a:rPr>
+                        <a:t>書き込みが1文字ぶんも無いのに文字が読めた場合を検出</a:t>
+                      </a:r>
+                    </a:p>
+                  </a:txBody>
+                  <a:tcPr marT="38100" marB="38100">
+                    <a:solidFill>
+                      <a:srgbClr val="F2F5F9"/>
+                    </a:solidFill>
+                  </a:tcPr>
+                </a:tc>
+                <a:tc>
+                  <a:txBody>
+                    <a:bodyPr/>
+                    <a:lstStyle/>
+                    <a:p>
+                      <a:r>
+                        <a:rPr sz="1250" b="0">
+                          <a:solidFill>
+                            <a:srgbClr val="1B1F24"/>
+                          </a:solidFill>
+                          <a:latin typeface="Yu Gothic"/>
+                        </a:rPr>
+                        <a:t>449欄中28欄を検出（確信度0.8以上の誤りは0件）</a:t>
+                      </a:r>
+                    </a:p>
+                  </a:txBody>
+                  <a:tcPr marT="38100" marB="38100">
+                    <a:solidFill>
+                      <a:srgbClr val="F2F5F9"/>
+                    </a:solidFill>
+                  </a:tcPr>
+                </a:tc>
+              </a:tr>
+            </a:tbl>
+          </a:graphicData>
+        </a:graphic>
+      </p:graphicFrame>
+      <p:sp>
+        <p:nvSpPr>
+          <p:cNvPr id="5" name="TextBox 4"/>
           <p:cNvSpPr txBox="1"/>
           <p:nvPr/>
         </p:nvSpPr>
         <p:spPr>
           <a:xfrm>
-            <a:off x="685800" y="1691640"/>
-            <a:ext cx="10881360" cy="4572000"/>
+            <a:off x="685800" y="5029200"/>
+            <a:ext cx="10881360" cy="548640"/>
           </a:xfrm>
           <a:prstGeom prst="rect">
             <a:avLst/>
@@ -3434,120 +3802,24 @@
           <a:p>
             <a:pPr algn="l">
               <a:spcBef>
-                <a:spcPts val="1000"/>
-              </a:spcBef>
-            </a:pPr>
-            <a:r>
-              <a:rPr sz="1700" b="1">
-                <a:solidFill>
-                  <a:srgbClr val="1B1F24"/>
-                </a:solidFill>
-                <a:latin typeface="Yu Gothic"/>
-              </a:rPr>
-              <a:t>・傷病名は ICD-10 コードと介護保険の特定疾病フラグを持つ</a:t>
-            </a:r>
-          </a:p>
-          <a:p>
-            <a:pPr algn="l">
-              <a:spcBef>
-                <a:spcPts val="200"/>
-              </a:spcBef>
-            </a:pPr>
-            <a:r>
-              <a:rPr sz="1400" b="0">
+                <a:spcPts val="0"/>
+              </a:spcBef>
+            </a:pPr>
+            <a:r>
+              <a:rPr sz="1300" b="0">
                 <a:solidFill>
                   <a:srgbClr val="5B636E"/>
                 </a:solidFill>
                 <a:latin typeface="Yu Gothic"/>
               </a:rPr>
-              <a:t>　　編集距離ベースの照合で1文字違いも拾う（骨粗葵症→骨粗鬆症、慢性裳臓病→慢性腎臓病）</a:t>
-            </a:r>
-          </a:p>
-          <a:p>
-            <a:pPr algn="l">
-              <a:spcBef>
-                <a:spcPts val="1000"/>
-              </a:spcBef>
-            </a:pPr>
-            <a:r>
-              <a:rPr sz="1700" b="1">
-                <a:solidFill>
-                  <a:srgbClr val="1B1F24"/>
-                </a:solidFill>
-                <a:latin typeface="Yu Gothic"/>
-              </a:rPr>
-              <a:t>・診療科しか入らない欄には診療科の辞書を当てる</a:t>
-            </a:r>
-          </a:p>
-          <a:p>
-            <a:pPr algn="l">
-              <a:spcBef>
-                <a:spcPts val="1000"/>
-              </a:spcBef>
-            </a:pPr>
-            <a:r>
-              <a:rPr sz="1700" b="1">
-                <a:solidFill>
-                  <a:srgbClr val="1B1F24"/>
-                </a:solidFill>
-                <a:latin typeface="Yu Gothic"/>
-              </a:rPr>
-              <a:t>・医療機関は厚生労働省の一覧と突き合わせる（47 都道府県 / 97,399 件 / 2026-09-06 現在）</a:t>
-            </a:r>
-          </a:p>
-          <a:p>
-            <a:pPr algn="l">
-              <a:spcBef>
-                <a:spcPts val="200"/>
-              </a:spcBef>
-            </a:pPr>
-            <a:r>
-              <a:rPr sz="1400" b="0">
-                <a:solidFill>
-                  <a:srgbClr val="5B636E"/>
-                </a:solidFill>
-                <a:latin typeface="Yu Gothic"/>
-              </a:rPr>
-              <a:t>　　確認画面では都道府県を選んで検索でき、選ぶと所在地と電話も自動で入る</a:t>
-            </a:r>
-          </a:p>
-          <a:p>
-            <a:pPr algn="l">
-              <a:spcBef>
-                <a:spcPts val="1000"/>
-              </a:spcBef>
-            </a:pPr>
-            <a:r>
-              <a:rPr sz="1700" b="1">
-                <a:solidFill>
-                  <a:srgbClr val="1B1F24"/>
-                </a:solidFill>
-                <a:latin typeface="Yu Gothic"/>
-              </a:rPr>
-              <a:t>・辞書で「短くしてしまう」置き換えはしない</a:t>
-            </a:r>
-          </a:p>
-          <a:p>
-            <a:pPr algn="l">
-              <a:spcBef>
-                <a:spcPts val="200"/>
-              </a:spcBef>
-            </a:pPr>
-            <a:r>
-              <a:rPr sz="1400" b="0">
-                <a:solidFill>
-                  <a:srgbClr val="5B636E"/>
-                </a:solidFill>
-                <a:latin typeface="Yu Gothic"/>
-              </a:rPr>
-              <a:t>　　『筑波記念病院』が『病院』に、『右大腿骨骨折』が『骨折』に潰れていたのを修正</a:t>
-            </a:r>
-          </a:p>
-        </p:txBody>
-      </p:sp>
-      <p:sp>
-        <p:nvSpPr>
-          <p:cNvPr id="5" name="TextBox 4"/>
+              <a:t>値は書き換えず、確信度を下げて理由を出す。「読めた文字が少ないから補う」ことはしない（無い記載を作らないため）。</a:t>
+            </a:r>
+          </a:p>
+        </p:txBody>
+      </p:sp>
+      <p:sp>
+        <p:nvSpPr>
+          <p:cNvPr id="6" name="TextBox 5"/>
           <p:cNvSpPr txBox="1"/>
           <p:nvPr/>
         </p:nvSpPr>
@@ -3632,23 +3904,7 @@
                 </a:solidFill>
                 <a:latin typeface="Yu Gothic"/>
               </a:rPr>
-              <a:t>確認・編集画面の工夫</a:t>
-            </a:r>
-          </a:p>
-          <a:p>
-            <a:pPr algn="l">
-              <a:spcBef>
-                <a:spcPts val="400"/>
-              </a:spcBef>
-            </a:pPr>
-            <a:r>
-              <a:rPr sz="1400" b="0">
-                <a:solidFill>
-                  <a:srgbClr val="5B636E"/>
-                </a:solidFill>
-                <a:latin typeface="Yu Gothic"/>
-              </a:rPr>
-              <a:t>読み違いを見つけやすく、直しやすくする</a:t>
+              <a:t>医療辞書と医療機関一覧</a:t>
             </a:r>
           </a:p>
         </p:txBody>
@@ -3725,13 +3981,13 @@
               </a:spcBef>
             </a:pPr>
             <a:r>
-              <a:rPr sz="1600" b="1">
+              <a:rPr sz="1700" b="1">
                 <a:solidFill>
                   <a:srgbClr val="1B1F24"/>
                 </a:solidFill>
                 <a:latin typeface="Yu Gothic"/>
               </a:rPr>
-              <a:t>・確信度を色で示す（高・中・要確認・修正済み・確定・匿名化）</a:t>
+              <a:t>・傷病名は ICD-10 コードと介護保険の特定疾病フラグを持つ</a:t>
             </a:r>
           </a:p>
           <a:p>
@@ -3741,13 +3997,13 @@
               </a:spcBef>
             </a:pPr>
             <a:r>
-              <a:rPr sz="1300" b="0">
+              <a:rPr sz="1400" b="0">
                 <a:solidFill>
                   <a:srgbClr val="5B636E"/>
                 </a:solidFill>
                 <a:latin typeface="Yu Gothic"/>
               </a:rPr>
-              <a:t>　　タグだけでなく背景色にも反映し、元画像の該当箇所にも同じ色を重ねる</a:t>
+              <a:t>　　編集距離ベースの照合で1文字違いも拾う（骨粗葵症→骨粗鬆症、慢性裳臓病→慢性腎臓病）</a:t>
             </a:r>
           </a:p>
           <a:p>
@@ -3757,13 +4013,29 @@
               </a:spcBef>
             </a:pPr>
             <a:r>
-              <a:rPr sz="1600" b="1">
+              <a:rPr sz="1700" b="1">
                 <a:solidFill>
                   <a:srgbClr val="1B1F24"/>
                 </a:solidFill>
                 <a:latin typeface="Yu Gothic"/>
               </a:rPr>
-              <a:t>・様式と同じ並びで表示する</a:t>
+              <a:t>・診療科しか入らない欄には診療科の辞書を当てる</a:t>
+            </a:r>
+          </a:p>
+          <a:p>
+            <a:pPr algn="l">
+              <a:spcBef>
+                <a:spcPts val="1000"/>
+              </a:spcBef>
+            </a:pPr>
+            <a:r>
+              <a:rPr sz="1700" b="1">
+                <a:solidFill>
+                  <a:srgbClr val="1B1F24"/>
+                </a:solidFill>
+                <a:latin typeface="Yu Gothic"/>
+              </a:rPr>
+              <a:t>・医療機関は厚生労働省の一覧と突き合わせる（47 都道府県 / 97,399 件 / 2026-09-06 現在）</a:t>
             </a:r>
           </a:p>
           <a:p>
@@ -3773,13 +4045,13 @@
               </a:spcBef>
             </a:pPr>
             <a:r>
-              <a:rPr sz="1300" b="0">
+              <a:rPr sz="1400" b="0">
                 <a:solidFill>
                   <a:srgbClr val="5B636E"/>
                 </a:solidFill>
                 <a:latin typeface="Yu Gothic"/>
               </a:rPr>
-              <a:t>　　選択肢の行・列、関連項目のまとまり（褥瘡＝有無＋部位＋程度）</a:t>
+              <a:t>　　確認画面では都道府県を選んで検索でき、選ぶと所在地と電話も自動で入る</a:t>
             </a:r>
           </a:p>
           <a:p>
@@ -3789,13 +4061,13 @@
               </a:spcBef>
             </a:pPr>
             <a:r>
-              <a:rPr sz="1600" b="1">
+              <a:rPr sz="1700" b="1">
                 <a:solidFill>
                   <a:srgbClr val="1B1F24"/>
                 </a:solidFill>
                 <a:latin typeface="Yu Gothic"/>
               </a:rPr>
-              <a:t>・「確定」（黄緑）と「削除して確定」</a:t>
+              <a:t>・辞書で「短くしてしまう」置き換えはしない</a:t>
             </a:r>
           </a:p>
           <a:p>
@@ -3805,77 +4077,13 @@
               </a:spcBef>
             </a:pPr>
             <a:r>
-              <a:rPr sz="1300" b="0">
+              <a:rPr sz="1400" b="0">
                 <a:solidFill>
                   <a:srgbClr val="5B636E"/>
                 </a:solidFill>
                 <a:latin typeface="Yu Gothic"/>
               </a:rPr>
-              <a:t>　　記入が無い欄に文字が入った場合を1操作で片付ける</a:t>
-            </a:r>
-          </a:p>
-          <a:p>
-            <a:pPr algn="l">
-              <a:spcBef>
-                <a:spcPts val="1000"/>
-              </a:spcBef>
-            </a:pPr>
-            <a:r>
-              <a:rPr sz="1600" b="1">
-                <a:solidFill>
-                  <a:srgbClr val="1B1F24"/>
-                </a:solidFill>
-                <a:latin typeface="Yu Gothic"/>
-              </a:rPr>
-              <a:t>・候補ボタン（辞書・LLM・OCR生読み）と、辞書からの検索</a:t>
-            </a:r>
-          </a:p>
-          <a:p>
-            <a:pPr algn="l">
-              <a:spcBef>
-                <a:spcPts val="1000"/>
-              </a:spcBef>
-            </a:pPr>
-            <a:r>
-              <a:rPr sz="1600" b="1">
-                <a:solidFill>
-                  <a:srgbClr val="1B1F24"/>
-                </a:solidFill>
-                <a:latin typeface="Yu Gothic"/>
-              </a:rPr>
-              <a:t>・記述欄は音声入力もできる</a:t>
-            </a:r>
-          </a:p>
-          <a:p>
-            <a:pPr algn="l">
-              <a:spcBef>
-                <a:spcPts val="200"/>
-              </a:spcBef>
-            </a:pPr>
-            <a:r>
-              <a:rPr sz="1300" b="0">
-                <a:solidFill>
-                  <a:srgbClr val="5B636E"/>
-                </a:solidFill>
-                <a:latin typeface="Yu Gothic"/>
-              </a:rPr>
-              <a:t>　　ブラウザの音声認識を使うため、初回に確認を出す</a:t>
-            </a:r>
-          </a:p>
-          <a:p>
-            <a:pPr algn="l">
-              <a:spcBef>
-                <a:spcPts val="1000"/>
-              </a:spcBef>
-            </a:pPr>
-            <a:r>
-              <a:rPr sz="1600" b="1">
-                <a:solidFill>
-                  <a:srgbClr val="1B1F24"/>
-                </a:solidFill>
-                <a:latin typeface="Yu Gothic"/>
-              </a:rPr>
-              <a:t>・拡大表示は掴んで動かせる／集計は上部に固定</a:t>
+              <a:t>　　『筑波記念病院』が『病院』に、『右大腿骨骨折』が『骨折』に潰れていたのを修正</a:t>
             </a:r>
           </a:p>
         </p:txBody>
@@ -3967,7 +4175,23 @@
                 </a:solidFill>
                 <a:latin typeface="Yu Gothic"/>
               </a:rPr>
-              <a:t>匿名化・操作ログ・利用者の区別</a:t>
+              <a:t>確認・編集画面の工夫</a:t>
+            </a:r>
+          </a:p>
+          <a:p>
+            <a:pPr algn="l">
+              <a:spcBef>
+                <a:spcPts val="400"/>
+              </a:spcBef>
+            </a:pPr>
+            <a:r>
+              <a:rPr sz="1400" b="0">
+                <a:solidFill>
+                  <a:srgbClr val="5B636E"/>
+                </a:solidFill>
+                <a:latin typeface="Yu Gothic"/>
+              </a:rPr>
+              <a:t>読み違いを見つけやすく、直しやすくする</a:t>
             </a:r>
           </a:p>
         </p:txBody>
@@ -4050,7 +4274,7 @@
                 </a:solidFill>
                 <a:latin typeface="Yu Gothic"/>
               </a:rPr>
-              <a:t>・匿名化加工済みデータ（研究用）</a:t>
+              <a:t>・確信度を色で示す（高・中・要確認・修正済み・確定・匿名化）</a:t>
             </a:r>
           </a:p>
           <a:p>
@@ -4066,7 +4290,7 @@
                 </a:solidFill>
                 <a:latin typeface="Yu Gothic"/>
               </a:rPr>
-              <a:t>　　氏名欄が白抜きなら「匿名化済み」。指定すると住所・連絡先も「マスク済み」にし、元の読み取り値ごと捨てる</a:t>
+              <a:t>　　タグだけでなく背景色にも反映し、元画像の該当箇所にも同じ色を重ねる</a:t>
             </a:r>
           </a:p>
           <a:p>
@@ -4082,7 +4306,7 @@
                 </a:solidFill>
                 <a:latin typeface="Yu Gothic"/>
               </a:rPr>
-              <a:t>・操作ログ</a:t>
+              <a:t>・様式と同じ並びで表示する</a:t>
             </a:r>
           </a:p>
           <a:p>
@@ -4098,7 +4322,7 @@
                 </a:solidFill>
                 <a:latin typeface="Yu Gothic"/>
               </a:rPr>
-              <a:t>　　読み取り・修正（直す前→直した後）・確定・候補採用・音声入力を記録し、JSON / CSV で保存できる。個人情報の項目は値を残さず文字数だけ</a:t>
+              <a:t>　　選択肢の行・列、関連項目のまとまり（褥瘡＝有無＋部位＋程度）</a:t>
             </a:r>
           </a:p>
           <a:p>
@@ -4114,7 +4338,7 @@
                 </a:solidFill>
                 <a:latin typeface="Yu Gothic"/>
               </a:rPr>
-              <a:t>・利用者トークン</a:t>
+              <a:t>・「確定」（黄緑）と「削除して確定」</a:t>
             </a:r>
           </a:p>
           <a:p>
@@ -4130,7 +4354,7 @@
                 </a:solidFill>
                 <a:latin typeface="Yu Gothic"/>
               </a:rPr>
-              <a:t>　　同じ端末を複数人が使っても履歴が混ざらないよう、ブラウザごとに発行したトークンで保存先を分ける。共用端末では作業後に消せる</a:t>
+              <a:t>　　記入が無い欄に文字が入った場合を1操作で片付ける</a:t>
             </a:r>
           </a:p>
           <a:p>
@@ -4146,7 +4370,23 @@
                 </a:solidFill>
                 <a:latin typeface="Yu Gothic"/>
               </a:rPr>
-              <a:t>・サイト全体は Basic 認証で保護</a:t>
+              <a:t>・候補ボタン（辞書・LLM・OCR生読み）と、辞書からの検索</a:t>
+            </a:r>
+          </a:p>
+          <a:p>
+            <a:pPr algn="l">
+              <a:spcBef>
+                <a:spcPts val="1000"/>
+              </a:spcBef>
+            </a:pPr>
+            <a:r>
+              <a:rPr sz="1600" b="1">
+                <a:solidFill>
+                  <a:srgbClr val="1B1F24"/>
+                </a:solidFill>
+                <a:latin typeface="Yu Gothic"/>
+              </a:rPr>
+              <a:t>・記述欄は音声入力もできる</a:t>
             </a:r>
           </a:p>
           <a:p>
@@ -4162,7 +4402,23 @@
                 </a:solidFill>
                 <a:latin typeface="Yu Gothic"/>
               </a:rPr>
-              <a:t>　　トークンは認証ではない、と画面にも明記している</a:t>
+              <a:t>　　ブラウザの音声認識を使うため、初回に確認を出す</a:t>
+            </a:r>
+          </a:p>
+          <a:p>
+            <a:pPr algn="l">
+              <a:spcBef>
+                <a:spcPts val="1000"/>
+              </a:spcBef>
+            </a:pPr>
+            <a:r>
+              <a:rPr sz="1600" b="1">
+                <a:solidFill>
+                  <a:srgbClr val="1B1F24"/>
+                </a:solidFill>
+                <a:latin typeface="Yu Gothic"/>
+              </a:rPr>
+              <a:t>・拡大表示は掴んで動かせる／集計は上部に固定</a:t>
             </a:r>
           </a:p>
         </p:txBody>
@@ -4254,23 +4510,7 @@
                 </a:solidFill>
                 <a:latin typeface="Yu Gothic"/>
               </a:rPr>
-              <a:t>品質チェックで見つけた重大な不具合</a:t>
-            </a:r>
-          </a:p>
-          <a:p>
-            <a:pPr algn="l">
-              <a:spcBef>
-                <a:spcPts val="400"/>
-              </a:spcBef>
-            </a:pPr>
-            <a:r>
-              <a:rPr sz="1400" b="0">
-                <a:solidFill>
-                  <a:srgbClr val="5B636E"/>
-                </a:solidFill>
-                <a:latin typeface="Yu Gothic"/>
-              </a:rPr>
-              <a:t>「見た目は正しく確信度も高いのに中身が違う」型を、実測で洗い出した</a:t>
+              <a:t>匿名化・操作ログ・利用者の区別</a:t>
             </a:r>
           </a:p>
         </p:txBody>
@@ -4319,548 +4559,16 @@
           </a:p>
         </p:txBody>
       </p:sp>
-      <p:graphicFrame>
-        <p:nvGraphicFramePr>
-          <p:cNvPr id="4" name="Table 3"/>
-          <p:cNvGraphicFramePr>
-            <a:graphicFrameLocks noGrp="1"/>
-          </p:cNvGraphicFramePr>
-          <p:nvPr/>
-        </p:nvGraphicFramePr>
-        <p:xfrm>
-          <a:off x="685800" y="1783080"/>
-          <a:ext cx="10789920" cy="4315968"/>
-        </p:xfrm>
-        <a:graphic>
-          <a:graphicData uri="http://schemas.openxmlformats.org/drawingml/2006/table">
-            <a:tbl>
-              <a:tblPr firstRow="1" bandRow="1">
-                <a:tableStyleId>{5C22544A-7EE6-4342-B048-85BDC9FD1C3A}</a:tableStyleId>
-              </a:tblPr>
-              <a:tblGrid>
-                <a:gridCol w="4495800"/>
-                <a:gridCol w="6294120"/>
-              </a:tblGrid>
-              <a:tr h="392360">
-                <a:tc>
-                  <a:txBody>
-                    <a:bodyPr/>
-                    <a:lstStyle/>
-                    <a:p>
-                      <a:r>
-                        <a:rPr sz="1300" b="1">
-                          <a:solidFill>
-                            <a:srgbClr val="FFFFFF"/>
-                          </a:solidFill>
-                          <a:latin typeface="Yu Gothic"/>
-                        </a:rPr>
-                        <a:t>見つかった不具合</a:t>
-                      </a:r>
-                    </a:p>
-                  </a:txBody>
-                  <a:tcPr marT="38100" marB="38100">
-                    <a:solidFill>
-                      <a:srgbClr val="1E5AA8"/>
-                    </a:solidFill>
-                  </a:tcPr>
-                </a:tc>
-                <a:tc>
-                  <a:txBody>
-                    <a:bodyPr/>
-                    <a:lstStyle/>
-                    <a:p>
-                      <a:r>
-                        <a:rPr sz="1300" b="1">
-                          <a:solidFill>
-                            <a:srgbClr val="FFFFFF"/>
-                          </a:solidFill>
-                          <a:latin typeface="Yu Gothic"/>
-                        </a:rPr>
-                        <a:t>起きていたこと</a:t>
-                      </a:r>
-                    </a:p>
-                  </a:txBody>
-                  <a:tcPr marT="38100" marB="38100">
-                    <a:solidFill>
-                      <a:srgbClr val="1E5AA8"/>
-                    </a:solidFill>
-                  </a:tcPr>
-                </a:tc>
-              </a:tr>
-              <a:tr h="392360">
-                <a:tc>
-                  <a:txBody>
-                    <a:bodyPr/>
-                    <a:lstStyle/>
-                    <a:p>
-                      <a:r>
-                        <a:rPr sz="1300" b="0">
-                          <a:solidFill>
-                            <a:srgbClr val="1B1F24"/>
-                          </a:solidFill>
-                          <a:latin typeface="Yu Gothic"/>
-                        </a:rPr>
-                        <a:t>定型文フィルタが臨床情報を消す</a:t>
-                      </a:r>
-                    </a:p>
-                  </a:txBody>
-                  <a:tcPr marT="38100" marB="38100">
-                    <a:solidFill>
-                      <a:srgbClr val="FFFFFF"/>
-                    </a:solidFill>
-                  </a:tcPr>
-                </a:tc>
-                <a:tc>
-                  <a:txBody>
-                    <a:bodyPr/>
-                    <a:lstStyle/>
-                    <a:p>
-                      <a:r>
-                        <a:rPr sz="1300" b="0">
-                          <a:solidFill>
-                            <a:srgbClr val="1B1F24"/>
-                          </a:solidFill>
-                          <a:latin typeface="Yu Gothic"/>
-                        </a:rPr>
-                        <a:t>『認知症』『骨折』『がん』が空になる</a:t>
-                      </a:r>
-                    </a:p>
-                  </a:txBody>
-                  <a:tcPr marT="38100" marB="38100">
-                    <a:solidFill>
-                      <a:srgbClr val="FFFFFF"/>
-                    </a:solidFill>
-                  </a:tcPr>
-                </a:tc>
-              </a:tr>
-              <a:tr h="392360">
-                <a:tc>
-                  <a:txBody>
-                    <a:bodyPr/>
-                    <a:lstStyle/>
-                    <a:p>
-                      <a:r>
-                        <a:rPr sz="1300" b="0">
-                          <a:solidFill>
-                            <a:srgbClr val="1B1F24"/>
-                          </a:solidFill>
-                          <a:latin typeface="Yu Gothic"/>
-                        </a:rPr>
-                        <a:t>病名が別の病名に化ける</a:t>
-                      </a:r>
-                    </a:p>
-                  </a:txBody>
-                  <a:tcPr marT="38100" marB="38100">
-                    <a:solidFill>
-                      <a:srgbClr val="F2F5F9"/>
-                    </a:solidFill>
-                  </a:tcPr>
-                </a:tc>
-                <a:tc>
-                  <a:txBody>
-                    <a:bodyPr/>
-                    <a:lstStyle/>
-                    <a:p>
-                      <a:r>
-                        <a:rPr sz="1300" b="0">
-                          <a:solidFill>
-                            <a:srgbClr val="1B1F24"/>
-                          </a:solidFill>
-                          <a:latin typeface="Yu Gothic"/>
-                        </a:rPr>
-                        <a:t>『糖尿病』→『糖尿病性腎症』を確信度100%で採用</a:t>
-                      </a:r>
-                    </a:p>
-                  </a:txBody>
-                  <a:tcPr marT="38100" marB="38100">
-                    <a:solidFill>
-                      <a:srgbClr val="F2F5F9"/>
-                    </a:solidFill>
-                  </a:tcPr>
-                </a:tc>
-              </a:tr>
-              <a:tr h="392360">
-                <a:tc>
-                  <a:txBody>
-                    <a:bodyPr/>
-                    <a:lstStyle/>
-                    <a:p>
-                      <a:r>
-                        <a:rPr sz="1300" b="0">
-                          <a:solidFill>
-                            <a:srgbClr val="1B1F24"/>
-                          </a:solidFill>
-                          <a:latin typeface="Yu Gothic"/>
-                        </a:rPr>
-                        <a:t>数字の切り詰め</a:t>
-                      </a:r>
-                    </a:p>
-                  </a:txBody>
-                  <a:tcPr marT="38100" marB="38100">
-                    <a:solidFill>
-                      <a:srgbClr val="FFFFFF"/>
-                    </a:solidFill>
-                  </a:tcPr>
-                </a:tc>
-                <a:tc>
-                  <a:txBody>
-                    <a:bodyPr/>
-                    <a:lstStyle/>
-                    <a:p>
-                      <a:r>
-                        <a:rPr sz="1300" b="0">
-                          <a:solidFill>
-                            <a:srgbClr val="1B1F24"/>
-                          </a:solidFill>
-                          <a:latin typeface="Yu Gothic"/>
-                        </a:rPr>
-                        <a:t>『2024年』→『20年』→ 西暦2038年</a:t>
-                      </a:r>
-                    </a:p>
-                  </a:txBody>
-                  <a:tcPr marT="38100" marB="38100">
-                    <a:solidFill>
-                      <a:srgbClr val="FFFFFF"/>
-                    </a:solidFill>
-                  </a:tcPr>
-                </a:tc>
-              </a:tr>
-              <a:tr h="392360">
-                <a:tc>
-                  <a:txBody>
-                    <a:bodyPr/>
-                    <a:lstStyle/>
-                    <a:p>
-                      <a:r>
-                        <a:rPr sz="1300" b="0">
-                          <a:solidFill>
-                            <a:srgbClr val="1B1F24"/>
-                          </a:solidFill>
-                          <a:latin typeface="Yu Gothic"/>
-                        </a:rPr>
-                        <a:t>記入が無い欄の拾い読みが素通り</a:t>
-                      </a:r>
-                    </a:p>
-                  </a:txBody>
-                  <a:tcPr marT="38100" marB="38100">
-                    <a:solidFill>
-                      <a:srgbClr val="F2F5F9"/>
-                    </a:solidFill>
-                  </a:tcPr>
-                </a:tc>
-                <a:tc>
-                  <a:txBody>
-                    <a:bodyPr/>
-                    <a:lstStyle/>
-                    <a:p>
-                      <a:r>
-                        <a:rPr sz="1300" b="0">
-                          <a:solidFill>
-                            <a:srgbClr val="1B1F24"/>
-                          </a:solidFill>
-                          <a:latin typeface="Yu Gothic"/>
-                        </a:rPr>
-                        <a:t>『摂食の留意事項＝い』が確信度0.816（緑）</a:t>
-                      </a:r>
-                    </a:p>
-                  </a:txBody>
-                  <a:tcPr marT="38100" marB="38100">
-                    <a:solidFill>
-                      <a:srgbClr val="F2F5F9"/>
-                    </a:solidFill>
-                  </a:tcPr>
-                </a:tc>
-              </a:tr>
-              <a:tr h="392360">
-                <a:tc>
-                  <a:txBody>
-                    <a:bodyPr/>
-                    <a:lstStyle/>
-                    <a:p>
-                      <a:r>
-                        <a:rPr sz="1300" b="0">
-                          <a:solidFill>
-                            <a:srgbClr val="1B1F24"/>
-                          </a:solidFill>
-                          <a:latin typeface="Yu Gothic"/>
-                        </a:rPr>
-                        <a:t>操作ログに個人情報</a:t>
-                      </a:r>
-                    </a:p>
-                  </a:txBody>
-                  <a:tcPr marT="38100" marB="38100">
-                    <a:solidFill>
-                      <a:srgbClr val="FFFFFF"/>
-                    </a:solidFill>
-                  </a:tcPr>
-                </a:tc>
-                <a:tc>
-                  <a:txBody>
-                    <a:bodyPr/>
-                    <a:lstStyle/>
-                    <a:p>
-                      <a:r>
-                        <a:rPr sz="1300" b="0">
-                          <a:solidFill>
-                            <a:srgbClr val="1B1F24"/>
-                          </a:solidFill>
-                          <a:latin typeface="Yu Gothic"/>
-                        </a:rPr>
-                        <a:t>ファイル名（氏名を含む）と医療機関名が生で残る</a:t>
-                      </a:r>
-                    </a:p>
-                  </a:txBody>
-                  <a:tcPr marT="38100" marB="38100">
-                    <a:solidFill>
-                      <a:srgbClr val="FFFFFF"/>
-                    </a:solidFill>
-                  </a:tcPr>
-                </a:tc>
-              </a:tr>
-              <a:tr h="392360">
-                <a:tc>
-                  <a:txBody>
-                    <a:bodyPr/>
-                    <a:lstStyle/>
-                    <a:p>
-                      <a:r>
-                        <a:rPr sz="1300" b="0">
-                          <a:solidFill>
-                            <a:srgbClr val="1B1F24"/>
-                          </a:solidFill>
-                          <a:latin typeface="Yu Gothic"/>
-                        </a:rPr>
-                        <a:t>編集ログが別の意見書と混ざる</a:t>
-                      </a:r>
-                    </a:p>
-                  </a:txBody>
-                  <a:tcPr marT="38100" marB="38100">
-                    <a:solidFill>
-                      <a:srgbClr val="F2F5F9"/>
-                    </a:solidFill>
-                  </a:tcPr>
-                </a:tc>
-                <a:tc>
-                  <a:txBody>
-                    <a:bodyPr/>
-                    <a:lstStyle/>
-                    <a:p>
-                      <a:r>
-                        <a:rPr sz="1300" b="0">
-                          <a:solidFill>
-                            <a:srgbClr val="1B1F24"/>
-                          </a:solidFill>
-                          <a:latin typeface="Yu Gothic"/>
-                        </a:rPr>
-                        <a:t>存在しない訂正が記録される</a:t>
-                      </a:r>
-                    </a:p>
-                  </a:txBody>
-                  <a:tcPr marT="38100" marB="38100">
-                    <a:solidFill>
-                      <a:srgbClr val="F2F5F9"/>
-                    </a:solidFill>
-                  </a:tcPr>
-                </a:tc>
-              </a:tr>
-              <a:tr h="392360">
-                <a:tc>
-                  <a:txBody>
-                    <a:bodyPr/>
-                    <a:lstStyle/>
-                    <a:p>
-                      <a:r>
-                        <a:rPr sz="1300" b="0">
-                          <a:solidFill>
-                            <a:srgbClr val="1B1F24"/>
-                          </a:solidFill>
-                          <a:latin typeface="Yu Gothic"/>
-                        </a:rPr>
-                        <a:t>欄が画像の端に掛かると落ちる</a:t>
-                      </a:r>
-                    </a:p>
-                  </a:txBody>
-                  <a:tcPr marT="38100" marB="38100">
-                    <a:solidFill>
-                      <a:srgbClr val="FFFFFF"/>
-                    </a:solidFill>
-                  </a:tcPr>
-                </a:tc>
-                <a:tc>
-                  <a:txBody>
-                    <a:bodyPr/>
-                    <a:lstStyle/>
-                    <a:p>
-                      <a:r>
-                        <a:rPr sz="1300" b="0">
-                          <a:solidFill>
-                            <a:srgbClr val="1B1F24"/>
-                          </a:solidFill>
-                          <a:latin typeface="Yu Gothic"/>
-                        </a:rPr>
-                        <a:t>1件まるごと失われる</a:t>
-                      </a:r>
-                    </a:p>
-                  </a:txBody>
-                  <a:tcPr marT="38100" marB="38100">
-                    <a:solidFill>
-                      <a:srgbClr val="FFFFFF"/>
-                    </a:solidFill>
-                  </a:tcPr>
-                </a:tc>
-              </a:tr>
-              <a:tr h="392360">
-                <a:tc>
-                  <a:txBody>
-                    <a:bodyPr/>
-                    <a:lstStyle/>
-                    <a:p>
-                      <a:r>
-                        <a:rPr sz="1300" b="0">
-                          <a:solidFill>
-                            <a:srgbClr val="1B1F24"/>
-                          </a:solidFill>
-                          <a:latin typeface="Yu Gothic"/>
-                        </a:rPr>
-                        <a:t>ふりがな欄が必ず空になる</a:t>
-                      </a:r>
-                    </a:p>
-                  </a:txBody>
-                  <a:tcPr marT="38100" marB="38100">
-                    <a:solidFill>
-                      <a:srgbClr val="F2F5F9"/>
-                    </a:solidFill>
-                  </a:tcPr>
-                </a:tc>
-                <a:tc>
-                  <a:txBody>
-                    <a:bodyPr/>
-                    <a:lstStyle/>
-                    <a:p>
-                      <a:r>
-                        <a:rPr sz="1300" b="0">
-                          <a:solidFill>
-                            <a:srgbClr val="1B1F24"/>
-                          </a:solidFill>
-                          <a:latin typeface="Yu Gothic"/>
-                        </a:rPr>
-                        <a:t>読めていたのに、文字種の指定で全部捨てていた（0.00%）</a:t>
-                      </a:r>
-                    </a:p>
-                  </a:txBody>
-                  <a:tcPr marT="38100" marB="38100">
-                    <a:solidFill>
-                      <a:srgbClr val="F2F5F9"/>
-                    </a:solidFill>
-                  </a:tcPr>
-                </a:tc>
-              </a:tr>
-              <a:tr h="392360">
-                <a:tc>
-                  <a:txBody>
-                    <a:bodyPr/>
-                    <a:lstStyle/>
-                    <a:p>
-                      <a:r>
-                        <a:rPr sz="1300" b="0">
-                          <a:solidFill>
-                            <a:srgbClr val="1B1F24"/>
-                          </a:solidFill>
-                          <a:latin typeface="Yu Gothic"/>
-                        </a:rPr>
-                        <a:t>診断名が粗い分類に化ける</a:t>
-                      </a:r>
-                    </a:p>
-                  </a:txBody>
-                  <a:tcPr marT="38100" marB="38100">
-                    <a:solidFill>
-                      <a:srgbClr val="FFFFFF"/>
-                    </a:solidFill>
-                  </a:tcPr>
-                </a:tc>
-                <a:tc>
-                  <a:txBody>
-                    <a:bodyPr/>
-                    <a:lstStyle/>
-                    <a:p>
-                      <a:r>
-                        <a:rPr sz="1300" b="0">
-                          <a:solidFill>
-                            <a:srgbClr val="1B1F24"/>
-                          </a:solidFill>
-                          <a:latin typeface="Yu Gothic"/>
-                        </a:rPr>
-                        <a:t>『右大腿骨頸部骨折術後』→『大腿骨頸部骨折』（右・術後が消える）</a:t>
-                      </a:r>
-                    </a:p>
-                  </a:txBody>
-                  <a:tcPr marT="38100" marB="38100">
-                    <a:solidFill>
-                      <a:srgbClr val="FFFFFF"/>
-                    </a:solidFill>
-                  </a:tcPr>
-                </a:tc>
-              </a:tr>
-              <a:tr h="392368">
-                <a:tc>
-                  <a:txBody>
-                    <a:bodyPr/>
-                    <a:lstStyle/>
-                    <a:p>
-                      <a:r>
-                        <a:rPr sz="1300" b="0">
-                          <a:solidFill>
-                            <a:srgbClr val="1B1F24"/>
-                          </a:solidFill>
-                          <a:latin typeface="Yu Gothic"/>
-                        </a:rPr>
-                        <a:t>同時に2件来るとサーバごと落ちる</a:t>
-                      </a:r>
-                    </a:p>
-                  </a:txBody>
-                  <a:tcPr marT="38100" marB="38100">
-                    <a:solidFill>
-                      <a:srgbClr val="F2F5F9"/>
-                    </a:solidFill>
-                  </a:tcPr>
-                </a:tc>
-                <a:tc>
-                  <a:txBody>
-                    <a:bodyPr/>
-                    <a:lstStyle/>
-                    <a:p>
-                      <a:r>
-                        <a:rPr sz="1300" b="0">
-                          <a:solidFill>
-                            <a:srgbClr val="1B1F24"/>
-                          </a:solidFill>
-                          <a:latin typeface="Yu Gothic"/>
-                        </a:rPr>
-                        <a:t>処理中の全部が巻き添え。小型LLMを共有していた</a:t>
-                      </a:r>
-                    </a:p>
-                  </a:txBody>
-                  <a:tcPr marT="38100" marB="38100">
-                    <a:solidFill>
-                      <a:srgbClr val="F2F5F9"/>
-                    </a:solidFill>
-                  </a:tcPr>
-                </a:tc>
-              </a:tr>
-            </a:tbl>
-          </a:graphicData>
-        </a:graphic>
-      </p:graphicFrame>
-      <p:sp>
-        <p:nvSpPr>
-          <p:cNvPr id="5" name="TextBox 4"/>
+      <p:sp>
+        <p:nvSpPr>
+          <p:cNvPr id="4" name="TextBox 3"/>
           <p:cNvSpPr txBox="1"/>
           <p:nvPr/>
         </p:nvSpPr>
         <p:spPr>
           <a:xfrm>
-            <a:off x="685800" y="5715000"/>
-            <a:ext cx="10881360" cy="548640"/>
+            <a:off x="685800" y="1691640"/>
+            <a:ext cx="10881360" cy="4572000"/>
           </a:xfrm>
           <a:prstGeom prst="rect">
             <a:avLst/>
@@ -4875,7 +4583,23 @@
           <a:p>
             <a:pPr algn="l">
               <a:spcBef>
-                <a:spcPts val="0"/>
+                <a:spcPts val="1000"/>
+              </a:spcBef>
+            </a:pPr>
+            <a:r>
+              <a:rPr sz="1600" b="1">
+                <a:solidFill>
+                  <a:srgbClr val="1B1F24"/>
+                </a:solidFill>
+                <a:latin typeface="Yu Gothic"/>
+              </a:rPr>
+              <a:t>・匿名化加工済みデータ（研究用）</a:t>
+            </a:r>
+          </a:p>
+          <a:p>
+            <a:pPr algn="l">
+              <a:spcBef>
+                <a:spcPts val="200"/>
               </a:spcBef>
             </a:pPr>
             <a:r>
@@ -4885,14 +4609,110 @@
                 </a:solidFill>
                 <a:latin typeface="Yu Gothic"/>
               </a:rPr>
-              <a:t>同じ判定を Python とブラウザの両方に持つため、同じ入力で値が一致するかを必ず突き合わせる。</a:t>
-            </a:r>
-          </a:p>
-        </p:txBody>
-      </p:sp>
-      <p:sp>
-        <p:nvSpPr>
-          <p:cNvPr id="6" name="TextBox 5"/>
+              <a:t>　　氏名欄が白抜きなら「匿名化済み」。指定すると住所・連絡先も「マスク済み」にし、元の読み取り値ごと捨てる</a:t>
+            </a:r>
+          </a:p>
+          <a:p>
+            <a:pPr algn="l">
+              <a:spcBef>
+                <a:spcPts val="1000"/>
+              </a:spcBef>
+            </a:pPr>
+            <a:r>
+              <a:rPr sz="1600" b="1">
+                <a:solidFill>
+                  <a:srgbClr val="1B1F24"/>
+                </a:solidFill>
+                <a:latin typeface="Yu Gothic"/>
+              </a:rPr>
+              <a:t>・操作ログ</a:t>
+            </a:r>
+          </a:p>
+          <a:p>
+            <a:pPr algn="l">
+              <a:spcBef>
+                <a:spcPts val="200"/>
+              </a:spcBef>
+            </a:pPr>
+            <a:r>
+              <a:rPr sz="1300" b="0">
+                <a:solidFill>
+                  <a:srgbClr val="5B636E"/>
+                </a:solidFill>
+                <a:latin typeface="Yu Gothic"/>
+              </a:rPr>
+              <a:t>　　読み取り・修正（直す前→直した後）・確定・候補採用・音声入力を記録し、JSON / CSV で保存できる。個人情報の項目は値を残さず文字数だけ</a:t>
+            </a:r>
+          </a:p>
+          <a:p>
+            <a:pPr algn="l">
+              <a:spcBef>
+                <a:spcPts val="1000"/>
+              </a:spcBef>
+            </a:pPr>
+            <a:r>
+              <a:rPr sz="1600" b="1">
+                <a:solidFill>
+                  <a:srgbClr val="1B1F24"/>
+                </a:solidFill>
+                <a:latin typeface="Yu Gothic"/>
+              </a:rPr>
+              <a:t>・利用者トークン</a:t>
+            </a:r>
+          </a:p>
+          <a:p>
+            <a:pPr algn="l">
+              <a:spcBef>
+                <a:spcPts val="200"/>
+              </a:spcBef>
+            </a:pPr>
+            <a:r>
+              <a:rPr sz="1300" b="0">
+                <a:solidFill>
+                  <a:srgbClr val="5B636E"/>
+                </a:solidFill>
+                <a:latin typeface="Yu Gothic"/>
+              </a:rPr>
+              <a:t>　　同じ端末を複数人が使っても履歴が混ざらないよう、ブラウザごとに発行したトークンで保存先を分ける。共用端末では作業後に消せる</a:t>
+            </a:r>
+          </a:p>
+          <a:p>
+            <a:pPr algn="l">
+              <a:spcBef>
+                <a:spcPts val="1000"/>
+              </a:spcBef>
+            </a:pPr>
+            <a:r>
+              <a:rPr sz="1600" b="1">
+                <a:solidFill>
+                  <a:srgbClr val="1B1F24"/>
+                </a:solidFill>
+                <a:latin typeface="Yu Gothic"/>
+              </a:rPr>
+              <a:t>・サイト全体は Basic 認証で保護</a:t>
+            </a:r>
+          </a:p>
+          <a:p>
+            <a:pPr algn="l">
+              <a:spcBef>
+                <a:spcPts val="200"/>
+              </a:spcBef>
+            </a:pPr>
+            <a:r>
+              <a:rPr sz="1300" b="0">
+                <a:solidFill>
+                  <a:srgbClr val="5B636E"/>
+                </a:solidFill>
+                <a:latin typeface="Yu Gothic"/>
+              </a:rPr>
+              <a:t>　　トークンは認証ではない、と画面にも明記している</a:t>
+            </a:r>
+          </a:p>
+        </p:txBody>
+      </p:sp>
+      <p:sp>
+        <p:nvSpPr>
+          <p:cNvPr id="5" name="TextBox 4"/>
           <p:cNvSpPr txBox="1"/>
           <p:nvPr/>
         </p:nvSpPr>
@@ -4977,7 +4797,7 @@
                 </a:solidFill>
                 <a:latin typeface="Yu Gothic"/>
               </a:rPr>
-              <a:t>不具合の見つけ方</a:t>
+              <a:t>品質チェックで見つけた重大な不具合</a:t>
             </a:r>
           </a:p>
           <a:p>
@@ -4993,7 +4813,7 @@
                 </a:solidFill>
                 <a:latin typeface="Yu Gothic"/>
               </a:rPr>
-              <a:t>見る人を変えると、出てくるものが変わる</a:t>
+              <a:t>「見た目は正しく確信度も高いのに中身が違う」型を、実測で洗い出した</a:t>
             </a:r>
           </a:p>
         </p:txBody>
@@ -5051,8 +4871,8 @@
           <p:nvPr/>
         </p:nvGraphicFramePr>
         <p:xfrm>
-          <a:off x="685800" y="1828800"/>
-          <a:ext cx="10789920" cy="1243584"/>
+          <a:off x="685800" y="1783080"/>
+          <a:ext cx="10789920" cy="4315968"/>
         </p:xfrm>
         <a:graphic>
           <a:graphicData uri="http://schemas.openxmlformats.org/drawingml/2006/table">
@@ -5061,11 +4881,10 @@
                 <a:tableStyleId>{5C22544A-7EE6-4342-B048-85BDC9FD1C3A}</a:tableStyleId>
               </a:tblPr>
               <a:tblGrid>
-                <a:gridCol w="2926080"/>
-                <a:gridCol w="6035040"/>
-                <a:gridCol w="1828800"/>
+                <a:gridCol w="4495800"/>
+                <a:gridCol w="6294120"/>
               </a:tblGrid>
-              <a:tr h="414528">
+              <a:tr h="392360">
                 <a:tc>
                   <a:txBody>
                     <a:bodyPr/>
@@ -5078,7 +4897,7 @@
                           </a:solidFill>
                           <a:latin typeface="Yu Gothic"/>
                         </a:rPr>
-                        <a:t>やり方</a:t>
+                        <a:t>見つかった不具合</a:t>
                       </a:r>
                     </a:p>
                   </a:txBody>
@@ -5100,7 +4919,7 @@
                           </a:solidFill>
                           <a:latin typeface="Yu Gothic"/>
                         </a:rPr>
-                        <a:t>見つかったもの</a:t>
+                        <a:t>起きていたこと</a:t>
                       </a:r>
                     </a:p>
                   </a:txBody>
@@ -5110,30 +4929,8 @@
                     </a:solidFill>
                   </a:tcPr>
                 </a:tc>
-                <a:tc>
-                  <a:txBody>
-                    <a:bodyPr/>
-                    <a:lstStyle/>
-                    <a:p>
-                      <a:r>
-                        <a:rPr sz="1300" b="1">
-                          <a:solidFill>
-                            <a:srgbClr val="FFFFFF"/>
-                          </a:solidFill>
-                          <a:latin typeface="Yu Gothic"/>
-                        </a:rPr>
-                        <a:t>重なり</a:t>
-                      </a:r>
-                    </a:p>
-                  </a:txBody>
-                  <a:tcPr marT="38100" marB="38100">
-                    <a:solidFill>
-                      <a:srgbClr val="1E5AA8"/>
-                    </a:solidFill>
-                  </a:tcPr>
-                </a:tc>
               </a:tr>
-              <a:tr h="414528">
+              <a:tr h="392360">
                 <a:tc>
                   <a:txBody>
                     <a:bodyPr/>
@@ -5146,7 +4943,7 @@
                           </a:solidFill>
                           <a:latin typeface="Yu Gothic"/>
                         </a:rPr>
-                        <a:t>コードを読むレビュー</a:t>
+                        <a:t>定型文フィルタが臨床情報を消す</a:t>
                       </a:r>
                     </a:p>
                   </a:txBody>
@@ -5168,7 +4965,7 @@
                           </a:solidFill>
                           <a:latin typeface="Yu Gothic"/>
                         </a:rPr>
-                        <a:t>8件（無効になっていた分岐、両版のずれ、境界の1文字違い）</a:t>
+                        <a:t>『認知症』『骨折』『がん』が空になる</a:t>
                       </a:r>
                     </a:p>
                   </a:txBody>
@@ -5178,6 +4975,8 @@
                     </a:solidFill>
                   </a:tcPr>
                 </a:tc>
+              </a:tr>
+              <a:tr h="392360">
                 <a:tc>
                   <a:txBody>
                     <a:bodyPr/>
@@ -5190,7 +4989,53 @@
                           </a:solidFill>
                           <a:latin typeface="Yu Gothic"/>
                         </a:rPr>
-                        <a:t>—</a:t>
+                        <a:t>病名が別の病名に化ける</a:t>
+                      </a:r>
+                    </a:p>
+                  </a:txBody>
+                  <a:tcPr marT="38100" marB="38100">
+                    <a:solidFill>
+                      <a:srgbClr val="F2F5F9"/>
+                    </a:solidFill>
+                  </a:tcPr>
+                </a:tc>
+                <a:tc>
+                  <a:txBody>
+                    <a:bodyPr/>
+                    <a:lstStyle/>
+                    <a:p>
+                      <a:r>
+                        <a:rPr sz="1300" b="0">
+                          <a:solidFill>
+                            <a:srgbClr val="1B1F24"/>
+                          </a:solidFill>
+                          <a:latin typeface="Yu Gothic"/>
+                        </a:rPr>
+                        <a:t>『糖尿病』→『糖尿病性腎症』を確信度100%で採用</a:t>
+                      </a:r>
+                    </a:p>
+                  </a:txBody>
+                  <a:tcPr marT="38100" marB="38100">
+                    <a:solidFill>
+                      <a:srgbClr val="F2F5F9"/>
+                    </a:solidFill>
+                  </a:tcPr>
+                </a:tc>
+              </a:tr>
+              <a:tr h="392360">
+                <a:tc>
+                  <a:txBody>
+                    <a:bodyPr/>
+                    <a:lstStyle/>
+                    <a:p>
+                      <a:r>
+                        <a:rPr sz="1300" b="0">
+                          <a:solidFill>
+                            <a:srgbClr val="1B1F24"/>
+                          </a:solidFill>
+                          <a:latin typeface="Yu Gothic"/>
+                        </a:rPr>
+                        <a:t>数字の切り詰め</a:t>
                       </a:r>
                     </a:p>
                   </a:txBody>
@@ -5200,8 +5045,30 @@
                     </a:solidFill>
                   </a:tcPr>
                 </a:tc>
+                <a:tc>
+                  <a:txBody>
+                    <a:bodyPr/>
+                    <a:lstStyle/>
+                    <a:p>
+                      <a:r>
+                        <a:rPr sz="1300" b="0">
+                          <a:solidFill>
+                            <a:srgbClr val="1B1F24"/>
+                          </a:solidFill>
+                          <a:latin typeface="Yu Gothic"/>
+                        </a:rPr>
+                        <a:t>『2024年』→『20年』→ 西暦2038年</a:t>
+                      </a:r>
+                    </a:p>
+                  </a:txBody>
+                  <a:tcPr marT="38100" marB="38100">
+                    <a:solidFill>
+                      <a:srgbClr val="FFFFFF"/>
+                    </a:solidFill>
+                  </a:tcPr>
+                </a:tc>
               </a:tr>
-              <a:tr h="414528">
+              <a:tr h="392360">
                 <a:tc>
                   <a:txBody>
                     <a:bodyPr/>
@@ -5214,7 +5081,7 @@
                           </a:solidFill>
                           <a:latin typeface="Yu Gothic"/>
                         </a:rPr>
-                        <a:t>説明書だけを頼りに触る確認</a:t>
+                        <a:t>記入が無い欄の拾い読みが素通り</a:t>
                       </a:r>
                     </a:p>
                   </a:txBody>
@@ -5236,7 +5103,7 @@
                           </a:solidFill>
                           <a:latin typeface="Yu Gothic"/>
                         </a:rPr>
-                        <a:t>9件（同時実行で落ちる、仕様との食い違い、エラーが利用者に届かない、説明書が無い）</a:t>
+                        <a:t>『摂食の留意事項＝い』が確信度0.816（緑）</a:t>
                       </a:r>
                     </a:p>
                   </a:txBody>
@@ -5246,6 +5113,8 @@
                     </a:solidFill>
                   </a:tcPr>
                 </a:tc>
+              </a:tr>
+              <a:tr h="392360">
                 <a:tc>
                   <a:txBody>
                     <a:bodyPr/>
@@ -5258,7 +5127,259 @@
                           </a:solidFill>
                           <a:latin typeface="Yu Gothic"/>
                         </a:rPr>
-                        <a:t>0件</a:t>
+                        <a:t>操作ログに個人情報</a:t>
+                      </a:r>
+                    </a:p>
+                  </a:txBody>
+                  <a:tcPr marT="38100" marB="38100">
+                    <a:solidFill>
+                      <a:srgbClr val="FFFFFF"/>
+                    </a:solidFill>
+                  </a:tcPr>
+                </a:tc>
+                <a:tc>
+                  <a:txBody>
+                    <a:bodyPr/>
+                    <a:lstStyle/>
+                    <a:p>
+                      <a:r>
+                        <a:rPr sz="1300" b="0">
+                          <a:solidFill>
+                            <a:srgbClr val="1B1F24"/>
+                          </a:solidFill>
+                          <a:latin typeface="Yu Gothic"/>
+                        </a:rPr>
+                        <a:t>ファイル名（氏名を含む）と医療機関名が生で残る</a:t>
+                      </a:r>
+                    </a:p>
+                  </a:txBody>
+                  <a:tcPr marT="38100" marB="38100">
+                    <a:solidFill>
+                      <a:srgbClr val="FFFFFF"/>
+                    </a:solidFill>
+                  </a:tcPr>
+                </a:tc>
+              </a:tr>
+              <a:tr h="392360">
+                <a:tc>
+                  <a:txBody>
+                    <a:bodyPr/>
+                    <a:lstStyle/>
+                    <a:p>
+                      <a:r>
+                        <a:rPr sz="1300" b="0">
+                          <a:solidFill>
+                            <a:srgbClr val="1B1F24"/>
+                          </a:solidFill>
+                          <a:latin typeface="Yu Gothic"/>
+                        </a:rPr>
+                        <a:t>編集ログが別の意見書と混ざる</a:t>
+                      </a:r>
+                    </a:p>
+                  </a:txBody>
+                  <a:tcPr marT="38100" marB="38100">
+                    <a:solidFill>
+                      <a:srgbClr val="F2F5F9"/>
+                    </a:solidFill>
+                  </a:tcPr>
+                </a:tc>
+                <a:tc>
+                  <a:txBody>
+                    <a:bodyPr/>
+                    <a:lstStyle/>
+                    <a:p>
+                      <a:r>
+                        <a:rPr sz="1300" b="0">
+                          <a:solidFill>
+                            <a:srgbClr val="1B1F24"/>
+                          </a:solidFill>
+                          <a:latin typeface="Yu Gothic"/>
+                        </a:rPr>
+                        <a:t>存在しない訂正が記録される</a:t>
+                      </a:r>
+                    </a:p>
+                  </a:txBody>
+                  <a:tcPr marT="38100" marB="38100">
+                    <a:solidFill>
+                      <a:srgbClr val="F2F5F9"/>
+                    </a:solidFill>
+                  </a:tcPr>
+                </a:tc>
+              </a:tr>
+              <a:tr h="392360">
+                <a:tc>
+                  <a:txBody>
+                    <a:bodyPr/>
+                    <a:lstStyle/>
+                    <a:p>
+                      <a:r>
+                        <a:rPr sz="1300" b="0">
+                          <a:solidFill>
+                            <a:srgbClr val="1B1F24"/>
+                          </a:solidFill>
+                          <a:latin typeface="Yu Gothic"/>
+                        </a:rPr>
+                        <a:t>欄が画像の端に掛かると落ちる</a:t>
+                      </a:r>
+                    </a:p>
+                  </a:txBody>
+                  <a:tcPr marT="38100" marB="38100">
+                    <a:solidFill>
+                      <a:srgbClr val="FFFFFF"/>
+                    </a:solidFill>
+                  </a:tcPr>
+                </a:tc>
+                <a:tc>
+                  <a:txBody>
+                    <a:bodyPr/>
+                    <a:lstStyle/>
+                    <a:p>
+                      <a:r>
+                        <a:rPr sz="1300" b="0">
+                          <a:solidFill>
+                            <a:srgbClr val="1B1F24"/>
+                          </a:solidFill>
+                          <a:latin typeface="Yu Gothic"/>
+                        </a:rPr>
+                        <a:t>1件まるごと失われる</a:t>
+                      </a:r>
+                    </a:p>
+                  </a:txBody>
+                  <a:tcPr marT="38100" marB="38100">
+                    <a:solidFill>
+                      <a:srgbClr val="FFFFFF"/>
+                    </a:solidFill>
+                  </a:tcPr>
+                </a:tc>
+              </a:tr>
+              <a:tr h="392360">
+                <a:tc>
+                  <a:txBody>
+                    <a:bodyPr/>
+                    <a:lstStyle/>
+                    <a:p>
+                      <a:r>
+                        <a:rPr sz="1300" b="0">
+                          <a:solidFill>
+                            <a:srgbClr val="1B1F24"/>
+                          </a:solidFill>
+                          <a:latin typeface="Yu Gothic"/>
+                        </a:rPr>
+                        <a:t>ふりがな欄が必ず空になる</a:t>
+                      </a:r>
+                    </a:p>
+                  </a:txBody>
+                  <a:tcPr marT="38100" marB="38100">
+                    <a:solidFill>
+                      <a:srgbClr val="F2F5F9"/>
+                    </a:solidFill>
+                  </a:tcPr>
+                </a:tc>
+                <a:tc>
+                  <a:txBody>
+                    <a:bodyPr/>
+                    <a:lstStyle/>
+                    <a:p>
+                      <a:r>
+                        <a:rPr sz="1300" b="0">
+                          <a:solidFill>
+                            <a:srgbClr val="1B1F24"/>
+                          </a:solidFill>
+                          <a:latin typeface="Yu Gothic"/>
+                        </a:rPr>
+                        <a:t>読めていたのに、文字種の指定で全部捨てていた（0.00%）</a:t>
+                      </a:r>
+                    </a:p>
+                  </a:txBody>
+                  <a:tcPr marT="38100" marB="38100">
+                    <a:solidFill>
+                      <a:srgbClr val="F2F5F9"/>
+                    </a:solidFill>
+                  </a:tcPr>
+                </a:tc>
+              </a:tr>
+              <a:tr h="392360">
+                <a:tc>
+                  <a:txBody>
+                    <a:bodyPr/>
+                    <a:lstStyle/>
+                    <a:p>
+                      <a:r>
+                        <a:rPr sz="1300" b="0">
+                          <a:solidFill>
+                            <a:srgbClr val="1B1F24"/>
+                          </a:solidFill>
+                          <a:latin typeface="Yu Gothic"/>
+                        </a:rPr>
+                        <a:t>診断名が粗い分類に化ける</a:t>
+                      </a:r>
+                    </a:p>
+                  </a:txBody>
+                  <a:tcPr marT="38100" marB="38100">
+                    <a:solidFill>
+                      <a:srgbClr val="FFFFFF"/>
+                    </a:solidFill>
+                  </a:tcPr>
+                </a:tc>
+                <a:tc>
+                  <a:txBody>
+                    <a:bodyPr/>
+                    <a:lstStyle/>
+                    <a:p>
+                      <a:r>
+                        <a:rPr sz="1300" b="0">
+                          <a:solidFill>
+                            <a:srgbClr val="1B1F24"/>
+                          </a:solidFill>
+                          <a:latin typeface="Yu Gothic"/>
+                        </a:rPr>
+                        <a:t>『右大腿骨頸部骨折術後』→『大腿骨頸部骨折』（右・術後が消える）</a:t>
+                      </a:r>
+                    </a:p>
+                  </a:txBody>
+                  <a:tcPr marT="38100" marB="38100">
+                    <a:solidFill>
+                      <a:srgbClr val="FFFFFF"/>
+                    </a:solidFill>
+                  </a:tcPr>
+                </a:tc>
+              </a:tr>
+              <a:tr h="392368">
+                <a:tc>
+                  <a:txBody>
+                    <a:bodyPr/>
+                    <a:lstStyle/>
+                    <a:p>
+                      <a:r>
+                        <a:rPr sz="1300" b="0">
+                          <a:solidFill>
+                            <a:srgbClr val="1B1F24"/>
+                          </a:solidFill>
+                          <a:latin typeface="Yu Gothic"/>
+                        </a:rPr>
+                        <a:t>同時に2件来るとサーバごと落ちる</a:t>
+                      </a:r>
+                    </a:p>
+                  </a:txBody>
+                  <a:tcPr marT="38100" marB="38100">
+                    <a:solidFill>
+                      <a:srgbClr val="F2F5F9"/>
+                    </a:solidFill>
+                  </a:tcPr>
+                </a:tc>
+                <a:tc>
+                  <a:txBody>
+                    <a:bodyPr/>
+                    <a:lstStyle/>
+                    <a:p>
+                      <a:r>
+                        <a:rPr sz="1300" b="0">
+                          <a:solidFill>
+                            <a:srgbClr val="1B1F24"/>
+                          </a:solidFill>
+                          <a:latin typeface="Yu Gothic"/>
+                        </a:rPr>
+                        <a:t>処理中の全部が巻き添え。小型LLMを共有していた</a:t>
                       </a:r>
                     </a:p>
                   </a:txBody>
@@ -5281,8 +5402,8 @@
         </p:nvSpPr>
         <p:spPr>
           <a:xfrm>
-            <a:off x="685800" y="3931920"/>
-            <a:ext cx="10881360" cy="4572000"/>
+            <a:off x="685800" y="5715000"/>
+            <a:ext cx="10881360" cy="548640"/>
           </a:xfrm>
           <a:prstGeom prst="rect">
             <a:avLst/>
@@ -5297,97 +5418,17 @@
           <a:p>
             <a:pPr algn="l">
               <a:spcBef>
-                <a:spcPts val="1000"/>
-              </a:spcBef>
-            </a:pPr>
-            <a:r>
-              <a:rPr sz="1500" b="1">
-                <a:solidFill>
-                  <a:srgbClr val="1B1F24"/>
-                </a:solidFill>
-                <a:latin typeface="Yu Gothic"/>
-              </a:rPr>
-              <a:t>・9件中1件も重ならなかった</a:t>
-            </a:r>
-          </a:p>
-          <a:p>
-            <a:pPr algn="l">
-              <a:spcBef>
-                <a:spcPts val="200"/>
-              </a:spcBef>
-            </a:pPr>
-            <a:r>
-              <a:rPr sz="1200" b="0">
+                <a:spcPts val="0"/>
+              </a:spcBef>
+            </a:pPr>
+            <a:r>
+              <a:rPr sz="1300" b="0">
                 <a:solidFill>
                   <a:srgbClr val="5B636E"/>
                 </a:solidFill>
                 <a:latin typeface="Yu Gothic"/>
               </a:rPr>
-              <a:t>　　性質がまったく違う。両方やる必要がある</a:t>
-            </a:r>
-          </a:p>
-          <a:p>
-            <a:pPr algn="l">
-              <a:spcBef>
-                <a:spcPts val="1000"/>
-              </a:spcBef>
-            </a:pPr>
-            <a:r>
-              <a:rPr sz="1500" b="1">
-                <a:solidFill>
-                  <a:srgbClr val="1B1F24"/>
-                </a:solidFill>
-                <a:latin typeface="Yu Gothic"/>
-              </a:rPr>
-              <a:t>・利用者目線でいちばん重かった指摘は「説明書が1文字も無い」</a:t>
-            </a:r>
-          </a:p>
-          <a:p>
-            <a:pPr algn="l">
-              <a:spcBef>
-                <a:spcPts val="200"/>
-              </a:spcBef>
-            </a:pPr>
-            <a:r>
-              <a:rPr sz="1200" b="0">
-                <a:solidFill>
-                  <a:srgbClr val="5B636E"/>
-                </a:solidFill>
-                <a:latin typeface="Yu Gothic"/>
-              </a:rPr>
-              <a:t>　　--help だけが手がかりで、何から始めればよいか分からない状態だった</a:t>
-            </a:r>
-          </a:p>
-          <a:p>
-            <a:pPr algn="l">
-              <a:spcBef>
-                <a:spcPts val="1000"/>
-              </a:spcBef>
-            </a:pPr>
-            <a:r>
-              <a:rPr sz="1500" b="1">
-                <a:solidFill>
-                  <a:srgbClr val="1B1F24"/>
-                </a:solidFill>
-                <a:latin typeface="Yu Gothic"/>
-              </a:rPr>
-              <a:t>・測って自分の判断が4回覆った</a:t>
-            </a:r>
-          </a:p>
-          <a:p>
-            <a:pPr algn="l">
-              <a:spcBef>
-                <a:spcPts val="200"/>
-              </a:spcBef>
-            </a:pPr>
-            <a:r>
-              <a:rPr sz="1200" b="0">
-                <a:solidFill>
-                  <a:srgbClr val="5B636E"/>
-                </a:solidFill>
-                <a:latin typeface="Yu Gothic"/>
-              </a:rPr>
-              <a:t>　　輪郭立て＝害 / 切り抜き側の低解像度対応＝効果0 / Lanczosの境目＝変化なし / Lanczos自体＝差なし</a:t>
+              <a:t>同じ判定を Python とブラウザの両方に持つため、同じ入力で値が一致するかを必ず突き合わせる。</a:t>
             </a:r>
           </a:p>
         </p:txBody>
@@ -5479,7 +5520,7 @@
                 </a:solidFill>
                 <a:latin typeface="Yu Gothic"/>
               </a:rPr>
-              <a:t>解像度の低い入力への対応</a:t>
+              <a:t>不具合の見つけ方</a:t>
             </a:r>
           </a:p>
           <a:p>
@@ -5495,7 +5536,7 @@
                 </a:solidFill>
                 <a:latin typeface="Yu Gothic"/>
               </a:rPr>
-              <a:t>人が読める程度に写っていても、機械が読めないことがある</a:t>
+              <a:t>見る人を変えると、出てくるものが変わる</a:t>
             </a:r>
           </a:p>
         </p:txBody>
@@ -5553,8 +5594,8 @@
           <p:nvPr/>
         </p:nvGraphicFramePr>
         <p:xfrm>
-          <a:off x="685800" y="1783080"/>
-          <a:ext cx="8778240" cy="2011680"/>
+          <a:off x="685800" y="1828800"/>
+          <a:ext cx="10789920" cy="1243584"/>
         </p:xfrm>
         <a:graphic>
           <a:graphicData uri="http://schemas.openxmlformats.org/drawingml/2006/table">
@@ -5563,25 +5604,24 @@
                 <a:tableStyleId>{5C22544A-7EE6-4342-B048-85BDC9FD1C3A}</a:tableStyleId>
               </a:tblPr>
               <a:tblGrid>
-                <a:gridCol w="3291840"/>
-                <a:gridCol w="1828800"/>
-                <a:gridCol w="1828800"/>
+                <a:gridCol w="2926080"/>
+                <a:gridCol w="6035040"/>
                 <a:gridCol w="1828800"/>
               </a:tblGrid>
-              <a:tr h="402336">
-                <a:tc>
-                  <a:txBody>
-                    <a:bodyPr/>
-                    <a:lstStyle/>
-                    <a:p>
-                      <a:r>
-                        <a:rPr sz="1400" b="1">
+              <a:tr h="414528">
+                <a:tc>
+                  <a:txBody>
+                    <a:bodyPr/>
+                    <a:lstStyle/>
+                    <a:p>
+                      <a:r>
+                        <a:rPr sz="1300" b="1">
                           <a:solidFill>
                             <a:srgbClr val="FFFFFF"/>
                           </a:solidFill>
                           <a:latin typeface="Yu Gothic"/>
                         </a:rPr>
-                        <a:t>入力</a:t>
+                        <a:t>やり方</a:t>
                       </a:r>
                     </a:p>
                   </a:txBody>
@@ -5597,13 +5637,13 @@
                     <a:lstStyle/>
                     <a:p>
                       <a:r>
-                        <a:rPr sz="1400" b="1">
+                        <a:rPr sz="1300" b="1">
                           <a:solidFill>
                             <a:srgbClr val="FFFFFF"/>
                           </a:solidFill>
                           <a:latin typeface="Yu Gothic"/>
                         </a:rPr>
-                        <a:t>引き伸ばし</a:t>
+                        <a:t>見つかったもの</a:t>
                       </a:r>
                     </a:p>
                   </a:txBody>
@@ -5619,13 +5659,13 @@
                     <a:lstStyle/>
                     <a:p>
                       <a:r>
-                        <a:rPr sz="1400" b="1">
+                        <a:rPr sz="1300" b="1">
                           <a:solidFill>
                             <a:srgbClr val="FFFFFF"/>
                           </a:solidFill>
                           <a:latin typeface="Yu Gothic"/>
                         </a:rPr>
-                        <a:t>対応後</a:t>
+                        <a:t>重なり</a:t>
                       </a:r>
                     </a:p>
                   </a:txBody>
@@ -5635,43 +5675,21 @@
                     </a:solidFill>
                   </a:tcPr>
                 </a:tc>
-                <a:tc>
-                  <a:txBody>
-                    <a:bodyPr/>
-                    <a:lstStyle/>
-                    <a:p>
-                      <a:r>
-                        <a:rPr sz="1400" b="1">
-                          <a:solidFill>
-                            <a:srgbClr val="FFFFFF"/>
-                          </a:solidFill>
-                          <a:latin typeface="Yu Gothic"/>
-                        </a:rPr>
-                        <a:t>対応前</a:t>
-                      </a:r>
-                    </a:p>
-                  </a:txBody>
-                  <a:tcPr marT="38100" marB="38100">
-                    <a:solidFill>
-                      <a:srgbClr val="1E5AA8"/>
-                    </a:solidFill>
-                  </a:tcPr>
-                </a:tc>
               </a:tr>
-              <a:tr h="402336">
-                <a:tc>
-                  <a:txBody>
-                    <a:bodyPr/>
-                    <a:lstStyle/>
-                    <a:p>
-                      <a:r>
-                        <a:rPr sz="1400" b="0">
-                          <a:solidFill>
-                            <a:srgbClr val="1B1F24"/>
-                          </a:solidFill>
-                          <a:latin typeface="Yu Gothic"/>
-                        </a:rPr>
-                        <a:t>200dpi（想定）</a:t>
+              <a:tr h="414528">
+                <a:tc>
+                  <a:txBody>
+                    <a:bodyPr/>
+                    <a:lstStyle/>
+                    <a:p>
+                      <a:r>
+                        <a:rPr sz="1300" b="0">
+                          <a:solidFill>
+                            <a:srgbClr val="1B1F24"/>
+                          </a:solidFill>
+                          <a:latin typeface="Yu Gothic"/>
+                        </a:rPr>
+                        <a:t>コードを読むレビュー</a:t>
                       </a:r>
                     </a:p>
                   </a:txBody>
@@ -5687,13 +5705,13 @@
                     <a:lstStyle/>
                     <a:p>
                       <a:r>
-                        <a:rPr sz="1400" b="0">
-                          <a:solidFill>
-                            <a:srgbClr val="1B1F24"/>
-                          </a:solidFill>
-                          <a:latin typeface="Yu Gothic"/>
-                        </a:rPr>
-                        <a:t>1.0 倍</a:t>
+                        <a:rPr sz="1300" b="0">
+                          <a:solidFill>
+                            <a:srgbClr val="1B1F24"/>
+                          </a:solidFill>
+                          <a:latin typeface="Yu Gothic"/>
+                        </a:rPr>
+                        <a:t>8件（無効になっていた分岐、両版のずれ、境界の1文字違い）</a:t>
                       </a:r>
                     </a:p>
                   </a:txBody>
@@ -5709,13 +5727,13 @@
                     <a:lstStyle/>
                     <a:p>
                       <a:r>
-                        <a:rPr sz="1400" b="0">
-                          <a:solidFill>
-                            <a:srgbClr val="1B1F24"/>
-                          </a:solidFill>
-                          <a:latin typeface="Yu Gothic"/>
-                        </a:rPr>
-                        <a:t>255</a:t>
+                        <a:rPr sz="1300" b="0">
+                          <a:solidFill>
+                            <a:srgbClr val="1B1F24"/>
+                          </a:solidFill>
+                          <a:latin typeface="Yu Gothic"/>
+                        </a:rPr>
+                        <a:t>—</a:t>
                       </a:r>
                     </a:p>
                   </a:txBody>
@@ -5725,43 +5743,21 @@
                     </a:solidFill>
                   </a:tcPr>
                 </a:tc>
-                <a:tc>
-                  <a:txBody>
-                    <a:bodyPr/>
-                    <a:lstStyle/>
-                    <a:p>
-                      <a:r>
-                        <a:rPr sz="1400" b="0">
-                          <a:solidFill>
-                            <a:srgbClr val="1B1F24"/>
-                          </a:solidFill>
-                          <a:latin typeface="Yu Gothic"/>
-                        </a:rPr>
-                        <a:t>255（同じ）</a:t>
-                      </a:r>
-                    </a:p>
-                  </a:txBody>
-                  <a:tcPr marT="38100" marB="38100">
-                    <a:solidFill>
-                      <a:srgbClr val="FFFFFF"/>
-                    </a:solidFill>
-                  </a:tcPr>
-                </a:tc>
               </a:tr>
-              <a:tr h="402336">
-                <a:tc>
-                  <a:txBody>
-                    <a:bodyPr/>
-                    <a:lstStyle/>
-                    <a:p>
-                      <a:r>
-                        <a:rPr sz="1400" b="0">
-                          <a:solidFill>
-                            <a:srgbClr val="1B1F24"/>
-                          </a:solidFill>
-                          <a:latin typeface="Yu Gothic"/>
-                        </a:rPr>
-                        <a:t>150dpi</a:t>
+              <a:tr h="414528">
+                <a:tc>
+                  <a:txBody>
+                    <a:bodyPr/>
+                    <a:lstStyle/>
+                    <a:p>
+                      <a:r>
+                        <a:rPr sz="1300" b="0">
+                          <a:solidFill>
+                            <a:srgbClr val="1B1F24"/>
+                          </a:solidFill>
+                          <a:latin typeface="Yu Gothic"/>
+                        </a:rPr>
+                        <a:t>説明書だけを頼りに触る確認</a:t>
                       </a:r>
                     </a:p>
                   </a:txBody>
@@ -5777,13 +5773,13 @@
                     <a:lstStyle/>
                     <a:p>
                       <a:r>
-                        <a:rPr sz="1400" b="0">
-                          <a:solidFill>
-                            <a:srgbClr val="1B1F24"/>
-                          </a:solidFill>
-                          <a:latin typeface="Yu Gothic"/>
-                        </a:rPr>
-                        <a:t>1.33 倍</a:t>
+                        <a:rPr sz="1300" b="0">
+                          <a:solidFill>
+                            <a:srgbClr val="1B1F24"/>
+                          </a:solidFill>
+                          <a:latin typeface="Yu Gothic"/>
+                        </a:rPr>
+                        <a:t>9件（同時実行で落ちる、仕様との食い違い、エラーが利用者に届かない、説明書が無い）</a:t>
                       </a:r>
                     </a:p>
                   </a:txBody>
@@ -5799,215 +5795,13 @@
                     <a:lstStyle/>
                     <a:p>
                       <a:r>
-                        <a:rPr sz="1400" b="0">
-                          <a:solidFill>
-                            <a:srgbClr val="1B1F24"/>
-                          </a:solidFill>
-                          <a:latin typeface="Yu Gothic"/>
-                        </a:rPr>
-                        <a:t>260</a:t>
-                      </a:r>
-                    </a:p>
-                  </a:txBody>
-                  <a:tcPr marT="38100" marB="38100">
-                    <a:solidFill>
-                      <a:srgbClr val="F2F5F9"/>
-                    </a:solidFill>
-                  </a:tcPr>
-                </a:tc>
-                <a:tc>
-                  <a:txBody>
-                    <a:bodyPr/>
-                    <a:lstStyle/>
-                    <a:p>
-                      <a:r>
-                        <a:rPr sz="1400" b="0">
-                          <a:solidFill>
-                            <a:srgbClr val="1B1F24"/>
-                          </a:solidFill>
-                          <a:latin typeface="Yu Gothic"/>
-                        </a:rPr>
-                        <a:t>256</a:t>
-                      </a:r>
-                    </a:p>
-                  </a:txBody>
-                  <a:tcPr marT="38100" marB="38100">
-                    <a:solidFill>
-                      <a:srgbClr val="F2F5F9"/>
-                    </a:solidFill>
-                  </a:tcPr>
-                </a:tc>
-              </a:tr>
-              <a:tr h="402336">
-                <a:tc>
-                  <a:txBody>
-                    <a:bodyPr/>
-                    <a:lstStyle/>
-                    <a:p>
-                      <a:r>
-                        <a:rPr sz="1400" b="0">
-                          <a:solidFill>
-                            <a:srgbClr val="1B1F24"/>
-                          </a:solidFill>
-                          <a:latin typeface="Yu Gothic"/>
-                        </a:rPr>
-                        <a:t>100dpi</a:t>
-                      </a:r>
-                    </a:p>
-                  </a:txBody>
-                  <a:tcPr marT="38100" marB="38100">
-                    <a:solidFill>
-                      <a:srgbClr val="FFFFFF"/>
-                    </a:solidFill>
-                  </a:tcPr>
-                </a:tc>
-                <a:tc>
-                  <a:txBody>
-                    <a:bodyPr/>
-                    <a:lstStyle/>
-                    <a:p>
-                      <a:r>
-                        <a:rPr sz="1400" b="0">
-                          <a:solidFill>
-                            <a:srgbClr val="1B1F24"/>
-                          </a:solidFill>
-                          <a:latin typeface="Yu Gothic"/>
-                        </a:rPr>
-                        <a:t>2.0 倍</a:t>
-                      </a:r>
-                    </a:p>
-                  </a:txBody>
-                  <a:tcPr marT="38100" marB="38100">
-                    <a:solidFill>
-                      <a:srgbClr val="FFFFFF"/>
-                    </a:solidFill>
-                  </a:tcPr>
-                </a:tc>
-                <a:tc>
-                  <a:txBody>
-                    <a:bodyPr/>
-                    <a:lstStyle/>
-                    <a:p>
-                      <a:r>
-                        <a:rPr sz="1400" b="0">
-                          <a:solidFill>
-                            <a:srgbClr val="1B1F24"/>
-                          </a:solidFill>
-                          <a:latin typeface="Yu Gothic"/>
-                        </a:rPr>
-                        <a:t>244</a:t>
-                      </a:r>
-                    </a:p>
-                  </a:txBody>
-                  <a:tcPr marT="38100" marB="38100">
-                    <a:solidFill>
-                      <a:srgbClr val="FFFFFF"/>
-                    </a:solidFill>
-                  </a:tcPr>
-                </a:tc>
-                <a:tc>
-                  <a:txBody>
-                    <a:bodyPr/>
-                    <a:lstStyle/>
-                    <a:p>
-                      <a:r>
-                        <a:rPr sz="1400" b="0">
-                          <a:solidFill>
-                            <a:srgbClr val="1B1F24"/>
-                          </a:solidFill>
-                          <a:latin typeface="Yu Gothic"/>
-                        </a:rPr>
-                        <a:t>249</a:t>
-                      </a:r>
-                    </a:p>
-                  </a:txBody>
-                  <a:tcPr marT="38100" marB="38100">
-                    <a:solidFill>
-                      <a:srgbClr val="FFFFFF"/>
-                    </a:solidFill>
-                  </a:tcPr>
-                </a:tc>
-              </a:tr>
-              <a:tr h="402336">
-                <a:tc>
-                  <a:txBody>
-                    <a:bodyPr/>
-                    <a:lstStyle/>
-                    <a:p>
-                      <a:r>
-                        <a:rPr sz="1400" b="0">
-                          <a:solidFill>
-                            <a:srgbClr val="1B1F24"/>
-                          </a:solidFill>
-                          <a:latin typeface="Yu Gothic"/>
-                        </a:rPr>
-                        <a:t>75dpi（A4が横600画素）</a:t>
-                      </a:r>
-                    </a:p>
-                  </a:txBody>
-                  <a:tcPr marT="38100" marB="38100">
-                    <a:solidFill>
-                      <a:srgbClr val="F2F5F9"/>
-                    </a:solidFill>
-                  </a:tcPr>
-                </a:tc>
-                <a:tc>
-                  <a:txBody>
-                    <a:bodyPr/>
-                    <a:lstStyle/>
-                    <a:p>
-                      <a:r>
-                        <a:rPr sz="1400" b="0">
-                          <a:solidFill>
-                            <a:srgbClr val="1B1F24"/>
-                          </a:solidFill>
-                          <a:latin typeface="Yu Gothic"/>
-                        </a:rPr>
-                        <a:t>2.66 倍</a:t>
-                      </a:r>
-                    </a:p>
-                  </a:txBody>
-                  <a:tcPr marT="38100" marB="38100">
-                    <a:solidFill>
-                      <a:srgbClr val="F2F5F9"/>
-                    </a:solidFill>
-                  </a:tcPr>
-                </a:tc>
-                <a:tc>
-                  <a:txBody>
-                    <a:bodyPr/>
-                    <a:lstStyle/>
-                    <a:p>
-                      <a:r>
-                        <a:rPr sz="1400" b="0">
-                          <a:solidFill>
-                            <a:srgbClr val="1A7F4B"/>
-                          </a:solidFill>
-                          <a:latin typeface="Yu Gothic"/>
-                        </a:rPr>
-                        <a:t>241</a:t>
-                      </a:r>
-                    </a:p>
-                  </a:txBody>
-                  <a:tcPr marT="38100" marB="38100">
-                    <a:solidFill>
-                      <a:srgbClr val="F2F5F9"/>
-                    </a:solidFill>
-                  </a:tcPr>
-                </a:tc>
-                <a:tc>
-                  <a:txBody>
-                    <a:bodyPr/>
-                    <a:lstStyle/>
-                    <a:p>
-                      <a:r>
-                        <a:rPr sz="1400" b="0">
-                          <a:solidFill>
-                            <a:srgbClr val="1B1F24"/>
-                          </a:solidFill>
-                          <a:latin typeface="Yu Gothic"/>
-                        </a:rPr>
-                        <a:t>225</a:t>
+                        <a:rPr sz="1300" b="0">
+                          <a:solidFill>
+                            <a:srgbClr val="1B1F24"/>
+                          </a:solidFill>
+                          <a:latin typeface="Yu Gothic"/>
+                        </a:rPr>
+                        <a:t>0件</a:t>
                       </a:r>
                     </a:p>
                   </a:txBody>
@@ -6030,7 +5824,7 @@
         </p:nvSpPr>
         <p:spPr>
           <a:xfrm>
-            <a:off x="685800" y="4023360"/>
+            <a:off x="685800" y="3931920"/>
             <a:ext cx="10881360" cy="4572000"/>
           </a:xfrm>
           <a:prstGeom prst="rect">
@@ -6056,7 +5850,7 @@
                 </a:solidFill>
                 <a:latin typeface="Yu Gothic"/>
               </a:rPr>
-              <a:t>・要は「位置合わせの1行」だった</a:t>
+              <a:t>・9件中1件も重ならなかった</a:t>
             </a:r>
           </a:p>
           <a:p>
@@ -6072,7 +5866,7 @@
                 </a:solidFill>
                 <a:latin typeface="Yu Gothic"/>
               </a:rPr>
-              <a:t>　　テンプレートの大きさに合わせる所で線形補間を使っていた。にじんで細い線が消え、あとでいくら拡大しても戻らない</a:t>
+              <a:t>　　性質がまったく違う。両方やる必要がある</a:t>
             </a:r>
           </a:p>
           <a:p>
@@ -6088,7 +5882,7 @@
                 </a:solidFill>
                 <a:latin typeface="Yu Gothic"/>
               </a:rPr>
-              <a:t>・切り抜き側をいじっても効果は0だった</a:t>
+              <a:t>・利用者目線でいちばん重かった指摘は「説明書が1文字も無い」</a:t>
             </a:r>
           </a:p>
           <a:p>
@@ -6104,7 +5898,7 @@
                 </a:solidFill>
                 <a:latin typeface="Yu Gothic"/>
               </a:rPr>
-              <a:t>　　位置合わせで既に引き伸ばされているため、分岐に一度も入っていなかった。測って初めて分かった</a:t>
+              <a:t>　　--help だけが手がかりで、何から始めればよいか分からない状態だった</a:t>
             </a:r>
           </a:p>
           <a:p>
@@ -6120,7 +5914,7 @@
                 </a:solidFill>
                 <a:latin typeface="Yu Gothic"/>
               </a:rPr>
-              <a:t>・輪郭を立てる処理は悪化したので入れていない</a:t>
+              <a:t>・測って自分の判断が4回覆った</a:t>
             </a:r>
           </a:p>
           <a:p>
@@ -6136,7 +5930,7 @@
                 </a:solidFill>
                 <a:latin typeface="Yu Gothic"/>
               </a:rPr>
-              <a:t>　　100dpi で 年74.0% → 70.2%</a:t>
+              <a:t>　　輪郭立て＝害 / 切り抜き側の低解像度対応＝効果0 / Lanczosの境目＝変化なし / Lanczos自体＝差なし</a:t>
             </a:r>
           </a:p>
         </p:txBody>
@@ -6144,45 +5938,6 @@
       <p:sp>
         <p:nvSpPr>
           <p:cNvPr id="6" name="TextBox 5"/>
-          <p:cNvSpPr txBox="1"/>
-          <p:nvPr/>
-        </p:nvSpPr>
-        <p:spPr>
-          <a:xfrm>
-            <a:off x="685800" y="5943600"/>
-            <a:ext cx="10881360" cy="548640"/>
-          </a:xfrm>
-          <a:prstGeom prst="rect">
-            <a:avLst/>
-          </a:prstGeom>
-          <a:noFill/>
-        </p:spPr>
-        <p:txBody>
-          <a:bodyPr wrap="square">
-            <a:spAutoFit/>
-          </a:bodyPr>
-          <a:lstStyle/>
-          <a:p>
-            <a:pPr algn="l">
-              <a:spcBef>
-                <a:spcPts val="0"/>
-              </a:spcBef>
-            </a:pPr>
-            <a:r>
-              <a:rPr sz="1300" b="0">
-                <a:solidFill>
-                  <a:srgbClr val="5B636E"/>
-                </a:solidFill>
-                <a:latin typeface="Yu Gothic"/>
-              </a:rPr>
-              <a:t>表の数字は20通・日付284件の正解数。低い解像度ほど効きが大きい。</a:t>
-            </a:r>
-          </a:p>
-        </p:txBody>
-      </p:sp>
-      <p:sp>
-        <p:nvSpPr>
-          <p:cNvPr id="7" name="TextBox 6"/>
           <p:cNvSpPr txBox="1"/>
           <p:nvPr/>
         </p:nvSpPr>
@@ -6267,7 +6022,7 @@
                 </a:solidFill>
                 <a:latin typeface="Yu Gothic"/>
               </a:rPr>
-              <a:t>デジタル庁「源内」への接続（受け口だけ用意・既定は閉）</a:t>
+              <a:t>解像度の低い入力への対応</a:t>
             </a:r>
           </a:p>
           <a:p>
@@ -6283,7 +6038,7 @@
                 </a:solidFill>
                 <a:latin typeface="Yu Gothic"/>
               </a:rPr>
-              <a:t>組み込みの可否を検討した結果</a:t>
+              <a:t>人が読める程度に写っていても、機械が読めないことがある</a:t>
             </a:r>
           </a:p>
         </p:txBody>
@@ -6342,7 +6097,7 @@
         </p:nvGraphicFramePr>
         <p:xfrm>
           <a:off x="685800" y="1783080"/>
-          <a:ext cx="10789920" cy="1627632"/>
+          <a:ext cx="8778240" cy="2011680"/>
         </p:xfrm>
         <a:graphic>
           <a:graphicData uri="http://schemas.openxmlformats.org/drawingml/2006/table">
@@ -6351,23 +6106,25 @@
                 <a:tableStyleId>{5C22544A-7EE6-4342-B048-85BDC9FD1C3A}</a:tableStyleId>
               </a:tblPr>
               <a:tblGrid>
-                <a:gridCol w="4023360"/>
-                <a:gridCol w="6766560"/>
+                <a:gridCol w="3291840"/>
+                <a:gridCol w="1828800"/>
+                <a:gridCol w="1828800"/>
+                <a:gridCol w="1828800"/>
               </a:tblGrid>
-              <a:tr h="406908">
-                <a:tc>
-                  <a:txBody>
-                    <a:bodyPr/>
-                    <a:lstStyle/>
-                    <a:p>
-                      <a:r>
-                        <a:rPr sz="1300" b="1">
+              <a:tr h="402336">
+                <a:tc>
+                  <a:txBody>
+                    <a:bodyPr/>
+                    <a:lstStyle/>
+                    <a:p>
+                      <a:r>
+                        <a:rPr sz="1400" b="1">
                           <a:solidFill>
                             <a:srgbClr val="FFFFFF"/>
                           </a:solidFill>
                           <a:latin typeface="Yu Gothic"/>
                         </a:rPr>
-                        <a:t>検討したこと</a:t>
+                        <a:t>入力</a:t>
                       </a:r>
                     </a:p>
                   </a:txBody>
@@ -6383,13 +6140,13 @@
                     <a:lstStyle/>
                     <a:p>
                       <a:r>
-                        <a:rPr sz="1300" b="1">
+                        <a:rPr sz="1400" b="1">
                           <a:solidFill>
                             <a:srgbClr val="FFFFFF"/>
                           </a:solidFill>
                           <a:latin typeface="Yu Gothic"/>
                         </a:rPr>
-                        <a:t>結論</a:t>
+                        <a:t>引き伸ばし</a:t>
                       </a:r>
                     </a:p>
                   </a:txBody>
@@ -6399,21 +6156,65 @@
                     </a:solidFill>
                   </a:tcPr>
                 </a:tc>
+                <a:tc>
+                  <a:txBody>
+                    <a:bodyPr/>
+                    <a:lstStyle/>
+                    <a:p>
+                      <a:r>
+                        <a:rPr sz="1400" b="1">
+                          <a:solidFill>
+                            <a:srgbClr val="FFFFFF"/>
+                          </a:solidFill>
+                          <a:latin typeface="Yu Gothic"/>
+                        </a:rPr>
+                        <a:t>対応後</a:t>
+                      </a:r>
+                    </a:p>
+                  </a:txBody>
+                  <a:tcPr marT="38100" marB="38100">
+                    <a:solidFill>
+                      <a:srgbClr val="1E5AA8"/>
+                    </a:solidFill>
+                  </a:tcPr>
+                </a:tc>
+                <a:tc>
+                  <a:txBody>
+                    <a:bodyPr/>
+                    <a:lstStyle/>
+                    <a:p>
+                      <a:r>
+                        <a:rPr sz="1400" b="1">
+                          <a:solidFill>
+                            <a:srgbClr val="FFFFFF"/>
+                          </a:solidFill>
+                          <a:latin typeface="Yu Gothic"/>
+                        </a:rPr>
+                        <a:t>対応前</a:t>
+                      </a:r>
+                    </a:p>
+                  </a:txBody>
+                  <a:tcPr marT="38100" marB="38100">
+                    <a:solidFill>
+                      <a:srgbClr val="1E5AA8"/>
+                    </a:solidFill>
+                  </a:tcPr>
+                </a:tc>
               </a:tr>
-              <a:tr h="406908">
-                <a:tc>
-                  <a:txBody>
-                    <a:bodyPr/>
-                    <a:lstStyle/>
-                    <a:p>
-                      <a:r>
-                        <a:rPr sz="1300" b="0">
-                          <a:solidFill>
-                            <a:srgbClr val="1B1F24"/>
-                          </a:solidFill>
-                          <a:latin typeface="Yu Gothic"/>
-                        </a:rPr>
-                        <a:t>genai-web / genai-ai-api のコードを取り込む</a:t>
+              <a:tr h="402336">
+                <a:tc>
+                  <a:txBody>
+                    <a:bodyPr/>
+                    <a:lstStyle/>
+                    <a:p>
+                      <a:r>
+                        <a:rPr sz="1400" b="0">
+                          <a:solidFill>
+                            <a:srgbClr val="1B1F24"/>
+                          </a:solidFill>
+                          <a:latin typeface="Yu Gothic"/>
+                        </a:rPr>
+                        <a:t>200dpi（想定）</a:t>
                       </a:r>
                     </a:p>
                   </a:txBody>
@@ -6429,13 +6230,13 @@
                     <a:lstStyle/>
                     <a:p>
                       <a:r>
-                        <a:rPr sz="1300" b="0">
-                          <a:solidFill>
-                            <a:srgbClr val="1B1F24"/>
-                          </a:solidFill>
-                          <a:latin typeface="Yu Gothic"/>
-                        </a:rPr>
-                        <a:t>しない。前者はAWS CDKの基盤本体、後者はクラウド別のRAG/LLMテンプレート。帳票の読み取りは含まれない</a:t>
+                        <a:rPr sz="1400" b="0">
+                          <a:solidFill>
+                            <a:srgbClr val="1B1F24"/>
+                          </a:solidFill>
+                          <a:latin typeface="Yu Gothic"/>
+                        </a:rPr>
+                        <a:t>1.0 倍</a:t>
                       </a:r>
                     </a:p>
                   </a:txBody>
@@ -6445,21 +6246,65 @@
                     </a:solidFill>
                   </a:tcPr>
                 </a:tc>
+                <a:tc>
+                  <a:txBody>
+                    <a:bodyPr/>
+                    <a:lstStyle/>
+                    <a:p>
+                      <a:r>
+                        <a:rPr sz="1400" b="0">
+                          <a:solidFill>
+                            <a:srgbClr val="1B1F24"/>
+                          </a:solidFill>
+                          <a:latin typeface="Yu Gothic"/>
+                        </a:rPr>
+                        <a:t>255</a:t>
+                      </a:r>
+                    </a:p>
+                  </a:txBody>
+                  <a:tcPr marT="38100" marB="38100">
+                    <a:solidFill>
+                      <a:srgbClr val="FFFFFF"/>
+                    </a:solidFill>
+                  </a:tcPr>
+                </a:tc>
+                <a:tc>
+                  <a:txBody>
+                    <a:bodyPr/>
+                    <a:lstStyle/>
+                    <a:p>
+                      <a:r>
+                        <a:rPr sz="1400" b="0">
+                          <a:solidFill>
+                            <a:srgbClr val="1B1F24"/>
+                          </a:solidFill>
+                          <a:latin typeface="Yu Gothic"/>
+                        </a:rPr>
+                        <a:t>255（同じ）</a:t>
+                      </a:r>
+                    </a:p>
+                  </a:txBody>
+                  <a:tcPr marT="38100" marB="38100">
+                    <a:solidFill>
+                      <a:srgbClr val="FFFFFF"/>
+                    </a:solidFill>
+                  </a:tcPr>
+                </a:tc>
               </a:tr>
-              <a:tr h="406908">
-                <a:tc>
-                  <a:txBody>
-                    <a:bodyPr/>
-                    <a:lstStyle/>
-                    <a:p>
-                      <a:r>
-                        <a:rPr sz="1300" b="0">
-                          <a:solidFill>
-                            <a:srgbClr val="1B1F24"/>
-                          </a:solidFill>
-                          <a:latin typeface="Yu Gothic"/>
-                        </a:rPr>
-                        <a:t>源内のAIアプリとして登録できるようにする</a:t>
+              <a:tr h="402336">
+                <a:tc>
+                  <a:txBody>
+                    <a:bodyPr/>
+                    <a:lstStyle/>
+                    <a:p>
+                      <a:r>
+                        <a:rPr sz="1400" b="0">
+                          <a:solidFill>
+                            <a:srgbClr val="1B1F24"/>
+                          </a:solidFill>
+                          <a:latin typeface="Yu Gothic"/>
+                        </a:rPr>
+                        <a:t>150dpi</a:t>
                       </a:r>
                     </a:p>
                   </a:txBody>
@@ -6475,13 +6320,13 @@
                     <a:lstStyle/>
                     <a:p>
                       <a:r>
-                        <a:rPr sz="1300" b="0">
-                          <a:solidFill>
-                            <a:srgbClr val="1B1F24"/>
-                          </a:solidFill>
-                          <a:latin typeface="Yu Gothic"/>
-                        </a:rPr>
-                        <a:t>受け口を用意した。取り決めは薄いREST（ファイルをbase64で受け、Markdownを返す）</a:t>
+                        <a:rPr sz="1400" b="0">
+                          <a:solidFill>
+                            <a:srgbClr val="1B1F24"/>
+                          </a:solidFill>
+                          <a:latin typeface="Yu Gothic"/>
+                        </a:rPr>
+                        <a:t>1.33 倍</a:t>
                       </a:r>
                     </a:p>
                   </a:txBody>
@@ -6491,21 +6336,65 @@
                     </a:solidFill>
                   </a:tcPr>
                 </a:tc>
+                <a:tc>
+                  <a:txBody>
+                    <a:bodyPr/>
+                    <a:lstStyle/>
+                    <a:p>
+                      <a:r>
+                        <a:rPr sz="1400" b="0">
+                          <a:solidFill>
+                            <a:srgbClr val="1B1F24"/>
+                          </a:solidFill>
+                          <a:latin typeface="Yu Gothic"/>
+                        </a:rPr>
+                        <a:t>260</a:t>
+                      </a:r>
+                    </a:p>
+                  </a:txBody>
+                  <a:tcPr marT="38100" marB="38100">
+                    <a:solidFill>
+                      <a:srgbClr val="F2F5F9"/>
+                    </a:solidFill>
+                  </a:tcPr>
+                </a:tc>
+                <a:tc>
+                  <a:txBody>
+                    <a:bodyPr/>
+                    <a:lstStyle/>
+                    <a:p>
+                      <a:r>
+                        <a:rPr sz="1400" b="0">
+                          <a:solidFill>
+                            <a:srgbClr val="1B1F24"/>
+                          </a:solidFill>
+                          <a:latin typeface="Yu Gothic"/>
+                        </a:rPr>
+                        <a:t>256</a:t>
+                      </a:r>
+                    </a:p>
+                  </a:txBody>
+                  <a:tcPr marT="38100" marB="38100">
+                    <a:solidFill>
+                      <a:srgbClr val="F2F5F9"/>
+                    </a:solidFill>
+                  </a:tcPr>
+                </a:tc>
               </a:tr>
-              <a:tr h="406908">
-                <a:tc>
-                  <a:txBody>
-                    <a:bodyPr/>
-                    <a:lstStyle/>
-                    <a:p>
-                      <a:r>
-                        <a:rPr sz="1300" b="0">
-                          <a:solidFill>
-                            <a:srgbClr val="1B1F24"/>
-                          </a:solidFill>
-                          <a:latin typeface="Yu Gothic"/>
-                        </a:rPr>
-                        <a:t>ライセンス</a:t>
+              <a:tr h="402336">
+                <a:tc>
+                  <a:txBody>
+                    <a:bodyPr/>
+                    <a:lstStyle/>
+                    <a:p>
+                      <a:r>
+                        <a:rPr sz="1400" b="0">
+                          <a:solidFill>
+                            <a:srgbClr val="1B1F24"/>
+                          </a:solidFill>
+                          <a:latin typeface="Yu Gothic"/>
+                        </a:rPr>
+                        <a:t>100dpi</a:t>
                       </a:r>
                     </a:p>
                   </a:txBody>
@@ -6521,19 +6410,153 @@
                     <a:lstStyle/>
                     <a:p>
                       <a:r>
-                        <a:rPr sz="1300" b="0">
-                          <a:solidFill>
-                            <a:srgbClr val="1B1F24"/>
-                          </a:solidFill>
-                          <a:latin typeface="Yu Gothic"/>
-                        </a:rPr>
-                        <a:t>両方とも MIT。障害にならない</a:t>
+                        <a:rPr sz="1400" b="0">
+                          <a:solidFill>
+                            <a:srgbClr val="1B1F24"/>
+                          </a:solidFill>
+                          <a:latin typeface="Yu Gothic"/>
+                        </a:rPr>
+                        <a:t>2.0 倍</a:t>
                       </a:r>
                     </a:p>
                   </a:txBody>
                   <a:tcPr marT="38100" marB="38100">
                     <a:solidFill>
                       <a:srgbClr val="FFFFFF"/>
+                    </a:solidFill>
+                  </a:tcPr>
+                </a:tc>
+                <a:tc>
+                  <a:txBody>
+                    <a:bodyPr/>
+                    <a:lstStyle/>
+                    <a:p>
+                      <a:r>
+                        <a:rPr sz="1400" b="0">
+                          <a:solidFill>
+                            <a:srgbClr val="1B1F24"/>
+                          </a:solidFill>
+                          <a:latin typeface="Yu Gothic"/>
+                        </a:rPr>
+                        <a:t>244</a:t>
+                      </a:r>
+                    </a:p>
+                  </a:txBody>
+                  <a:tcPr marT="38100" marB="38100">
+                    <a:solidFill>
+                      <a:srgbClr val="FFFFFF"/>
+                    </a:solidFill>
+                  </a:tcPr>
+                </a:tc>
+                <a:tc>
+                  <a:txBody>
+                    <a:bodyPr/>
+                    <a:lstStyle/>
+                    <a:p>
+                      <a:r>
+                        <a:rPr sz="1400" b="0">
+                          <a:solidFill>
+                            <a:srgbClr val="1B1F24"/>
+                          </a:solidFill>
+                          <a:latin typeface="Yu Gothic"/>
+                        </a:rPr>
+                        <a:t>249</a:t>
+                      </a:r>
+                    </a:p>
+                  </a:txBody>
+                  <a:tcPr marT="38100" marB="38100">
+                    <a:solidFill>
+                      <a:srgbClr val="FFFFFF"/>
+                    </a:solidFill>
+                  </a:tcPr>
+                </a:tc>
+              </a:tr>
+              <a:tr h="402336">
+                <a:tc>
+                  <a:txBody>
+                    <a:bodyPr/>
+                    <a:lstStyle/>
+                    <a:p>
+                      <a:r>
+                        <a:rPr sz="1400" b="0">
+                          <a:solidFill>
+                            <a:srgbClr val="1B1F24"/>
+                          </a:solidFill>
+                          <a:latin typeface="Yu Gothic"/>
+                        </a:rPr>
+                        <a:t>75dpi（A4が横600画素）</a:t>
+                      </a:r>
+                    </a:p>
+                  </a:txBody>
+                  <a:tcPr marT="38100" marB="38100">
+                    <a:solidFill>
+                      <a:srgbClr val="F2F5F9"/>
+                    </a:solidFill>
+                  </a:tcPr>
+                </a:tc>
+                <a:tc>
+                  <a:txBody>
+                    <a:bodyPr/>
+                    <a:lstStyle/>
+                    <a:p>
+                      <a:r>
+                        <a:rPr sz="1400" b="0">
+                          <a:solidFill>
+                            <a:srgbClr val="1B1F24"/>
+                          </a:solidFill>
+                          <a:latin typeface="Yu Gothic"/>
+                        </a:rPr>
+                        <a:t>2.66 倍</a:t>
+                      </a:r>
+                    </a:p>
+                  </a:txBody>
+                  <a:tcPr marT="38100" marB="38100">
+                    <a:solidFill>
+                      <a:srgbClr val="F2F5F9"/>
+                    </a:solidFill>
+                  </a:tcPr>
+                </a:tc>
+                <a:tc>
+                  <a:txBody>
+                    <a:bodyPr/>
+                    <a:lstStyle/>
+                    <a:p>
+                      <a:r>
+                        <a:rPr sz="1400" b="0">
+                          <a:solidFill>
+                            <a:srgbClr val="1A7F4B"/>
+                          </a:solidFill>
+                          <a:latin typeface="Yu Gothic"/>
+                        </a:rPr>
+                        <a:t>241</a:t>
+                      </a:r>
+                    </a:p>
+                  </a:txBody>
+                  <a:tcPr marT="38100" marB="38100">
+                    <a:solidFill>
+                      <a:srgbClr val="F2F5F9"/>
+                    </a:solidFill>
+                  </a:tcPr>
+                </a:tc>
+                <a:tc>
+                  <a:txBody>
+                    <a:bodyPr/>
+                    <a:lstStyle/>
+                    <a:p>
+                      <a:r>
+                        <a:rPr sz="1400" b="0">
+                          <a:solidFill>
+                            <a:srgbClr val="1B1F24"/>
+                          </a:solidFill>
+                          <a:latin typeface="Yu Gothic"/>
+                        </a:rPr>
+                        <a:t>225</a:t>
+                      </a:r>
+                    </a:p>
+                  </a:txBody>
+                  <a:tcPr marT="38100" marB="38100">
+                    <a:solidFill>
+                      <a:srgbClr val="F2F5F9"/>
                     </a:solidFill>
                   </a:tcPr>
                 </a:tc>
@@ -6550,7 +6573,7 @@
         </p:nvSpPr>
         <p:spPr>
           <a:xfrm>
-            <a:off x="685800" y="4114800"/>
+            <a:off x="685800" y="4023360"/>
             <a:ext cx="10881360" cy="4572000"/>
           </a:xfrm>
           <a:prstGeom prst="rect">
@@ -6576,7 +6599,23 @@
                 </a:solidFill>
                 <a:latin typeface="Yu Gothic"/>
               </a:rPr>
-              <a:t>・既定では閉じている（404）。ikensho serve --gennai と明示したときだけ開く</a:t>
+              <a:t>・要は「位置合わせの1行」だった</a:t>
+            </a:r>
+          </a:p>
+          <a:p>
+            <a:pPr algn="l">
+              <a:spcBef>
+                <a:spcPts val="200"/>
+              </a:spcBef>
+            </a:pPr>
+            <a:r>
+              <a:rPr sz="1200" b="0">
+                <a:solidFill>
+                  <a:srgbClr val="5B636E"/>
+                </a:solidFill>
+                <a:latin typeface="Yu Gothic"/>
+              </a:rPr>
+              <a:t>　　テンプレートの大きさに合わせる所で線形補間を使っていた。にじんで細い線が消え、あとでいくら拡大しても戻らない</a:t>
             </a:r>
           </a:p>
           <a:p>
@@ -6592,7 +6631,7 @@
                 </a:solidFill>
                 <a:latin typeface="Yu Gothic"/>
               </a:rPr>
-              <a:t>・開くと「患者情報は端末から出ない」という前提が変わる</a:t>
+              <a:t>・切り抜き側をいじっても効果は0だった</a:t>
             </a:r>
           </a:p>
           <a:p>
@@ -6608,7 +6647,7 @@
                 </a:solidFill>
                 <a:latin typeface="Yu Gothic"/>
               </a:rPr>
-              <a:t>　　読み取り結果（氏名・生年月日・住所を含む）が源内側に渡り、履歴に残る。運用の取り決めを作ってから開くこと</a:t>
+              <a:t>　　位置合わせで既に引き伸ばされているため、分岐に一度も入っていなかった。測って初めて分かった</a:t>
             </a:r>
           </a:p>
           <a:p>
@@ -6624,7 +6663,23 @@
                 </a:solidFill>
                 <a:latin typeface="Yu Gothic"/>
               </a:rPr>
-              <a:t>・登録するかどうかは利用側の判断。技術的な準備だけ済ませてある</a:t>
+              <a:t>・輪郭を立てる処理は悪化したので入れていない</a:t>
+            </a:r>
+          </a:p>
+          <a:p>
+            <a:pPr algn="l">
+              <a:spcBef>
+                <a:spcPts val="200"/>
+              </a:spcBef>
+            </a:pPr>
+            <a:r>
+              <a:rPr sz="1200" b="0">
+                <a:solidFill>
+                  <a:srgbClr val="5B636E"/>
+                </a:solidFill>
+                <a:latin typeface="Yu Gothic"/>
+              </a:rPr>
+              <a:t>　　100dpi で 年74.0% → 70.2%</a:t>
             </a:r>
           </a:p>
         </p:txBody>
@@ -6632,6 +6687,45 @@
       <p:sp>
         <p:nvSpPr>
           <p:cNvPr id="6" name="TextBox 5"/>
+          <p:cNvSpPr txBox="1"/>
+          <p:nvPr/>
+        </p:nvSpPr>
+        <p:spPr>
+          <a:xfrm>
+            <a:off x="685800" y="5943600"/>
+            <a:ext cx="10881360" cy="548640"/>
+          </a:xfrm>
+          <a:prstGeom prst="rect">
+            <a:avLst/>
+          </a:prstGeom>
+          <a:noFill/>
+        </p:spPr>
+        <p:txBody>
+          <a:bodyPr wrap="square">
+            <a:spAutoFit/>
+          </a:bodyPr>
+          <a:lstStyle/>
+          <a:p>
+            <a:pPr algn="l">
+              <a:spcBef>
+                <a:spcPts val="0"/>
+              </a:spcBef>
+            </a:pPr>
+            <a:r>
+              <a:rPr sz="1300" b="0">
+                <a:solidFill>
+                  <a:srgbClr val="5B636E"/>
+                </a:solidFill>
+                <a:latin typeface="Yu Gothic"/>
+              </a:rPr>
+              <a:t>表の数字は20通・日付284件の正解数。低い解像度ほど効きが大きい。</a:t>
+            </a:r>
+          </a:p>
+        </p:txBody>
+      </p:sp>
+      <p:sp>
+        <p:nvSpPr>
+          <p:cNvPr id="7" name="TextBox 6"/>
           <p:cNvSpPr txBox="1"/>
           <p:nvPr/>
         </p:nvSpPr>
@@ -6716,7 +6810,23 @@
                 </a:solidFill>
                 <a:latin typeface="Yu Gothic"/>
               </a:rPr>
-              <a:t>配布のしかた</a:t>
+              <a:t>デジタル庁「源内」への接続（受け口だけ用意・既定は閉）</a:t>
+            </a:r>
+          </a:p>
+          <a:p>
+            <a:pPr algn="l">
+              <a:spcBef>
+                <a:spcPts val="400"/>
+              </a:spcBef>
+            </a:pPr>
+            <a:r>
+              <a:rPr sz="1400" b="0">
+                <a:solidFill>
+                  <a:srgbClr val="5B636E"/>
+                </a:solidFill>
+                <a:latin typeface="Yu Gothic"/>
+              </a:rPr>
+              <a:t>組み込みの可否を検討した結果</a:t>
             </a:r>
           </a:p>
         </p:txBody>
@@ -6774,8 +6884,8 @@
           <p:nvPr/>
         </p:nvGraphicFramePr>
         <p:xfrm>
-          <a:off x="685800" y="1828800"/>
-          <a:ext cx="10789920" cy="2011680"/>
+          <a:off x="685800" y="1783080"/>
+          <a:ext cx="10789920" cy="1627632"/>
         </p:xfrm>
         <a:graphic>
           <a:graphicData uri="http://schemas.openxmlformats.org/drawingml/2006/table">
@@ -6784,24 +6894,23 @@
                 <a:tableStyleId>{5C22544A-7EE6-4342-B048-85BDC9FD1C3A}</a:tableStyleId>
               </a:tblPr>
               <a:tblGrid>
-                <a:gridCol w="2877312"/>
-                <a:gridCol w="3057144"/>
-                <a:gridCol w="4855464"/>
+                <a:gridCol w="4023360"/>
+                <a:gridCol w="6766560"/>
               </a:tblGrid>
-              <a:tr h="402336">
-                <a:tc>
-                  <a:txBody>
-                    <a:bodyPr/>
-                    <a:lstStyle/>
-                    <a:p>
-                      <a:r>
-                        <a:rPr sz="1400" b="1">
+              <a:tr h="406908">
+                <a:tc>
+                  <a:txBody>
+                    <a:bodyPr/>
+                    <a:lstStyle/>
+                    <a:p>
+                      <a:r>
+                        <a:rPr sz="1300" b="1">
                           <a:solidFill>
                             <a:srgbClr val="FFFFFF"/>
                           </a:solidFill>
                           <a:latin typeface="Yu Gothic"/>
                         </a:rPr>
-                        <a:t>方法</a:t>
+                        <a:t>検討したこと</a:t>
                       </a:r>
                     </a:p>
                   </a:txBody>
@@ -6817,13 +6926,13 @@
                     <a:lstStyle/>
                     <a:p>
                       <a:r>
-                        <a:rPr sz="1400" b="1">
+                        <a:rPr sz="1300" b="1">
                           <a:solidFill>
                             <a:srgbClr val="FFFFFF"/>
                           </a:solidFill>
                           <a:latin typeface="Yu Gothic"/>
                         </a:rPr>
-                        <a:t>対象</a:t>
+                        <a:t>結論</a:t>
                       </a:r>
                     </a:p>
                   </a:txBody>
@@ -6833,43 +6942,21 @@
                     </a:solidFill>
                   </a:tcPr>
                 </a:tc>
-                <a:tc>
-                  <a:txBody>
-                    <a:bodyPr/>
-                    <a:lstStyle/>
-                    <a:p>
-                      <a:r>
-                        <a:rPr sz="1400" b="1">
-                          <a:solidFill>
-                            <a:srgbClr val="FFFFFF"/>
-                          </a:solidFill>
-                          <a:latin typeface="Yu Gothic"/>
-                        </a:rPr>
-                        <a:t>特徴</a:t>
-                      </a:r>
-                    </a:p>
-                  </a:txBody>
-                  <a:tcPr marT="38100" marB="38100">
-                    <a:solidFill>
-                      <a:srgbClr val="1E5AA8"/>
-                    </a:solidFill>
-                  </a:tcPr>
-                </a:tc>
               </a:tr>
-              <a:tr h="402336">
-                <a:tc>
-                  <a:txBody>
-                    <a:bodyPr/>
-                    <a:lstStyle/>
-                    <a:p>
-                      <a:r>
-                        <a:rPr sz="1400" b="0">
-                          <a:solidFill>
-                            <a:srgbClr val="1B1F24"/>
-                          </a:solidFill>
-                          <a:latin typeface="Yu Gothic"/>
-                        </a:rPr>
-                        <a:t>Web版（サーバに設置）</a:t>
+              <a:tr h="406908">
+                <a:tc>
+                  <a:txBody>
+                    <a:bodyPr/>
+                    <a:lstStyle/>
+                    <a:p>
+                      <a:r>
+                        <a:rPr sz="1300" b="0">
+                          <a:solidFill>
+                            <a:srgbClr val="1B1F24"/>
+                          </a:solidFill>
+                          <a:latin typeface="Yu Gothic"/>
+                        </a:rPr>
+                        <a:t>genai-web / genai-ai-api のコードを取り込む</a:t>
                       </a:r>
                     </a:p>
                   </a:txBody>
@@ -6885,13 +6972,13 @@
                     <a:lstStyle/>
                     <a:p>
                       <a:r>
-                        <a:rPr sz="1400" b="0">
-                          <a:solidFill>
-                            <a:srgbClr val="1B1F24"/>
-                          </a:solidFill>
-                          <a:latin typeface="Yu Gothic"/>
-                        </a:rPr>
-                        <a:t>組織で使う</a:t>
+                        <a:rPr sz="1300" b="0">
+                          <a:solidFill>
+                            <a:srgbClr val="1B1F24"/>
+                          </a:solidFill>
+                          <a:latin typeface="Yu Gothic"/>
+                        </a:rPr>
+                        <a:t>しない。前者はAWS CDKの基盤本体、後者はクラウド別のRAG/LLMテンプレート。帳票の読み取りは含まれない</a:t>
                       </a:r>
                     </a:p>
                   </a:txBody>
@@ -6901,19 +6988,67 @@
                     </a:solidFill>
                   </a:tcPr>
                 </a:tc>
-                <a:tc>
-                  <a:txBody>
-                    <a:bodyPr/>
-                    <a:lstStyle/>
-                    <a:p>
-                      <a:r>
-                        <a:rPr sz="1400" b="0">
-                          <a:solidFill>
-                            <a:srgbClr val="1B1F24"/>
-                          </a:solidFill>
-                          <a:latin typeface="Yu Gothic"/>
-                        </a:rPr>
-                        <a:t>全機能。Basic認証で保護</a:t>
+              </a:tr>
+              <a:tr h="406908">
+                <a:tc>
+                  <a:txBody>
+                    <a:bodyPr/>
+                    <a:lstStyle/>
+                    <a:p>
+                      <a:r>
+                        <a:rPr sz="1300" b="0">
+                          <a:solidFill>
+                            <a:srgbClr val="1B1F24"/>
+                          </a:solidFill>
+                          <a:latin typeface="Yu Gothic"/>
+                        </a:rPr>
+                        <a:t>源内のAIアプリとして登録できるようにする</a:t>
+                      </a:r>
+                    </a:p>
+                  </a:txBody>
+                  <a:tcPr marT="38100" marB="38100">
+                    <a:solidFill>
+                      <a:srgbClr val="F2F5F9"/>
+                    </a:solidFill>
+                  </a:tcPr>
+                </a:tc>
+                <a:tc>
+                  <a:txBody>
+                    <a:bodyPr/>
+                    <a:lstStyle/>
+                    <a:p>
+                      <a:r>
+                        <a:rPr sz="1300" b="0">
+                          <a:solidFill>
+                            <a:srgbClr val="1B1F24"/>
+                          </a:solidFill>
+                          <a:latin typeface="Yu Gothic"/>
+                        </a:rPr>
+                        <a:t>受け口を用意した。取り決めは薄いREST（ファイルをbase64で受け、Markdownを返す）</a:t>
+                      </a:r>
+                    </a:p>
+                  </a:txBody>
+                  <a:tcPr marT="38100" marB="38100">
+                    <a:solidFill>
+                      <a:srgbClr val="F2F5F9"/>
+                    </a:solidFill>
+                  </a:tcPr>
+                </a:tc>
+              </a:tr>
+              <a:tr h="406908">
+                <a:tc>
+                  <a:txBody>
+                    <a:bodyPr/>
+                    <a:lstStyle/>
+                    <a:p>
+                      <a:r>
+                        <a:rPr sz="1300" b="0">
+                          <a:solidFill>
+                            <a:srgbClr val="1B1F24"/>
+                          </a:solidFill>
+                          <a:latin typeface="Yu Gothic"/>
+                        </a:rPr>
+                        <a:t>ライセンス</a:t>
                       </a:r>
                     </a:p>
                   </a:txBody>
@@ -6923,207 +7058,25 @@
                     </a:solidFill>
                   </a:tcPr>
                 </a:tc>
-              </a:tr>
-              <a:tr h="402336">
-                <a:tc>
-                  <a:txBody>
-                    <a:bodyPr/>
-                    <a:lstStyle/>
-                    <a:p>
-                      <a:r>
-                        <a:rPr sz="1400" b="0">
-                          <a:solidFill>
-                            <a:srgbClr val="1B1F24"/>
-                          </a:solidFill>
-                          <a:latin typeface="Yu Gothic"/>
-                        </a:rPr>
-                        <a:t>Python版（pip）</a:t>
-                      </a:r>
-                    </a:p>
-                  </a:txBody>
-                  <a:tcPr marT="38100" marB="38100">
-                    <a:solidFill>
-                      <a:srgbClr val="F2F5F9"/>
-                    </a:solidFill>
-                  </a:tcPr>
-                </a:tc>
-                <a:tc>
-                  <a:txBody>
-                    <a:bodyPr/>
-                    <a:lstStyle/>
-                    <a:p>
-                      <a:r>
-                        <a:rPr sz="1400" b="0">
-                          <a:solidFill>
-                            <a:srgbClr val="1B1F24"/>
-                          </a:solidFill>
-                          <a:latin typeface="Yu Gothic"/>
-                        </a:rPr>
-                        <a:t>Rocky / Ubuntu / macOS</a:t>
-                      </a:r>
-                    </a:p>
-                  </a:txBody>
-                  <a:tcPr marT="38100" marB="38100">
-                    <a:solidFill>
-                      <a:srgbClr val="F2F5F9"/>
-                    </a:solidFill>
-                  </a:tcPr>
-                </a:tc>
-                <a:tc>
-                  <a:txBody>
-                    <a:bodyPr/>
-                    <a:lstStyle/>
-                    <a:p>
-                      <a:r>
-                        <a:rPr sz="1400" b="0">
-                          <a:solidFill>
-                            <a:srgbClr val="1B1F24"/>
-                          </a:solidFill>
-                          <a:latin typeface="Yu Gothic"/>
-                        </a:rPr>
-                        <a:t>大量処理・自動化に向く</a:t>
-                      </a:r>
-                    </a:p>
-                  </a:txBody>
-                  <a:tcPr marT="38100" marB="38100">
-                    <a:solidFill>
-                      <a:srgbClr val="F2F5F9"/>
-                    </a:solidFill>
-                  </a:tcPr>
-                </a:tc>
-              </a:tr>
-              <a:tr h="402336">
-                <a:tc>
-                  <a:txBody>
-                    <a:bodyPr/>
-                    <a:lstStyle/>
-                    <a:p>
-                      <a:r>
-                        <a:rPr sz="1400" b="0">
-                          <a:solidFill>
-                            <a:srgbClr val="1B1F24"/>
-                          </a:solidFill>
-                          <a:latin typeface="Yu Gothic"/>
-                        </a:rPr>
-                        <a:t>Docker</a:t>
+                <a:tc>
+                  <a:txBody>
+                    <a:bodyPr/>
+                    <a:lstStyle/>
+                    <a:p>
+                      <a:r>
+                        <a:rPr sz="1300" b="0">
+                          <a:solidFill>
+                            <a:srgbClr val="1B1F24"/>
+                          </a:solidFill>
+                          <a:latin typeface="Yu Gothic"/>
+                        </a:rPr>
+                        <a:t>両方とも MIT。障害にならない</a:t>
                       </a:r>
                     </a:p>
                   </a:txBody>
                   <a:tcPr marT="38100" marB="38100">
                     <a:solidFill>
                       <a:srgbClr val="FFFFFF"/>
-                    </a:solidFill>
-                  </a:tcPr>
-                </a:tc>
-                <a:tc>
-                  <a:txBody>
-                    <a:bodyPr/>
-                    <a:lstStyle/>
-                    <a:p>
-                      <a:r>
-                        <a:rPr sz="1400" b="0">
-                          <a:solidFill>
-                            <a:srgbClr val="1B1F24"/>
-                          </a:solidFill>
-                          <a:latin typeface="Yu Gothic"/>
-                        </a:rPr>
-                        <a:t>Windows など</a:t>
-                      </a:r>
-                    </a:p>
-                  </a:txBody>
-                  <a:tcPr marT="38100" marB="38100">
-                    <a:solidFill>
-                      <a:srgbClr val="FFFFFF"/>
-                    </a:solidFill>
-                  </a:tcPr>
-                </a:tc>
-                <a:tc>
-                  <a:txBody>
-                    <a:bodyPr/>
-                    <a:lstStyle/>
-                    <a:p>
-                      <a:r>
-                        <a:rPr sz="1400" b="0">
-                          <a:solidFill>
-                            <a:srgbClr val="1B1F24"/>
-                          </a:solidFill>
-                          <a:latin typeface="Yu Gothic"/>
-                        </a:rPr>
-                        <a:t>OS を問わず同じ環境で動く</a:t>
-                      </a:r>
-                    </a:p>
-                  </a:txBody>
-                  <a:tcPr marT="38100" marB="38100">
-                    <a:solidFill>
-                      <a:srgbClr val="FFFFFF"/>
-                    </a:solidFill>
-                  </a:tcPr>
-                </a:tc>
-              </a:tr>
-              <a:tr h="402336">
-                <a:tc>
-                  <a:txBody>
-                    <a:bodyPr/>
-                    <a:lstStyle/>
-                    <a:p>
-                      <a:r>
-                        <a:rPr sz="1400" b="0">
-                          <a:solidFill>
-                            <a:srgbClr val="1B1F24"/>
-                          </a:solidFill>
-                          <a:latin typeface="Yu Gothic"/>
-                        </a:rPr>
-                        <a:t>単一HTMLファイル</a:t>
-                      </a:r>
-                    </a:p>
-                  </a:txBody>
-                  <a:tcPr marT="38100" marB="38100">
-                    <a:solidFill>
-                      <a:srgbClr val="F2F5F9"/>
-                    </a:solidFill>
-                  </a:tcPr>
-                </a:tc>
-                <a:tc>
-                  <a:txBody>
-                    <a:bodyPr/>
-                    <a:lstStyle/>
-                    <a:p>
-                      <a:r>
-                        <a:rPr sz="1400" b="0">
-                          <a:solidFill>
-                            <a:srgbClr val="1B1F24"/>
-                          </a:solidFill>
-                          <a:latin typeface="Yu Gothic"/>
-                        </a:rPr>
-                        <a:t>持ち運び</a:t>
-                      </a:r>
-                    </a:p>
-                  </a:txBody>
-                  <a:tcPr marT="38100" marB="38100">
-                    <a:solidFill>
-                      <a:srgbClr val="F2F5F9"/>
-                    </a:solidFill>
-                  </a:tcPr>
-                </a:tc>
-                <a:tc>
-                  <a:txBody>
-                    <a:bodyPr/>
-                    <a:lstStyle/>
-                    <a:p>
-                      <a:r>
-                        <a:rPr sz="1400" b="0">
-                          <a:solidFill>
-                            <a:srgbClr val="1B1F24"/>
-                          </a:solidFill>
-                          <a:latin typeface="Yu Gothic"/>
-                        </a:rPr>
-                        <a:t>チェック欄のみ（ブラウザの制約でOCRは動かない）</a:t>
-                      </a:r>
-                    </a:p>
-                  </a:txBody>
-                  <a:tcPr marT="38100" marB="38100">
-                    <a:solidFill>
-                      <a:srgbClr val="F2F5F9"/>
                     </a:solidFill>
                   </a:tcPr>
                 </a:tc>
@@ -7140,7 +7093,7 @@
         </p:nvSpPr>
         <p:spPr>
           <a:xfrm>
-            <a:off x="685800" y="4572000"/>
+            <a:off x="685800" y="4114800"/>
             <a:ext cx="10881360" cy="4572000"/>
           </a:xfrm>
           <a:prstGeom prst="rect">
@@ -7166,7 +7119,23 @@
                 </a:solidFill>
                 <a:latin typeface="Yu Gothic"/>
               </a:rPr>
-              <a:t>・辞書・テンプレート・様式定義はデータとして分離</a:t>
+              <a:t>・既定では閉じている（404）。ikensho serve --gennai と明示したときだけ開く</a:t>
+            </a:r>
+          </a:p>
+          <a:p>
+            <a:pPr algn="l">
+              <a:spcBef>
+                <a:spcPts val="1000"/>
+              </a:spcBef>
+            </a:pPr>
+            <a:r>
+              <a:rPr sz="1500" b="1">
+                <a:solidFill>
+                  <a:srgbClr val="1B1F24"/>
+                </a:solidFill>
+                <a:latin typeface="Yu Gothic"/>
+              </a:rPr>
+              <a:t>・開くと「患者情報は端末から出ない」という前提が変わる</a:t>
             </a:r>
           </a:p>
           <a:p>
@@ -7182,7 +7151,23 @@
                 </a:solidFill>
                 <a:latin typeface="Yu Gothic"/>
               </a:rPr>
-              <a:t>　　新しい様式は管理画面から追加できる</a:t>
+              <a:t>　　読み取り結果（氏名・生年月日・住所を含む）が源内側に渡り、履歴に残る。運用の取り決めを作ってから開くこと</a:t>
+            </a:r>
+          </a:p>
+          <a:p>
+            <a:pPr algn="l">
+              <a:spcBef>
+                <a:spcPts val="1000"/>
+              </a:spcBef>
+            </a:pPr>
+            <a:r>
+              <a:rPr sz="1500" b="1">
+                <a:solidFill>
+                  <a:srgbClr val="1B1F24"/>
+                </a:solidFill>
+                <a:latin typeface="Yu Gothic"/>
+              </a:rPr>
+              <a:t>・登録するかどうかは利用側の判断。技術的な準備だけ済ませてある</a:t>
             </a:r>
           </a:p>
         </p:txBody>
@@ -7274,7 +7259,7 @@
                 </a:solidFill>
                 <a:latin typeface="Yu Gothic"/>
               </a:rPr>
-              <a:t>開発の記録</a:t>
+              <a:t>配布のしかた</a:t>
             </a:r>
           </a:p>
         </p:txBody>
@@ -7323,15 +7308,382 @@
           </a:p>
         </p:txBody>
       </p:sp>
-      <p:sp>
-        <p:nvSpPr>
-          <p:cNvPr id="4" name="TextBox 3"/>
+      <p:graphicFrame>
+        <p:nvGraphicFramePr>
+          <p:cNvPr id="4" name="Table 3"/>
+          <p:cNvGraphicFramePr>
+            <a:graphicFrameLocks noGrp="1"/>
+          </p:cNvGraphicFramePr>
+          <p:nvPr/>
+        </p:nvGraphicFramePr>
+        <p:xfrm>
+          <a:off x="685800" y="1828800"/>
+          <a:ext cx="10789920" cy="2011680"/>
+        </p:xfrm>
+        <a:graphic>
+          <a:graphicData uri="http://schemas.openxmlformats.org/drawingml/2006/table">
+            <a:tbl>
+              <a:tblPr firstRow="1" bandRow="1">
+                <a:tableStyleId>{5C22544A-7EE6-4342-B048-85BDC9FD1C3A}</a:tableStyleId>
+              </a:tblPr>
+              <a:tblGrid>
+                <a:gridCol w="2877312"/>
+                <a:gridCol w="3057144"/>
+                <a:gridCol w="4855464"/>
+              </a:tblGrid>
+              <a:tr h="402336">
+                <a:tc>
+                  <a:txBody>
+                    <a:bodyPr/>
+                    <a:lstStyle/>
+                    <a:p>
+                      <a:r>
+                        <a:rPr sz="1400" b="1">
+                          <a:solidFill>
+                            <a:srgbClr val="FFFFFF"/>
+                          </a:solidFill>
+                          <a:latin typeface="Yu Gothic"/>
+                        </a:rPr>
+                        <a:t>方法</a:t>
+                      </a:r>
+                    </a:p>
+                  </a:txBody>
+                  <a:tcPr marT="38100" marB="38100">
+                    <a:solidFill>
+                      <a:srgbClr val="1E5AA8"/>
+                    </a:solidFill>
+                  </a:tcPr>
+                </a:tc>
+                <a:tc>
+                  <a:txBody>
+                    <a:bodyPr/>
+                    <a:lstStyle/>
+                    <a:p>
+                      <a:r>
+                        <a:rPr sz="1400" b="1">
+                          <a:solidFill>
+                            <a:srgbClr val="FFFFFF"/>
+                          </a:solidFill>
+                          <a:latin typeface="Yu Gothic"/>
+                        </a:rPr>
+                        <a:t>対象</a:t>
+                      </a:r>
+                    </a:p>
+                  </a:txBody>
+                  <a:tcPr marT="38100" marB="38100">
+                    <a:solidFill>
+                      <a:srgbClr val="1E5AA8"/>
+                    </a:solidFill>
+                  </a:tcPr>
+                </a:tc>
+                <a:tc>
+                  <a:txBody>
+                    <a:bodyPr/>
+                    <a:lstStyle/>
+                    <a:p>
+                      <a:r>
+                        <a:rPr sz="1400" b="1">
+                          <a:solidFill>
+                            <a:srgbClr val="FFFFFF"/>
+                          </a:solidFill>
+                          <a:latin typeface="Yu Gothic"/>
+                        </a:rPr>
+                        <a:t>特徴</a:t>
+                      </a:r>
+                    </a:p>
+                  </a:txBody>
+                  <a:tcPr marT="38100" marB="38100">
+                    <a:solidFill>
+                      <a:srgbClr val="1E5AA8"/>
+                    </a:solidFill>
+                  </a:tcPr>
+                </a:tc>
+              </a:tr>
+              <a:tr h="402336">
+                <a:tc>
+                  <a:txBody>
+                    <a:bodyPr/>
+                    <a:lstStyle/>
+                    <a:p>
+                      <a:r>
+                        <a:rPr sz="1400" b="0">
+                          <a:solidFill>
+                            <a:srgbClr val="1B1F24"/>
+                          </a:solidFill>
+                          <a:latin typeface="Yu Gothic"/>
+                        </a:rPr>
+                        <a:t>Web版（サーバに設置）</a:t>
+                      </a:r>
+                    </a:p>
+                  </a:txBody>
+                  <a:tcPr marT="38100" marB="38100">
+                    <a:solidFill>
+                      <a:srgbClr val="FFFFFF"/>
+                    </a:solidFill>
+                  </a:tcPr>
+                </a:tc>
+                <a:tc>
+                  <a:txBody>
+                    <a:bodyPr/>
+                    <a:lstStyle/>
+                    <a:p>
+                      <a:r>
+                        <a:rPr sz="1400" b="0">
+                          <a:solidFill>
+                            <a:srgbClr val="1B1F24"/>
+                          </a:solidFill>
+                          <a:latin typeface="Yu Gothic"/>
+                        </a:rPr>
+                        <a:t>組織で使う</a:t>
+                      </a:r>
+                    </a:p>
+                  </a:txBody>
+                  <a:tcPr marT="38100" marB="38100">
+                    <a:solidFill>
+                      <a:srgbClr val="FFFFFF"/>
+                    </a:solidFill>
+                  </a:tcPr>
+                </a:tc>
+                <a:tc>
+                  <a:txBody>
+                    <a:bodyPr/>
+                    <a:lstStyle/>
+                    <a:p>
+                      <a:r>
+                        <a:rPr sz="1400" b="0">
+                          <a:solidFill>
+                            <a:srgbClr val="1B1F24"/>
+                          </a:solidFill>
+                          <a:latin typeface="Yu Gothic"/>
+                        </a:rPr>
+                        <a:t>全機能。Basic認証で保護</a:t>
+                      </a:r>
+                    </a:p>
+                  </a:txBody>
+                  <a:tcPr marT="38100" marB="38100">
+                    <a:solidFill>
+                      <a:srgbClr val="FFFFFF"/>
+                    </a:solidFill>
+                  </a:tcPr>
+                </a:tc>
+              </a:tr>
+              <a:tr h="402336">
+                <a:tc>
+                  <a:txBody>
+                    <a:bodyPr/>
+                    <a:lstStyle/>
+                    <a:p>
+                      <a:r>
+                        <a:rPr sz="1400" b="0">
+                          <a:solidFill>
+                            <a:srgbClr val="1B1F24"/>
+                          </a:solidFill>
+                          <a:latin typeface="Yu Gothic"/>
+                        </a:rPr>
+                        <a:t>Python版（pip）</a:t>
+                      </a:r>
+                    </a:p>
+                  </a:txBody>
+                  <a:tcPr marT="38100" marB="38100">
+                    <a:solidFill>
+                      <a:srgbClr val="F2F5F9"/>
+                    </a:solidFill>
+                  </a:tcPr>
+                </a:tc>
+                <a:tc>
+                  <a:txBody>
+                    <a:bodyPr/>
+                    <a:lstStyle/>
+                    <a:p>
+                      <a:r>
+                        <a:rPr sz="1400" b="0">
+                          <a:solidFill>
+                            <a:srgbClr val="1B1F24"/>
+                          </a:solidFill>
+                          <a:latin typeface="Yu Gothic"/>
+                        </a:rPr>
+                        <a:t>Rocky / Ubuntu / macOS</a:t>
+                      </a:r>
+                    </a:p>
+                  </a:txBody>
+                  <a:tcPr marT="38100" marB="38100">
+                    <a:solidFill>
+                      <a:srgbClr val="F2F5F9"/>
+                    </a:solidFill>
+                  </a:tcPr>
+                </a:tc>
+                <a:tc>
+                  <a:txBody>
+                    <a:bodyPr/>
+                    <a:lstStyle/>
+                    <a:p>
+                      <a:r>
+                        <a:rPr sz="1400" b="0">
+                          <a:solidFill>
+                            <a:srgbClr val="1B1F24"/>
+                          </a:solidFill>
+                          <a:latin typeface="Yu Gothic"/>
+                        </a:rPr>
+                        <a:t>大量処理・自動化に向く</a:t>
+                      </a:r>
+                    </a:p>
+                  </a:txBody>
+                  <a:tcPr marT="38100" marB="38100">
+                    <a:solidFill>
+                      <a:srgbClr val="F2F5F9"/>
+                    </a:solidFill>
+                  </a:tcPr>
+                </a:tc>
+              </a:tr>
+              <a:tr h="402336">
+                <a:tc>
+                  <a:txBody>
+                    <a:bodyPr/>
+                    <a:lstStyle/>
+                    <a:p>
+                      <a:r>
+                        <a:rPr sz="1400" b="0">
+                          <a:solidFill>
+                            <a:srgbClr val="1B1F24"/>
+                          </a:solidFill>
+                          <a:latin typeface="Yu Gothic"/>
+                        </a:rPr>
+                        <a:t>Docker</a:t>
+                      </a:r>
+                    </a:p>
+                  </a:txBody>
+                  <a:tcPr marT="38100" marB="38100">
+                    <a:solidFill>
+                      <a:srgbClr val="FFFFFF"/>
+                    </a:solidFill>
+                  </a:tcPr>
+                </a:tc>
+                <a:tc>
+                  <a:txBody>
+                    <a:bodyPr/>
+                    <a:lstStyle/>
+                    <a:p>
+                      <a:r>
+                        <a:rPr sz="1400" b="0">
+                          <a:solidFill>
+                            <a:srgbClr val="1B1F24"/>
+                          </a:solidFill>
+                          <a:latin typeface="Yu Gothic"/>
+                        </a:rPr>
+                        <a:t>Windows など</a:t>
+                      </a:r>
+                    </a:p>
+                  </a:txBody>
+                  <a:tcPr marT="38100" marB="38100">
+                    <a:solidFill>
+                      <a:srgbClr val="FFFFFF"/>
+                    </a:solidFill>
+                  </a:tcPr>
+                </a:tc>
+                <a:tc>
+                  <a:txBody>
+                    <a:bodyPr/>
+                    <a:lstStyle/>
+                    <a:p>
+                      <a:r>
+                        <a:rPr sz="1400" b="0">
+                          <a:solidFill>
+                            <a:srgbClr val="1B1F24"/>
+                          </a:solidFill>
+                          <a:latin typeface="Yu Gothic"/>
+                        </a:rPr>
+                        <a:t>OS を問わず同じ環境で動く</a:t>
+                      </a:r>
+                    </a:p>
+                  </a:txBody>
+                  <a:tcPr marT="38100" marB="38100">
+                    <a:solidFill>
+                      <a:srgbClr val="FFFFFF"/>
+                    </a:solidFill>
+                  </a:tcPr>
+                </a:tc>
+              </a:tr>
+              <a:tr h="402336">
+                <a:tc>
+                  <a:txBody>
+                    <a:bodyPr/>
+                    <a:lstStyle/>
+                    <a:p>
+                      <a:r>
+                        <a:rPr sz="1400" b="0">
+                          <a:solidFill>
+                            <a:srgbClr val="1B1F24"/>
+                          </a:solidFill>
+                          <a:latin typeface="Yu Gothic"/>
+                        </a:rPr>
+                        <a:t>単一HTMLファイル</a:t>
+                      </a:r>
+                    </a:p>
+                  </a:txBody>
+                  <a:tcPr marT="38100" marB="38100">
+                    <a:solidFill>
+                      <a:srgbClr val="F2F5F9"/>
+                    </a:solidFill>
+                  </a:tcPr>
+                </a:tc>
+                <a:tc>
+                  <a:txBody>
+                    <a:bodyPr/>
+                    <a:lstStyle/>
+                    <a:p>
+                      <a:r>
+                        <a:rPr sz="1400" b="0">
+                          <a:solidFill>
+                            <a:srgbClr val="1B1F24"/>
+                          </a:solidFill>
+                          <a:latin typeface="Yu Gothic"/>
+                        </a:rPr>
+                        <a:t>持ち運び</a:t>
+                      </a:r>
+                    </a:p>
+                  </a:txBody>
+                  <a:tcPr marT="38100" marB="38100">
+                    <a:solidFill>
+                      <a:srgbClr val="F2F5F9"/>
+                    </a:solidFill>
+                  </a:tcPr>
+                </a:tc>
+                <a:tc>
+                  <a:txBody>
+                    <a:bodyPr/>
+                    <a:lstStyle/>
+                    <a:p>
+                      <a:r>
+                        <a:rPr sz="1400" b="0">
+                          <a:solidFill>
+                            <a:srgbClr val="1B1F24"/>
+                          </a:solidFill>
+                          <a:latin typeface="Yu Gothic"/>
+                        </a:rPr>
+                        <a:t>チェック欄のみ（ブラウザの制約でOCRは動かない）</a:t>
+                      </a:r>
+                    </a:p>
+                  </a:txBody>
+                  <a:tcPr marT="38100" marB="38100">
+                    <a:solidFill>
+                      <a:srgbClr val="F2F5F9"/>
+                    </a:solidFill>
+                  </a:tcPr>
+                </a:tc>
+              </a:tr>
+            </a:tbl>
+          </a:graphicData>
+        </a:graphic>
+      </p:graphicFrame>
+      <p:sp>
+        <p:nvSpPr>
+          <p:cNvPr id="5" name="TextBox 4"/>
           <p:cNvSpPr txBox="1"/>
           <p:nvPr/>
         </p:nvSpPr>
         <p:spPr>
           <a:xfrm>
-            <a:off x="685800" y="1691640"/>
+            <a:off x="685800" y="4572000"/>
             <a:ext cx="10881360" cy="4572000"/>
           </a:xfrm>
           <a:prstGeom prst="rect">
@@ -7351,13 +7703,13 @@
               </a:spcBef>
             </a:pPr>
             <a:r>
-              <a:rPr sz="1600" b="1">
+              <a:rPr sz="1500" b="1">
                 <a:solidFill>
                   <a:srgbClr val="1B1F24"/>
                 </a:solidFill>
                 <a:latin typeface="Yu Gothic"/>
               </a:rPr>
-              <a:t>・GitHub の Issue に問題を残している（全 61 件 / 未対応 4 件）</a:t>
+              <a:t>・辞書・テンプレート・様式定義はデータとして分離</a:t>
             </a:r>
           </a:p>
           <a:p>
@@ -7367,116 +7719,20 @@
               </a:spcBef>
             </a:pPr>
             <a:r>
-              <a:rPr sz="1300" b="0">
+              <a:rPr sz="1200" b="0">
                 <a:solidFill>
                   <a:srgbClr val="5B636E"/>
                 </a:solidFill>
                 <a:latin typeface="Yu Gothic"/>
               </a:rPr>
-              <a:t>　　症状・原因・直し方・確認方法をそれぞれに書いている</a:t>
-            </a:r>
-          </a:p>
-          <a:p>
-            <a:pPr algn="l">
-              <a:spcBef>
-                <a:spcPts val="1000"/>
-              </a:spcBef>
-            </a:pPr>
-            <a:r>
-              <a:rPr sz="1600" b="1">
-                <a:solidFill>
-                  <a:srgbClr val="1B1F24"/>
-                </a:solidFill>
-                <a:latin typeface="Yu Gothic"/>
-              </a:rPr>
-              <a:t>・WORKLOG.md（作業ログ）</a:t>
-            </a:r>
-          </a:p>
-          <a:p>
-            <a:pPr algn="l">
-              <a:spcBef>
-                <a:spcPts val="200"/>
-              </a:spcBef>
-            </a:pPr>
-            <a:r>
-              <a:rPr sz="1300" b="0">
-                <a:solidFill>
-                  <a:srgbClr val="5B636E"/>
-                </a:solidFill>
-                <a:latin typeface="Yu Gothic"/>
-              </a:rPr>
-              <a:t>　　どのコミットでどのファイルを何行いじったか、指示への対応状況の対照表</a:t>
-            </a:r>
-          </a:p>
-          <a:p>
-            <a:pPr algn="l">
-              <a:spcBef>
-                <a:spcPts val="1000"/>
-              </a:spcBef>
-            </a:pPr>
-            <a:r>
-              <a:rPr sz="1600" b="1">
-                <a:solidFill>
-                  <a:srgbClr val="1B1F24"/>
-                </a:solidFill>
-                <a:latin typeface="Yu Gothic"/>
-              </a:rPr>
-              <a:t>・DEVNOTES.md（開発メモ）</a:t>
-            </a:r>
-          </a:p>
-          <a:p>
-            <a:pPr algn="l">
-              <a:spcBef>
-                <a:spcPts val="200"/>
-              </a:spcBef>
-            </a:pPr>
-            <a:r>
-              <a:rPr sz="1300" b="0">
-                <a:solidFill>
-                  <a:srgbClr val="5B636E"/>
-                </a:solidFill>
-                <a:latin typeface="Yu Gothic"/>
-              </a:rPr>
-              <a:t>　　設計の経緯、試して駄目だった方法、既知の限界</a:t>
-            </a:r>
-          </a:p>
-          <a:p>
-            <a:pPr algn="l">
-              <a:spcBef>
-                <a:spcPts val="1000"/>
-              </a:spcBef>
-            </a:pPr>
-            <a:r>
-              <a:rPr sz="1600" b="1">
-                <a:solidFill>
-                  <a:srgbClr val="1B1F24"/>
-                </a:solidFill>
-                <a:latin typeface="Yu Gothic"/>
-              </a:rPr>
-              <a:t>・docs/DEVELOPER.md（技術者向け）</a:t>
-            </a:r>
-          </a:p>
-          <a:p>
-            <a:pPr algn="l">
-              <a:spcBef>
-                <a:spcPts val="200"/>
-              </a:spcBef>
-            </a:pPr>
-            <a:r>
-              <a:rPr sz="1300" b="0">
-                <a:solidFill>
-                  <a:srgbClr val="5B636E"/>
-                </a:solidFill>
-                <a:latin typeface="Yu Gothic"/>
-              </a:rPr>
-              <a:t>　　構成、全コマンド、新しい様式の追加手順</a:t>
-            </a:r>
-          </a:p>
-        </p:txBody>
-      </p:sp>
-      <p:sp>
-        <p:nvSpPr>
-          <p:cNvPr id="5" name="TextBox 4"/>
+              <a:t>　　新しい様式は管理画面から追加できる</a:t>
+            </a:r>
+          </a:p>
+        </p:txBody>
+      </p:sp>
+      <p:sp>
+        <p:nvSpPr>
+          <p:cNvPr id="6" name="TextBox 5"/>
           <p:cNvSpPr txBox="1"/>
           <p:nvPr/>
         </p:nvSpPr>
@@ -7561,23 +7817,7 @@
                 </a:solidFill>
                 <a:latin typeface="Yu Gothic"/>
               </a:rPr>
-              <a:t>懸念事項（今わかっている弱点）</a:t>
-            </a:r>
-          </a:p>
-          <a:p>
-            <a:pPr algn="l">
-              <a:spcBef>
-                <a:spcPts val="400"/>
-              </a:spcBef>
-            </a:pPr>
-            <a:r>
-              <a:rPr sz="1400" b="0">
-                <a:solidFill>
-                  <a:srgbClr val="5B636E"/>
-                </a:solidFill>
-                <a:latin typeface="Yu Gothic"/>
-              </a:rPr>
-              <a:t>使う前に知っておいてほしいこと</a:t>
+              <a:t>開発の記録</a:t>
             </a:r>
           </a:p>
         </p:txBody>
@@ -7626,519 +7866,16 @@
           </a:p>
         </p:txBody>
       </p:sp>
-      <p:graphicFrame>
-        <p:nvGraphicFramePr>
-          <p:cNvPr id="4" name="Table 3"/>
-          <p:cNvGraphicFramePr>
-            <a:graphicFrameLocks noGrp="1"/>
-          </p:cNvGraphicFramePr>
-          <p:nvPr/>
-        </p:nvGraphicFramePr>
-        <p:xfrm>
-          <a:off x="685800" y="1737360"/>
-          <a:ext cx="10789919" cy="2779776"/>
-        </p:xfrm>
-        <a:graphic>
-          <a:graphicData uri="http://schemas.openxmlformats.org/drawingml/2006/table">
-            <a:tbl>
-              <a:tblPr firstRow="1" bandRow="1">
-                <a:tableStyleId>{5C22544A-7EE6-4342-B048-85BDC9FD1C3A}</a:tableStyleId>
-              </a:tblPr>
-              <a:tblGrid>
-                <a:gridCol w="2560319"/>
-                <a:gridCol w="4389120"/>
-                <a:gridCol w="3840480"/>
-              </a:tblGrid>
-              <a:tr h="397110">
-                <a:tc>
-                  <a:txBody>
-                    <a:bodyPr/>
-                    <a:lstStyle/>
-                    <a:p>
-                      <a:r>
-                        <a:rPr sz="1200" b="1">
-                          <a:solidFill>
-                            <a:srgbClr val="FFFFFF"/>
-                          </a:solidFill>
-                          <a:latin typeface="Yu Gothic"/>
-                        </a:rPr>
-                        <a:t>懸念</a:t>
-                      </a:r>
-                    </a:p>
-                  </a:txBody>
-                  <a:tcPr marT="38100" marB="38100">
-                    <a:solidFill>
-                      <a:srgbClr val="1E5AA8"/>
-                    </a:solidFill>
-                  </a:tcPr>
-                </a:tc>
-                <a:tc>
-                  <a:txBody>
-                    <a:bodyPr/>
-                    <a:lstStyle/>
-                    <a:p>
-                      <a:r>
-                        <a:rPr sz="1200" b="1">
-                          <a:solidFill>
-                            <a:srgbClr val="FFFFFF"/>
-                          </a:solidFill>
-                          <a:latin typeface="Yu Gothic"/>
-                        </a:rPr>
-                        <a:t>中身</a:t>
-                      </a:r>
-                    </a:p>
-                  </a:txBody>
-                  <a:tcPr marT="38100" marB="38100">
-                    <a:solidFill>
-                      <a:srgbClr val="1E5AA8"/>
-                    </a:solidFill>
-                  </a:tcPr>
-                </a:tc>
-                <a:tc>
-                  <a:txBody>
-                    <a:bodyPr/>
-                    <a:lstStyle/>
-                    <a:p>
-                      <a:r>
-                        <a:rPr sz="1200" b="1">
-                          <a:solidFill>
-                            <a:srgbClr val="FFFFFF"/>
-                          </a:solidFill>
-                          <a:latin typeface="Yu Gothic"/>
-                        </a:rPr>
-                        <a:t>いま言えること</a:t>
-                      </a:r>
-                    </a:p>
-                  </a:txBody>
-                  <a:tcPr marT="38100" marB="38100">
-                    <a:solidFill>
-                      <a:srgbClr val="1E5AA8"/>
-                    </a:solidFill>
-                  </a:tcPr>
-                </a:tc>
-              </a:tr>
-              <a:tr h="397110">
-                <a:tc>
-                  <a:txBody>
-                    <a:bodyPr/>
-                    <a:lstStyle/>
-                    <a:p>
-                      <a:r>
-                        <a:rPr sz="1200" b="0">
-                          <a:solidFill>
-                            <a:srgbClr val="1B1F24"/>
-                          </a:solidFill>
-                          <a:latin typeface="Yu Gothic"/>
-                        </a:rPr>
-                        <a:t>読み取りは完全ではない</a:t>
-                      </a:r>
-                    </a:p>
-                  </a:txBody>
-                  <a:tcPr marT="38100" marB="38100">
-                    <a:solidFill>
-                      <a:srgbClr val="FFFFFF"/>
-                    </a:solidFill>
-                  </a:tcPr>
-                </a:tc>
-                <a:tc>
-                  <a:txBody>
-                    <a:bodyPr/>
-                    <a:lstStyle/>
-                    <a:p>
-                      <a:r>
-                        <a:rPr sz="1200" b="0">
-                          <a:solidFill>
-                            <a:srgbClr val="1B1F24"/>
-                          </a:solidFill>
-                          <a:latin typeface="Yu Gothic"/>
-                        </a:rPr>
-                        <a:t>チェック 99.08%（18,600枠中171件の誤り）、文字 88.4%</a:t>
-                      </a:r>
-                    </a:p>
-                  </a:txBody>
-                  <a:tcPr marT="38100" marB="38100">
-                    <a:solidFill>
-                      <a:srgbClr val="FFFFFF"/>
-                    </a:solidFill>
-                  </a:tcPr>
-                </a:tc>
-                <a:tc>
-                  <a:txBody>
-                    <a:bodyPr/>
-                    <a:lstStyle/>
-                    <a:p>
-                      <a:r>
-                        <a:rPr sz="1200" b="0">
-                          <a:solidFill>
-                            <a:srgbClr val="1B1F24"/>
-                          </a:solidFill>
-                          <a:latin typeface="Yu Gothic"/>
-                        </a:rPr>
-                        <a:t>必ず原本と照らして確認する運用が前提</a:t>
-                      </a:r>
-                    </a:p>
-                  </a:txBody>
-                  <a:tcPr marT="38100" marB="38100">
-                    <a:solidFill>
-                      <a:srgbClr val="FFFFFF"/>
-                    </a:solidFill>
-                  </a:tcPr>
-                </a:tc>
-              </a:tr>
-              <a:tr h="397110">
-                <a:tc>
-                  <a:txBody>
-                    <a:bodyPr/>
-                    <a:lstStyle/>
-                    <a:p>
-                      <a:r>
-                        <a:rPr sz="1200" b="0">
-                          <a:solidFill>
-                            <a:srgbClr val="1B1F24"/>
-                          </a:solidFill>
-                          <a:latin typeface="Yu Gothic"/>
-                        </a:rPr>
-                        <a:t>枠外にはみ出した印</a:t>
-                      </a:r>
-                    </a:p>
-                  </a:txBody>
-                  <a:tcPr marT="38100" marB="38100">
-                    <a:solidFill>
-                      <a:srgbClr val="F2F5F9"/>
-                    </a:solidFill>
-                  </a:tcPr>
-                </a:tc>
-                <a:tc>
-                  <a:txBody>
-                    <a:bodyPr/>
-                    <a:lstStyle/>
-                    <a:p>
-                      <a:r>
-                        <a:rPr sz="1200" b="0">
-                          <a:solidFill>
-                            <a:srgbClr val="1B1F24"/>
-                          </a:solidFill>
-                          <a:latin typeface="Yu Gothic"/>
-                        </a:rPr>
-                        <a:t>正解率45.6%。隣の手書きと見分けが付かない</a:t>
-                      </a:r>
-                    </a:p>
-                  </a:txBody>
-                  <a:tcPr marT="38100" marB="38100">
-                    <a:solidFill>
-                      <a:srgbClr val="F2F5F9"/>
-                    </a:solidFill>
-                  </a:tcPr>
-                </a:tc>
-                <a:tc>
-                  <a:txBody>
-                    <a:bodyPr/>
-                    <a:lstStyle/>
-                    <a:p>
-                      <a:r>
-                        <a:rPr sz="1200" b="0">
-                          <a:solidFill>
-                            <a:srgbClr val="1B1F24"/>
-                          </a:solidFill>
-                          <a:latin typeface="Yu Gothic"/>
-                        </a:rPr>
-                        <a:t>確認画面で人が直す</a:t>
-                      </a:r>
-                    </a:p>
-                  </a:txBody>
-                  <a:tcPr marT="38100" marB="38100">
-                    <a:solidFill>
-                      <a:srgbClr val="F2F5F9"/>
-                    </a:solidFill>
-                  </a:tcPr>
-                </a:tc>
-              </a:tr>
-              <a:tr h="397110">
-                <a:tc>
-                  <a:txBody>
-                    <a:bodyPr/>
-                    <a:lstStyle/>
-                    <a:p>
-                      <a:r>
-                        <a:rPr sz="1200" b="0">
-                          <a:solidFill>
-                            <a:srgbClr val="1B1F24"/>
-                          </a:solidFill>
-                          <a:latin typeface="Yu Gothic"/>
-                        </a:rPr>
-                        <a:t>汚れの多いスキャン</a:t>
-                      </a:r>
-                    </a:p>
-                  </a:txBody>
-                  <a:tcPr marT="38100" marB="38100">
-                    <a:solidFill>
-                      <a:srgbClr val="FFFFFF"/>
-                    </a:solidFill>
-                  </a:tcPr>
-                </a:tc>
-                <a:tc>
-                  <a:txBody>
-                    <a:bodyPr/>
-                    <a:lstStyle/>
-                    <a:p>
-                      <a:r>
-                        <a:rPr sz="1200" b="0">
-                          <a:solidFill>
-                            <a:srgbClr val="1B1F24"/>
-                          </a:solidFill>
-                          <a:latin typeface="Yu Gothic"/>
-                        </a:rPr>
-                        <a:t>誤検出117件のうち79件が3通に集中</a:t>
-                      </a:r>
-                    </a:p>
-                  </a:txBody>
-                  <a:tcPr marT="38100" marB="38100">
-                    <a:solidFill>
-                      <a:srgbClr val="FFFFFF"/>
-                    </a:solidFill>
-                  </a:tcPr>
-                </a:tc>
-                <a:tc>
-                  <a:txBody>
-                    <a:bodyPr/>
-                    <a:lstStyle/>
-                    <a:p>
-                      <a:r>
-                        <a:rPr sz="1200" b="0">
-                          <a:solidFill>
-                            <a:srgbClr val="1B1F24"/>
-                          </a:solidFill>
-                          <a:latin typeface="Yu Gothic"/>
-                        </a:rPr>
-                        <a:t>1通単位で見分ける仕組みが要る（未着手）</a:t>
-                      </a:r>
-                    </a:p>
-                  </a:txBody>
-                  <a:tcPr marT="38100" marB="38100">
-                    <a:solidFill>
-                      <a:srgbClr val="FFFFFF"/>
-                    </a:solidFill>
-                  </a:tcPr>
-                </a:tc>
-              </a:tr>
-              <a:tr h="397110">
-                <a:tc>
-                  <a:txBody>
-                    <a:bodyPr/>
-                    <a:lstStyle/>
-                    <a:p>
-                      <a:r>
-                        <a:rPr sz="1200" b="0">
-                          <a:solidFill>
-                            <a:srgbClr val="1B1F24"/>
-                          </a:solidFill>
-                          <a:latin typeface="Yu Gothic"/>
-                        </a:rPr>
-                        <a:t>解像度の低い入力</a:t>
-                      </a:r>
-                    </a:p>
-                  </a:txBody>
-                  <a:tcPr marT="38100" marB="38100">
-                    <a:solidFill>
-                      <a:srgbClr val="F2F5F9"/>
-                    </a:solidFill>
-                  </a:tcPr>
-                </a:tc>
-                <a:tc>
-                  <a:txBody>
-                    <a:bodyPr/>
-                    <a:lstStyle/>
-                    <a:p>
-                      <a:r>
-                        <a:rPr sz="1200" b="0">
-                          <a:solidFill>
-                            <a:srgbClr val="1B1F24"/>
-                          </a:solidFill>
-                          <a:latin typeface="Yu Gothic"/>
-                        </a:rPr>
-                        <a:t>75dpi 相当でも読めるが、年の精度は落ちる</a:t>
-                      </a:r>
-                    </a:p>
-                  </a:txBody>
-                  <a:tcPr marT="38100" marB="38100">
-                    <a:solidFill>
-                      <a:srgbClr val="F2F5F9"/>
-                    </a:solidFill>
-                  </a:tcPr>
-                </a:tc>
-                <a:tc>
-                  <a:txBody>
-                    <a:bodyPr/>
-                    <a:lstStyle/>
-                    <a:p>
-                      <a:r>
-                        <a:rPr sz="1200" b="0">
-                          <a:solidFill>
-                            <a:srgbClr val="1B1F24"/>
-                          </a:solidFill>
-                          <a:latin typeface="Yu Gothic"/>
-                        </a:rPr>
-                        <a:t>200dpi以上での取り込みを勧める</a:t>
-                      </a:r>
-                    </a:p>
-                  </a:txBody>
-                  <a:tcPr marT="38100" marB="38100">
-                    <a:solidFill>
-                      <a:srgbClr val="F2F5F9"/>
-                    </a:solidFill>
-                  </a:tcPr>
-                </a:tc>
-              </a:tr>
-              <a:tr h="397110">
-                <a:tc>
-                  <a:txBody>
-                    <a:bodyPr/>
-                    <a:lstStyle/>
-                    <a:p>
-                      <a:r>
-                        <a:rPr sz="1200" b="0">
-                          <a:solidFill>
-                            <a:srgbClr val="1B1F24"/>
-                          </a:solidFill>
-                          <a:latin typeface="Yu Gothic"/>
-                        </a:rPr>
-                        <a:t>正解データが1種類</a:t>
-                      </a:r>
-                    </a:p>
-                  </a:txBody>
-                  <a:tcPr marT="38100" marB="38100">
-                    <a:solidFill>
-                      <a:srgbClr val="FFFFFF"/>
-                    </a:solidFill>
-                  </a:tcPr>
-                </a:tc>
-                <a:tc>
-                  <a:txBody>
-                    <a:bodyPr/>
-                    <a:lstStyle/>
-                    <a:p>
-                      <a:r>
-                        <a:rPr sz="1200" b="0">
-                          <a:solidFill>
-                            <a:srgbClr val="1B1F24"/>
-                          </a:solidFill>
-                          <a:latin typeface="Yu Gothic"/>
-                        </a:rPr>
-                        <a:t>100通すべて同じ生成条件。実際の紙とは傾向が違う可能性</a:t>
-                      </a:r>
-                    </a:p>
-                  </a:txBody>
-                  <a:tcPr marT="38100" marB="38100">
-                    <a:solidFill>
-                      <a:srgbClr val="FFFFFF"/>
-                    </a:solidFill>
-                  </a:tcPr>
-                </a:tc>
-                <a:tc>
-                  <a:txBody>
-                    <a:bodyPr/>
-                    <a:lstStyle/>
-                    <a:p>
-                      <a:r>
-                        <a:rPr sz="1200" b="0">
-                          <a:solidFill>
-                            <a:srgbClr val="1B1F24"/>
-                          </a:solidFill>
-                          <a:latin typeface="Yu Gothic"/>
-                        </a:rPr>
-                        <a:t>実データでの検証が要る</a:t>
-                      </a:r>
-                    </a:p>
-                  </a:txBody>
-                  <a:tcPr marT="38100" marB="38100">
-                    <a:solidFill>
-                      <a:srgbClr val="FFFFFF"/>
-                    </a:solidFill>
-                  </a:tcPr>
-                </a:tc>
-              </a:tr>
-              <a:tr h="397116">
-                <a:tc>
-                  <a:txBody>
-                    <a:bodyPr/>
-                    <a:lstStyle/>
-                    <a:p>
-                      <a:r>
-                        <a:rPr sz="1200" b="0">
-                          <a:solidFill>
-                            <a:srgbClr val="1B1F24"/>
-                          </a:solidFill>
-                          <a:latin typeface="Yu Gothic"/>
-                        </a:rPr>
-                        <a:t>源内につなぐと前提が変わる</a:t>
-                      </a:r>
-                    </a:p>
-                  </a:txBody>
-                  <a:tcPr marT="38100" marB="38100">
-                    <a:solidFill>
-                      <a:srgbClr val="F2F5F9"/>
-                    </a:solidFill>
-                  </a:tcPr>
-                </a:tc>
-                <a:tc>
-                  <a:txBody>
-                    <a:bodyPr/>
-                    <a:lstStyle/>
-                    <a:p>
-                      <a:r>
-                        <a:rPr sz="1200" b="0">
-                          <a:solidFill>
-                            <a:srgbClr val="1B1F24"/>
-                          </a:solidFill>
-                          <a:latin typeface="Yu Gothic"/>
-                        </a:rPr>
-                        <a:t>患者情報が端末の外に出る</a:t>
-                      </a:r>
-                    </a:p>
-                  </a:txBody>
-                  <a:tcPr marT="38100" marB="38100">
-                    <a:solidFill>
-                      <a:srgbClr val="F2F5F9"/>
-                    </a:solidFill>
-                  </a:tcPr>
-                </a:tc>
-                <a:tc>
-                  <a:txBody>
-                    <a:bodyPr/>
-                    <a:lstStyle/>
-                    <a:p>
-                      <a:r>
-                        <a:rPr sz="1200" b="0">
-                          <a:solidFill>
-                            <a:srgbClr val="1B1F24"/>
-                          </a:solidFill>
-                          <a:latin typeface="Yu Gothic"/>
-                        </a:rPr>
-                        <a:t>既定は閉。運用の取り決めが先</a:t>
-                      </a:r>
-                    </a:p>
-                  </a:txBody>
-                  <a:tcPr marT="38100" marB="38100">
-                    <a:solidFill>
-                      <a:srgbClr val="F2F5F9"/>
-                    </a:solidFill>
-                  </a:tcPr>
-                </a:tc>
-              </a:tr>
-            </a:tbl>
-          </a:graphicData>
-        </a:graphic>
-      </p:graphicFrame>
-      <p:sp>
-        <p:nvSpPr>
-          <p:cNvPr id="5" name="TextBox 4"/>
+      <p:sp>
+        <p:nvSpPr>
+          <p:cNvPr id="4" name="TextBox 3"/>
           <p:cNvSpPr txBox="1"/>
           <p:nvPr/>
         </p:nvSpPr>
         <p:spPr>
           <a:xfrm>
-            <a:off x="685800" y="5989320"/>
-            <a:ext cx="10881360" cy="548640"/>
+            <a:off x="685800" y="1691640"/>
+            <a:ext cx="10881360" cy="4572000"/>
           </a:xfrm>
           <a:prstGeom prst="rect">
             <a:avLst/>
@@ -8153,24 +7890,136 @@
           <a:p>
             <a:pPr algn="l">
               <a:spcBef>
-                <a:spcPts val="0"/>
-              </a:spcBef>
-            </a:pPr>
-            <a:r>
-              <a:rPr sz="1200" b="0">
+                <a:spcPts val="1000"/>
+              </a:spcBef>
+            </a:pPr>
+            <a:r>
+              <a:rPr sz="1600" b="1">
+                <a:solidFill>
+                  <a:srgbClr val="1B1F24"/>
+                </a:solidFill>
+                <a:latin typeface="Yu Gothic"/>
+              </a:rPr>
+              <a:t>・GitHub の Issue に問題を残している（全 64 件 / 未対応 7 件）</a:t>
+            </a:r>
+          </a:p>
+          <a:p>
+            <a:pPr algn="l">
+              <a:spcBef>
+                <a:spcPts val="200"/>
+              </a:spcBef>
+            </a:pPr>
+            <a:r>
+              <a:rPr sz="1300" b="0">
                 <a:solidFill>
                   <a:srgbClr val="5B636E"/>
                 </a:solidFill>
                 <a:latin typeface="Yu Gothic"/>
               </a:rPr>
-              <a:t>Masaru Sanuki, University of Tsukuba &amp; Department of Biomedical Informatics, University of Tsukuba Hospital</a:t>
-            </a:r>
-          </a:p>
-        </p:txBody>
-      </p:sp>
-      <p:sp>
-        <p:nvSpPr>
-          <p:cNvPr id="6" name="TextBox 5"/>
+              <a:t>　　症状・原因・直し方・確認方法をそれぞれに書いている</a:t>
+            </a:r>
+          </a:p>
+          <a:p>
+            <a:pPr algn="l">
+              <a:spcBef>
+                <a:spcPts val="1000"/>
+              </a:spcBef>
+            </a:pPr>
+            <a:r>
+              <a:rPr sz="1600" b="1">
+                <a:solidFill>
+                  <a:srgbClr val="1B1F24"/>
+                </a:solidFill>
+                <a:latin typeface="Yu Gothic"/>
+              </a:rPr>
+              <a:t>・WORKLOG.md（作業ログ）</a:t>
+            </a:r>
+          </a:p>
+          <a:p>
+            <a:pPr algn="l">
+              <a:spcBef>
+                <a:spcPts val="200"/>
+              </a:spcBef>
+            </a:pPr>
+            <a:r>
+              <a:rPr sz="1300" b="0">
+                <a:solidFill>
+                  <a:srgbClr val="5B636E"/>
+                </a:solidFill>
+                <a:latin typeface="Yu Gothic"/>
+              </a:rPr>
+              <a:t>　　どのコミットでどのファイルを何行いじったか、指示への対応状況の対照表</a:t>
+            </a:r>
+          </a:p>
+          <a:p>
+            <a:pPr algn="l">
+              <a:spcBef>
+                <a:spcPts val="1000"/>
+              </a:spcBef>
+            </a:pPr>
+            <a:r>
+              <a:rPr sz="1600" b="1">
+                <a:solidFill>
+                  <a:srgbClr val="1B1F24"/>
+                </a:solidFill>
+                <a:latin typeface="Yu Gothic"/>
+              </a:rPr>
+              <a:t>・DEVNOTES.md（開発メモ）</a:t>
+            </a:r>
+          </a:p>
+          <a:p>
+            <a:pPr algn="l">
+              <a:spcBef>
+                <a:spcPts val="200"/>
+              </a:spcBef>
+            </a:pPr>
+            <a:r>
+              <a:rPr sz="1300" b="0">
+                <a:solidFill>
+                  <a:srgbClr val="5B636E"/>
+                </a:solidFill>
+                <a:latin typeface="Yu Gothic"/>
+              </a:rPr>
+              <a:t>　　設計の経緯、試して駄目だった方法、既知の限界</a:t>
+            </a:r>
+          </a:p>
+          <a:p>
+            <a:pPr algn="l">
+              <a:spcBef>
+                <a:spcPts val="1000"/>
+              </a:spcBef>
+            </a:pPr>
+            <a:r>
+              <a:rPr sz="1600" b="1">
+                <a:solidFill>
+                  <a:srgbClr val="1B1F24"/>
+                </a:solidFill>
+                <a:latin typeface="Yu Gothic"/>
+              </a:rPr>
+              <a:t>・docs/DEVELOPER.md（技術者向け）</a:t>
+            </a:r>
+          </a:p>
+          <a:p>
+            <a:pPr algn="l">
+              <a:spcBef>
+                <a:spcPts val="200"/>
+              </a:spcBef>
+            </a:pPr>
+            <a:r>
+              <a:rPr sz="1300" b="0">
+                <a:solidFill>
+                  <a:srgbClr val="5B636E"/>
+                </a:solidFill>
+                <a:latin typeface="Yu Gothic"/>
+              </a:rPr>
+              <a:t>　　構成、全コマンド、新しい様式の追加手順</a:t>
+            </a:r>
+          </a:p>
+        </p:txBody>
+      </p:sp>
+      <p:sp>
+        <p:nvSpPr>
+          <p:cNvPr id="5" name="TextBox 4"/>
           <p:cNvSpPr txBox="1"/>
           <p:nvPr/>
         </p:nvSpPr>
@@ -8590,7 +8439,23 @@
                 </a:solidFill>
                 <a:latin typeface="Yu Gothic"/>
               </a:rPr>
-              <a:t>これから</a:t>
+              <a:t>懸念事項（今わかっている弱点）</a:t>
+            </a:r>
+          </a:p>
+          <a:p>
+            <a:pPr algn="l">
+              <a:spcBef>
+                <a:spcPts val="400"/>
+              </a:spcBef>
+            </a:pPr>
+            <a:r>
+              <a:rPr sz="1400" b="0">
+                <a:solidFill>
+                  <a:srgbClr val="5B636E"/>
+                </a:solidFill>
+                <a:latin typeface="Yu Gothic"/>
+              </a:rPr>
+              <a:t>使う前に知っておいてほしいこと</a:t>
             </a:r>
           </a:p>
         </p:txBody>
@@ -8639,6 +8504,752 @@
           </a:p>
         </p:txBody>
       </p:sp>
+      <p:graphicFrame>
+        <p:nvGraphicFramePr>
+          <p:cNvPr id="4" name="Table 3"/>
+          <p:cNvGraphicFramePr>
+            <a:graphicFrameLocks noGrp="1"/>
+          </p:cNvGraphicFramePr>
+          <p:nvPr/>
+        </p:nvGraphicFramePr>
+        <p:xfrm>
+          <a:off x="685800" y="1737360"/>
+          <a:ext cx="10789919" cy="3163824"/>
+        </p:xfrm>
+        <a:graphic>
+          <a:graphicData uri="http://schemas.openxmlformats.org/drawingml/2006/table">
+            <a:tbl>
+              <a:tblPr firstRow="1" bandRow="1">
+                <a:tableStyleId>{5C22544A-7EE6-4342-B048-85BDC9FD1C3A}</a:tableStyleId>
+              </a:tblPr>
+              <a:tblGrid>
+                <a:gridCol w="2560319"/>
+                <a:gridCol w="4389120"/>
+                <a:gridCol w="3840480"/>
+              </a:tblGrid>
+              <a:tr h="395478">
+                <a:tc>
+                  <a:txBody>
+                    <a:bodyPr/>
+                    <a:lstStyle/>
+                    <a:p>
+                      <a:r>
+                        <a:rPr sz="1200" b="1">
+                          <a:solidFill>
+                            <a:srgbClr val="FFFFFF"/>
+                          </a:solidFill>
+                          <a:latin typeface="Yu Gothic"/>
+                        </a:rPr>
+                        <a:t>懸念</a:t>
+                      </a:r>
+                    </a:p>
+                  </a:txBody>
+                  <a:tcPr marT="38100" marB="38100">
+                    <a:solidFill>
+                      <a:srgbClr val="1E5AA8"/>
+                    </a:solidFill>
+                  </a:tcPr>
+                </a:tc>
+                <a:tc>
+                  <a:txBody>
+                    <a:bodyPr/>
+                    <a:lstStyle/>
+                    <a:p>
+                      <a:r>
+                        <a:rPr sz="1200" b="1">
+                          <a:solidFill>
+                            <a:srgbClr val="FFFFFF"/>
+                          </a:solidFill>
+                          <a:latin typeface="Yu Gothic"/>
+                        </a:rPr>
+                        <a:t>中身</a:t>
+                      </a:r>
+                    </a:p>
+                  </a:txBody>
+                  <a:tcPr marT="38100" marB="38100">
+                    <a:solidFill>
+                      <a:srgbClr val="1E5AA8"/>
+                    </a:solidFill>
+                  </a:tcPr>
+                </a:tc>
+                <a:tc>
+                  <a:txBody>
+                    <a:bodyPr/>
+                    <a:lstStyle/>
+                    <a:p>
+                      <a:r>
+                        <a:rPr sz="1200" b="1">
+                          <a:solidFill>
+                            <a:srgbClr val="FFFFFF"/>
+                          </a:solidFill>
+                          <a:latin typeface="Yu Gothic"/>
+                        </a:rPr>
+                        <a:t>いま言えること</a:t>
+                      </a:r>
+                    </a:p>
+                  </a:txBody>
+                  <a:tcPr marT="38100" marB="38100">
+                    <a:solidFill>
+                      <a:srgbClr val="1E5AA8"/>
+                    </a:solidFill>
+                  </a:tcPr>
+                </a:tc>
+              </a:tr>
+              <a:tr h="395478">
+                <a:tc>
+                  <a:txBody>
+                    <a:bodyPr/>
+                    <a:lstStyle/>
+                    <a:p>
+                      <a:r>
+                        <a:rPr sz="1200" b="0">
+                          <a:solidFill>
+                            <a:srgbClr val="1B1F24"/>
+                          </a:solidFill>
+                          <a:latin typeface="Yu Gothic"/>
+                        </a:rPr>
+                        <a:t>読み取りは完全ではない</a:t>
+                      </a:r>
+                    </a:p>
+                  </a:txBody>
+                  <a:tcPr marT="38100" marB="38100">
+                    <a:solidFill>
+                      <a:srgbClr val="FFFFFF"/>
+                    </a:solidFill>
+                  </a:tcPr>
+                </a:tc>
+                <a:tc>
+                  <a:txBody>
+                    <a:bodyPr/>
+                    <a:lstStyle/>
+                    <a:p>
+                      <a:r>
+                        <a:rPr sz="1200" b="0">
+                          <a:solidFill>
+                            <a:srgbClr val="1B1F24"/>
+                          </a:solidFill>
+                          <a:latin typeface="Yu Gothic"/>
+                        </a:rPr>
+                        <a:t>チェック 99.08%（seigo・18,600枠）／89.36%（seigo2・4,895枠）</a:t>
+                      </a:r>
+                    </a:p>
+                  </a:txBody>
+                  <a:tcPr marT="38100" marB="38100">
+                    <a:solidFill>
+                      <a:srgbClr val="FFFFFF"/>
+                    </a:solidFill>
+                  </a:tcPr>
+                </a:tc>
+                <a:tc>
+                  <a:txBody>
+                    <a:bodyPr/>
+                    <a:lstStyle/>
+                    <a:p>
+                      <a:r>
+                        <a:rPr sz="1200" b="0">
+                          <a:solidFill>
+                            <a:srgbClr val="1B1F24"/>
+                          </a:solidFill>
+                          <a:latin typeface="Yu Gothic"/>
+                        </a:rPr>
+                        <a:t>必ず原本と照らして確認する運用が前提</a:t>
+                      </a:r>
+                    </a:p>
+                  </a:txBody>
+                  <a:tcPr marT="38100" marB="38100">
+                    <a:solidFill>
+                      <a:srgbClr val="FFFFFF"/>
+                    </a:solidFill>
+                  </a:tcPr>
+                </a:tc>
+              </a:tr>
+              <a:tr h="395478">
+                <a:tc>
+                  <a:txBody>
+                    <a:bodyPr/>
+                    <a:lstStyle/>
+                    <a:p>
+                      <a:r>
+                        <a:rPr sz="1200" b="0">
+                          <a:solidFill>
+                            <a:srgbClr val="1B1F24"/>
+                          </a:solidFill>
+                          <a:latin typeface="Yu Gothic"/>
+                        </a:rPr>
+                        <a:t>つぶれ・重なりの多い紙</a:t>
+                      </a:r>
+                    </a:p>
+                  </a:txBody>
+                  <a:tcPr marT="38100" marB="38100">
+                    <a:solidFill>
+                      <a:srgbClr val="F2F5F9"/>
+                    </a:solidFill>
+                  </a:tcPr>
+                </a:tc>
+                <a:tc>
+                  <a:txBody>
+                    <a:bodyPr/>
+                    <a:lstStyle/>
+                    <a:p>
+                      <a:r>
+                        <a:rPr sz="1200" b="0">
+                          <a:solidFill>
+                            <a:srgbClr val="1B1F24"/>
+                          </a:solidFill>
+                          <a:latin typeface="Yu Gothic"/>
+                        </a:rPr>
+                        <a:t>チェック66.4% / 文字16.1%。1,000通中219通</a:t>
+                      </a:r>
+                    </a:p>
+                  </a:txBody>
+                  <a:tcPr marT="38100" marB="38100">
+                    <a:solidFill>
+                      <a:srgbClr val="F2F5F9"/>
+                    </a:solidFill>
+                  </a:tcPr>
+                </a:tc>
+                <a:tc>
+                  <a:txBody>
+                    <a:bodyPr/>
+                    <a:lstStyle/>
+                    <a:p>
+                      <a:r>
+                        <a:rPr sz="1200" b="0">
+                          <a:solidFill>
+                            <a:srgbClr val="1B1F24"/>
+                          </a:solidFill>
+                          <a:latin typeface="Yu Gothic"/>
+                        </a:rPr>
+                        <a:t>取り込みの品質がそのまま精度になる</a:t>
+                      </a:r>
+                    </a:p>
+                  </a:txBody>
+                  <a:tcPr marT="38100" marB="38100">
+                    <a:solidFill>
+                      <a:srgbClr val="F2F5F9"/>
+                    </a:solidFill>
+                  </a:tcPr>
+                </a:tc>
+              </a:tr>
+              <a:tr h="395478">
+                <a:tc>
+                  <a:txBody>
+                    <a:bodyPr/>
+                    <a:lstStyle/>
+                    <a:p>
+                      <a:r>
+                        <a:rPr sz="1200" b="0">
+                          <a:solidFill>
+                            <a:srgbClr val="1B1F24"/>
+                          </a:solidFill>
+                          <a:latin typeface="Yu Gothic"/>
+                        </a:rPr>
+                        <a:t>枠外にはみ出した印</a:t>
+                      </a:r>
+                    </a:p>
+                  </a:txBody>
+                  <a:tcPr marT="38100" marB="38100">
+                    <a:solidFill>
+                      <a:srgbClr val="FFFFFF"/>
+                    </a:solidFill>
+                  </a:tcPr>
+                </a:tc>
+                <a:tc>
+                  <a:txBody>
+                    <a:bodyPr/>
+                    <a:lstStyle/>
+                    <a:p>
+                      <a:r>
+                        <a:rPr sz="1200" b="0">
+                          <a:solidFill>
+                            <a:srgbClr val="1B1F24"/>
+                          </a:solidFill>
+                          <a:latin typeface="Yu Gothic"/>
+                        </a:rPr>
+                        <a:t>正解率45.6%。隣の手書きと見分けが付かない</a:t>
+                      </a:r>
+                    </a:p>
+                  </a:txBody>
+                  <a:tcPr marT="38100" marB="38100">
+                    <a:solidFill>
+                      <a:srgbClr val="FFFFFF"/>
+                    </a:solidFill>
+                  </a:tcPr>
+                </a:tc>
+                <a:tc>
+                  <a:txBody>
+                    <a:bodyPr/>
+                    <a:lstStyle/>
+                    <a:p>
+                      <a:r>
+                        <a:rPr sz="1200" b="0">
+                          <a:solidFill>
+                            <a:srgbClr val="1B1F24"/>
+                          </a:solidFill>
+                          <a:latin typeface="Yu Gothic"/>
+                        </a:rPr>
+                        <a:t>確認画面で人が直す</a:t>
+                      </a:r>
+                    </a:p>
+                  </a:txBody>
+                  <a:tcPr marT="38100" marB="38100">
+                    <a:solidFill>
+                      <a:srgbClr val="FFFFFF"/>
+                    </a:solidFill>
+                  </a:tcPr>
+                </a:tc>
+              </a:tr>
+              <a:tr h="395478">
+                <a:tc>
+                  <a:txBody>
+                    <a:bodyPr/>
+                    <a:lstStyle/>
+                    <a:p>
+                      <a:r>
+                        <a:rPr sz="1200" b="0">
+                          <a:solidFill>
+                            <a:srgbClr val="1B1F24"/>
+                          </a:solidFill>
+                          <a:latin typeface="Yu Gothic"/>
+                        </a:rPr>
+                        <a:t>汚れの多いスキャン</a:t>
+                      </a:r>
+                    </a:p>
+                  </a:txBody>
+                  <a:tcPr marT="38100" marB="38100">
+                    <a:solidFill>
+                      <a:srgbClr val="F2F5F9"/>
+                    </a:solidFill>
+                  </a:tcPr>
+                </a:tc>
+                <a:tc>
+                  <a:txBody>
+                    <a:bodyPr/>
+                    <a:lstStyle/>
+                    <a:p>
+                      <a:r>
+                        <a:rPr sz="1200" b="0">
+                          <a:solidFill>
+                            <a:srgbClr val="1B1F24"/>
+                          </a:solidFill>
+                          <a:latin typeface="Yu Gothic"/>
+                        </a:rPr>
+                        <a:t>誤検出117件のうち79件が3通に集中</a:t>
+                      </a:r>
+                    </a:p>
+                  </a:txBody>
+                  <a:tcPr marT="38100" marB="38100">
+                    <a:solidFill>
+                      <a:srgbClr val="F2F5F9"/>
+                    </a:solidFill>
+                  </a:tcPr>
+                </a:tc>
+                <a:tc>
+                  <a:txBody>
+                    <a:bodyPr/>
+                    <a:lstStyle/>
+                    <a:p>
+                      <a:r>
+                        <a:rPr sz="1200" b="0">
+                          <a:solidFill>
+                            <a:srgbClr val="1B1F24"/>
+                          </a:solidFill>
+                          <a:latin typeface="Yu Gothic"/>
+                        </a:rPr>
+                        <a:t>1通単位で見分ける仕組みが要る（未着手）</a:t>
+                      </a:r>
+                    </a:p>
+                  </a:txBody>
+                  <a:tcPr marT="38100" marB="38100">
+                    <a:solidFill>
+                      <a:srgbClr val="F2F5F9"/>
+                    </a:solidFill>
+                  </a:tcPr>
+                </a:tc>
+              </a:tr>
+              <a:tr h="395478">
+                <a:tc>
+                  <a:txBody>
+                    <a:bodyPr/>
+                    <a:lstStyle/>
+                    <a:p>
+                      <a:r>
+                        <a:rPr sz="1200" b="0">
+                          <a:solidFill>
+                            <a:srgbClr val="1B1F24"/>
+                          </a:solidFill>
+                          <a:latin typeface="Yu Gothic"/>
+                        </a:rPr>
+                        <a:t>解像度の低い入力</a:t>
+                      </a:r>
+                    </a:p>
+                  </a:txBody>
+                  <a:tcPr marT="38100" marB="38100">
+                    <a:solidFill>
+                      <a:srgbClr val="FFFFFF"/>
+                    </a:solidFill>
+                  </a:tcPr>
+                </a:tc>
+                <a:tc>
+                  <a:txBody>
+                    <a:bodyPr/>
+                    <a:lstStyle/>
+                    <a:p>
+                      <a:r>
+                        <a:rPr sz="1200" b="0">
+                          <a:solidFill>
+                            <a:srgbClr val="1B1F24"/>
+                          </a:solidFill>
+                          <a:latin typeface="Yu Gothic"/>
+                        </a:rPr>
+                        <a:t>75dpi 相当でも読めるが、年の精度は落ちる</a:t>
+                      </a:r>
+                    </a:p>
+                  </a:txBody>
+                  <a:tcPr marT="38100" marB="38100">
+                    <a:solidFill>
+                      <a:srgbClr val="FFFFFF"/>
+                    </a:solidFill>
+                  </a:tcPr>
+                </a:tc>
+                <a:tc>
+                  <a:txBody>
+                    <a:bodyPr/>
+                    <a:lstStyle/>
+                    <a:p>
+                      <a:r>
+                        <a:rPr sz="1200" b="0">
+                          <a:solidFill>
+                            <a:srgbClr val="1B1F24"/>
+                          </a:solidFill>
+                          <a:latin typeface="Yu Gothic"/>
+                        </a:rPr>
+                        <a:t>200dpi以上での取り込みを勧める</a:t>
+                      </a:r>
+                    </a:p>
+                  </a:txBody>
+                  <a:tcPr marT="38100" marB="38100">
+                    <a:solidFill>
+                      <a:srgbClr val="FFFFFF"/>
+                    </a:solidFill>
+                  </a:tcPr>
+                </a:tc>
+              </a:tr>
+              <a:tr h="395478">
+                <a:tc>
+                  <a:txBody>
+                    <a:bodyPr/>
+                    <a:lstStyle/>
+                    <a:p>
+                      <a:r>
+                        <a:rPr sz="1200" b="0">
+                          <a:solidFill>
+                            <a:srgbClr val="1B1F24"/>
+                          </a:solidFill>
+                          <a:latin typeface="Yu Gothic"/>
+                        </a:rPr>
+                        <a:t>正解データが2種類とも合成</a:t>
+                      </a:r>
+                    </a:p>
+                  </a:txBody>
+                  <a:tcPr marT="38100" marB="38100">
+                    <a:solidFill>
+                      <a:srgbClr val="F2F5F9"/>
+                    </a:solidFill>
+                  </a:tcPr>
+                </a:tc>
+                <a:tc>
+                  <a:txBody>
+                    <a:bodyPr/>
+                    <a:lstStyle/>
+                    <a:p>
+                      <a:r>
+                        <a:rPr sz="1200" b="0">
+                          <a:solidFill>
+                            <a:srgbClr val="1B1F24"/>
+                          </a:solidFill>
+                          <a:latin typeface="Yu Gothic"/>
+                        </a:rPr>
+                        <a:t>seigo 100通・seigo2 1,000通。どちらも生成したもの</a:t>
+                      </a:r>
+                    </a:p>
+                  </a:txBody>
+                  <a:tcPr marT="38100" marB="38100">
+                    <a:solidFill>
+                      <a:srgbClr val="F2F5F9"/>
+                    </a:solidFill>
+                  </a:tcPr>
+                </a:tc>
+                <a:tc>
+                  <a:txBody>
+                    <a:bodyPr/>
+                    <a:lstStyle/>
+                    <a:p>
+                      <a:r>
+                        <a:rPr sz="1200" b="0">
+                          <a:solidFill>
+                            <a:srgbClr val="1B1F24"/>
+                          </a:solidFill>
+                          <a:latin typeface="Yu Gothic"/>
+                        </a:rPr>
+                        <a:t>実データでの検証が要る</a:t>
+                      </a:r>
+                    </a:p>
+                  </a:txBody>
+                  <a:tcPr marT="38100" marB="38100">
+                    <a:solidFill>
+                      <a:srgbClr val="F2F5F9"/>
+                    </a:solidFill>
+                  </a:tcPr>
+                </a:tc>
+              </a:tr>
+              <a:tr h="395478">
+                <a:tc>
+                  <a:txBody>
+                    <a:bodyPr/>
+                    <a:lstStyle/>
+                    <a:p>
+                      <a:r>
+                        <a:rPr sz="1200" b="0">
+                          <a:solidFill>
+                            <a:srgbClr val="1B1F24"/>
+                          </a:solidFill>
+                          <a:latin typeface="Yu Gothic"/>
+                        </a:rPr>
+                        <a:t>源内につなぐと前提が変わる</a:t>
+                      </a:r>
+                    </a:p>
+                  </a:txBody>
+                  <a:tcPr marT="38100" marB="38100">
+                    <a:solidFill>
+                      <a:srgbClr val="FFFFFF"/>
+                    </a:solidFill>
+                  </a:tcPr>
+                </a:tc>
+                <a:tc>
+                  <a:txBody>
+                    <a:bodyPr/>
+                    <a:lstStyle/>
+                    <a:p>
+                      <a:r>
+                        <a:rPr sz="1200" b="0">
+                          <a:solidFill>
+                            <a:srgbClr val="1B1F24"/>
+                          </a:solidFill>
+                          <a:latin typeface="Yu Gothic"/>
+                        </a:rPr>
+                        <a:t>患者情報が端末の外に出る</a:t>
+                      </a:r>
+                    </a:p>
+                  </a:txBody>
+                  <a:tcPr marT="38100" marB="38100">
+                    <a:solidFill>
+                      <a:srgbClr val="FFFFFF"/>
+                    </a:solidFill>
+                  </a:tcPr>
+                </a:tc>
+                <a:tc>
+                  <a:txBody>
+                    <a:bodyPr/>
+                    <a:lstStyle/>
+                    <a:p>
+                      <a:r>
+                        <a:rPr sz="1200" b="0">
+                          <a:solidFill>
+                            <a:srgbClr val="1B1F24"/>
+                          </a:solidFill>
+                          <a:latin typeface="Yu Gothic"/>
+                        </a:rPr>
+                        <a:t>既定は閉。運用の取り決めが先</a:t>
+                      </a:r>
+                    </a:p>
+                  </a:txBody>
+                  <a:tcPr marT="38100" marB="38100">
+                    <a:solidFill>
+                      <a:srgbClr val="FFFFFF"/>
+                    </a:solidFill>
+                  </a:tcPr>
+                </a:tc>
+              </a:tr>
+            </a:tbl>
+          </a:graphicData>
+        </a:graphic>
+      </p:graphicFrame>
+      <p:sp>
+        <p:nvSpPr>
+          <p:cNvPr id="5" name="TextBox 4"/>
+          <p:cNvSpPr txBox="1"/>
+          <p:nvPr/>
+        </p:nvSpPr>
+        <p:spPr>
+          <a:xfrm>
+            <a:off x="685800" y="5989320"/>
+            <a:ext cx="10881360" cy="548640"/>
+          </a:xfrm>
+          <a:prstGeom prst="rect">
+            <a:avLst/>
+          </a:prstGeom>
+          <a:noFill/>
+        </p:spPr>
+        <p:txBody>
+          <a:bodyPr wrap="square">
+            <a:spAutoFit/>
+          </a:bodyPr>
+          <a:lstStyle/>
+          <a:p>
+            <a:pPr algn="l">
+              <a:spcBef>
+                <a:spcPts val="0"/>
+              </a:spcBef>
+            </a:pPr>
+            <a:r>
+              <a:rPr sz="1200" b="0">
+                <a:solidFill>
+                  <a:srgbClr val="5B636E"/>
+                </a:solidFill>
+                <a:latin typeface="Yu Gothic"/>
+              </a:rPr>
+              <a:t>Masaru Sanuki, University of Tsukuba &amp; Department of Biomedical Informatics, University of Tsukuba Hospital</a:t>
+            </a:r>
+          </a:p>
+        </p:txBody>
+      </p:sp>
+      <p:sp>
+        <p:nvSpPr>
+          <p:cNvPr id="6" name="TextBox 5"/>
+          <p:cNvSpPr txBox="1"/>
+          <p:nvPr/>
+        </p:nvSpPr>
+        <p:spPr>
+          <a:xfrm>
+            <a:off x="548640" y="6355080"/>
+            <a:ext cx="11064240" cy="365760"/>
+          </a:xfrm>
+          <a:prstGeom prst="rect">
+            <a:avLst/>
+          </a:prstGeom>
+          <a:noFill/>
+        </p:spPr>
+        <p:txBody>
+          <a:bodyPr wrap="none">
+            <a:spAutoFit/>
+          </a:bodyPr>
+          <a:lstStyle/>
+          <a:p>
+            <a:pPr algn="r"/>
+            <a:r>
+              <a:rPr sz="1000">
+                <a:solidFill>
+                  <a:srgbClr val="5B636E"/>
+                </a:solidFill>
+                <a:latin typeface="Yu Gothic"/>
+              </a:rPr>
+              <a:t>主治医意見書 読み取り　|　20</a:t>
+            </a:r>
+          </a:p>
+        </p:txBody>
+      </p:sp>
+    </p:spTree>
+  </p:cSld>
+  <p:clrMapOvr>
+    <a:masterClrMapping/>
+  </p:clrMapOvr>
+</p:sld>
+</file>
+
+<file path=ppt/slides/slide21.xml><?xml version="1.0" encoding="utf-8"?>
+<p:sld xmlns:a="http://schemas.openxmlformats.org/drawingml/2006/main" xmlns:p="http://schemas.openxmlformats.org/presentationml/2006/main" xmlns:r="http://schemas.openxmlformats.org/officeDocument/2006/relationships">
+  <p:cSld>
+    <p:spTree>
+      <p:nvGrpSpPr>
+        <p:cNvPr id="1" name=""/>
+        <p:cNvGrpSpPr/>
+        <p:nvPr/>
+      </p:nvGrpSpPr>
+      <p:grpSpPr/>
+      <p:sp>
+        <p:nvSpPr>
+          <p:cNvPr id="2" name="TextBox 1"/>
+          <p:cNvSpPr txBox="1"/>
+          <p:nvPr/>
+        </p:nvSpPr>
+        <p:spPr>
+          <a:xfrm>
+            <a:off x="548640" y="384048"/>
+            <a:ext cx="11064240" cy="914400"/>
+          </a:xfrm>
+          <a:prstGeom prst="rect">
+            <a:avLst/>
+          </a:prstGeom>
+          <a:noFill/>
+        </p:spPr>
+        <p:txBody>
+          <a:bodyPr wrap="square">
+            <a:spAutoFit/>
+          </a:bodyPr>
+          <a:lstStyle/>
+          <a:p>
+            <a:pPr algn="l">
+              <a:spcBef>
+                <a:spcPts val="0"/>
+              </a:spcBef>
+            </a:pPr>
+            <a:r>
+              <a:rPr sz="3000" b="1">
+                <a:solidFill>
+                  <a:srgbClr val="1B1F24"/>
+                </a:solidFill>
+                <a:latin typeface="Yu Gothic"/>
+              </a:rPr>
+              <a:t>これから</a:t>
+            </a:r>
+          </a:p>
+        </p:txBody>
+      </p:sp>
+      <p:sp>
+        <p:nvSpPr>
+          <p:cNvPr id="3" name="Rectangle 2"/>
+          <p:cNvSpPr/>
+          <p:nvPr/>
+        </p:nvSpPr>
+        <p:spPr>
+          <a:xfrm>
+            <a:off x="548640" y="1389888"/>
+            <a:ext cx="11064240" cy="11430"/>
+          </a:xfrm>
+          <a:prstGeom prst="rect">
+            <a:avLst/>
+          </a:prstGeom>
+          <a:solidFill>
+            <a:srgbClr val="1E5AA8"/>
+          </a:solidFill>
+          <a:ln>
+            <a:noFill/>
+          </a:ln>
+          <a:effectLst/>
+        </p:spPr>
+        <p:style>
+          <a:lnRef idx="1">
+            <a:schemeClr val="accent1"/>
+          </a:lnRef>
+          <a:fillRef idx="3">
+            <a:schemeClr val="accent1"/>
+          </a:fillRef>
+          <a:effectRef idx="2">
+            <a:schemeClr val="accent1"/>
+          </a:effectRef>
+          <a:fontRef idx="minor">
+            <a:schemeClr val="lt1"/>
+          </a:fontRef>
+        </p:style>
+        <p:txBody>
+          <a:bodyPr rtlCol="0" anchor="ctr"/>
+          <a:lstStyle/>
+          <a:p>
+            <a:pPr algn="ctr"/>
+          </a:p>
+        </p:txBody>
+      </p:sp>
       <p:sp>
         <p:nvSpPr>
           <p:cNvPr id="4" name="TextBox 3"/>
@@ -8891,7 +9502,7 @@
                 </a:solidFill>
                 <a:latin typeface="Yu Gothic"/>
               </a:rPr>
-              <a:t>主治医意見書 読み取り　|　20</a:t>
+              <a:t>主治医意見書 読み取り　|　21</a:t>
             </a:r>
           </a:p>
         </p:txBody>
@@ -12098,7 +12709,7 @@
                 </a:solidFill>
                 <a:latin typeface="Yu Gothic"/>
               </a:rPr>
-              <a:t>ベンチマーク③ LLMモデルの比較</a:t>
+              <a:t>ベンチマーク②c 新しい正解データ1,000通（Word入力と手書きが混在）</a:t>
             </a:r>
           </a:p>
           <a:p>
@@ -12114,7 +12725,7 @@
                 </a:solidFill>
                 <a:latin typeface="Yu Gothic"/>
               </a:rPr>
-              <a:t>16問（うち4問は「候補を出してはいけない」問題）／ CPU のみ</a:t>
+              <a:t>読みやすさの4段階から16通ずつ・64通で実測。□ひとつを1件として数えた</a:t>
             </a:r>
           </a:p>
         </p:txBody>
@@ -12173,7 +12784,7 @@
         </p:nvGraphicFramePr>
         <p:xfrm>
           <a:off x="685800" y="1783080"/>
-          <a:ext cx="10789918" cy="2011680"/>
+          <a:ext cx="10789919" cy="2011680"/>
         </p:xfrm>
         <a:graphic>
           <a:graphicData uri="http://schemas.openxmlformats.org/drawingml/2006/table">
@@ -12182,11 +12793,10 @@
                 <a:tableStyleId>{5C22544A-7EE6-4342-B048-85BDC9FD1C3A}</a:tableStyleId>
               </a:tblPr>
               <a:tblGrid>
-                <a:gridCol w="4068330"/>
-                <a:gridCol w="1415071"/>
-                <a:gridCol w="1415071"/>
-                <a:gridCol w="2122607"/>
-                <a:gridCol w="1768839"/>
+                <a:gridCol w="3218046"/>
+                <a:gridCol w="2271562"/>
+                <a:gridCol w="2271562"/>
+                <a:gridCol w="3028749"/>
               </a:tblGrid>
               <a:tr h="402336">
                 <a:tc>
@@ -12195,13 +12805,13 @@
                     <a:lstStyle/>
                     <a:p>
                       <a:r>
-                        <a:rPr sz="1350" b="1">
+                        <a:rPr sz="1400" b="1">
                           <a:solidFill>
                             <a:srgbClr val="FFFFFF"/>
                           </a:solidFill>
                           <a:latin typeface="Yu Gothic"/>
                         </a:rPr>
-                        <a:t>モデル</a:t>
+                        <a:t>読みやすさ</a:t>
                       </a:r>
                     </a:p>
                   </a:txBody>
@@ -12217,13 +12827,13 @@
                     <a:lstStyle/>
                     <a:p>
                       <a:r>
-                        <a:rPr sz="1350" b="1">
+                        <a:rPr sz="1400" b="1">
                           <a:solidFill>
                             <a:srgbClr val="FFFFFF"/>
                           </a:solidFill>
                           <a:latin typeface="Yu Gothic"/>
                         </a:rPr>
-                        <a:t>サイズ</a:t>
+                        <a:t>チェック欄</a:t>
                       </a:r>
                     </a:p>
                   </a:txBody>
@@ -12239,13 +12849,13 @@
                     <a:lstStyle/>
                     <a:p>
                       <a:r>
-                        <a:rPr sz="1350" b="1">
+                        <a:rPr sz="1400" b="1">
                           <a:solidFill>
                             <a:srgbClr val="FFFFFF"/>
                           </a:solidFill>
                           <a:latin typeface="Yu Gothic"/>
                         </a:rPr>
-                        <a:t>正答</a:t>
+                        <a:t>文字欄</a:t>
                       </a:r>
                     </a:p>
                   </a:txBody>
@@ -12261,35 +12871,13 @@
                     <a:lstStyle/>
                     <a:p>
                       <a:r>
-                        <a:rPr sz="1350" b="1">
+                        <a:rPr sz="1400" b="1">
                           <a:solidFill>
                             <a:srgbClr val="FFFFFF"/>
                           </a:solidFill>
                           <a:latin typeface="Yu Gothic"/>
                         </a:rPr>
-                        <a:t>安全（作り出さない）</a:t>
-                      </a:r>
-                    </a:p>
-                  </a:txBody>
-                  <a:tcPr marT="38100" marB="38100">
-                    <a:solidFill>
-                      <a:srgbClr val="1E5AA8"/>
-                    </a:solidFill>
-                  </a:tcPr>
-                </a:tc>
-                <a:tc>
-                  <a:txBody>
-                    <a:bodyPr/>
-                    <a:lstStyle/>
-                    <a:p>
-                      <a:r>
-                        <a:rPr sz="1350" b="1">
-                          <a:solidFill>
-                            <a:srgbClr val="FFFFFF"/>
-                          </a:solidFill>
-                          <a:latin typeface="Yu Gothic"/>
-                        </a:rPr>
-                        <a:t>1件あたり</a:t>
+                        <a:t>件数（1,000通中）</a:t>
                       </a:r>
                     </a:p>
                   </a:txBody>
@@ -12307,13 +12895,13 @@
                     <a:lstStyle/>
                     <a:p>
                       <a:r>
-                        <a:rPr sz="1350" b="0">
-                          <a:solidFill>
-                            <a:srgbClr val="1B1F24"/>
-                          </a:solidFill>
-                          <a:latin typeface="Yu Gothic"/>
-                        </a:rPr>
-                        <a:t>辞書のみ（LLM不使用）</a:t>
+                        <a:rPr sz="1400" b="0">
+                          <a:solidFill>
+                            <a:srgbClr val="1B1F24"/>
+                          </a:solidFill>
+                          <a:latin typeface="Yu Gothic"/>
+                        </a:rPr>
+                        <a:t>活字</a:t>
                       </a:r>
                     </a:p>
                   </a:txBody>
@@ -12329,13 +12917,13 @@
                     <a:lstStyle/>
                     <a:p>
                       <a:r>
-                        <a:rPr sz="1350" b="0">
-                          <a:solidFill>
-                            <a:srgbClr val="1B1F24"/>
-                          </a:solidFill>
-                          <a:latin typeface="Yu Gothic"/>
-                        </a:rPr>
-                        <a:t>—</a:t>
+                        <a:rPr sz="1400" b="0">
+                          <a:solidFill>
+                            <a:srgbClr val="1B1F24"/>
+                          </a:solidFill>
+                          <a:latin typeface="Yu Gothic"/>
+                        </a:rPr>
+                        <a:t>86.5 %</a:t>
                       </a:r>
                     </a:p>
                   </a:txBody>
@@ -12351,13 +12939,13 @@
                     <a:lstStyle/>
                     <a:p>
                       <a:r>
-                        <a:rPr sz="1350" b="0">
-                          <a:solidFill>
-                            <a:srgbClr val="1B1F24"/>
-                          </a:solidFill>
-                          <a:latin typeface="Yu Gothic"/>
-                        </a:rPr>
-                        <a:t>9/12</a:t>
+                        <a:rPr sz="1400" b="0">
+                          <a:solidFill>
+                            <a:srgbClr val="1B1F24"/>
+                          </a:solidFill>
+                          <a:latin typeface="Yu Gothic"/>
+                        </a:rPr>
+                        <a:t>84.2 %</a:t>
                       </a:r>
                     </a:p>
                   </a:txBody>
@@ -12373,35 +12961,13 @@
                     <a:lstStyle/>
                     <a:p>
                       <a:r>
-                        <a:rPr sz="1350" b="0">
-                          <a:solidFill>
-                            <a:srgbClr val="1B1F24"/>
-                          </a:solidFill>
-                          <a:latin typeface="Yu Gothic"/>
-                        </a:rPr>
-                        <a:t>4/4</a:t>
-                      </a:r>
-                    </a:p>
-                  </a:txBody>
-                  <a:tcPr marT="38100" marB="38100">
-                    <a:solidFill>
-                      <a:srgbClr val="FFFFFF"/>
-                    </a:solidFill>
-                  </a:tcPr>
-                </a:tc>
-                <a:tc>
-                  <a:txBody>
-                    <a:bodyPr/>
-                    <a:lstStyle/>
-                    <a:p>
-                      <a:r>
-                        <a:rPr sz="1350" b="0">
-                          <a:solidFill>
-                            <a:srgbClr val="1B1F24"/>
-                          </a:solidFill>
-                          <a:latin typeface="Yu Gothic"/>
-                        </a:rPr>
-                        <a:t>即時</a:t>
+                        <a:rPr sz="1400" b="0">
+                          <a:solidFill>
+                            <a:srgbClr val="1B1F24"/>
+                          </a:solidFill>
+                          <a:latin typeface="Yu Gothic"/>
+                        </a:rPr>
+                        <a:t>350</a:t>
                       </a:r>
                     </a:p>
                   </a:txBody>
@@ -12419,13 +12985,13 @@
                     <a:lstStyle/>
                     <a:p>
                       <a:r>
-                        <a:rPr sz="1350" b="0">
-                          <a:solidFill>
-                            <a:srgbClr val="1B1F24"/>
-                          </a:solidFill>
-                          <a:latin typeface="Yu Gothic"/>
-                        </a:rPr>
-                        <a:t>Qwen3-4B-Instruct-2507-Q4_K_M.gguf</a:t>
+                        <a:rPr sz="1400" b="0">
+                          <a:solidFill>
+                            <a:srgbClr val="1B1F24"/>
+                          </a:solidFill>
+                          <a:latin typeface="Yu Gothic"/>
+                        </a:rPr>
+                        <a:t>標準</a:t>
                       </a:r>
                     </a:p>
                   </a:txBody>
@@ -12441,13 +13007,13 @@
                     <a:lstStyle/>
                     <a:p>
                       <a:r>
-                        <a:rPr sz="1350" b="0">
-                          <a:solidFill>
-                            <a:srgbClr val="1B1F24"/>
-                          </a:solidFill>
-                          <a:latin typeface="Yu Gothic"/>
-                        </a:rPr>
-                        <a:t>2.3 GB</a:t>
+                        <a:rPr sz="1400" b="0">
+                          <a:solidFill>
+                            <a:srgbClr val="1B1F24"/>
+                          </a:solidFill>
+                          <a:latin typeface="Yu Gothic"/>
+                        </a:rPr>
+                        <a:t>81.6 %</a:t>
                       </a:r>
                     </a:p>
                   </a:txBody>
@@ -12463,13 +13029,13 @@
                     <a:lstStyle/>
                     <a:p>
                       <a:r>
-                        <a:rPr sz="1350" b="0">
-                          <a:solidFill>
-                            <a:srgbClr val="1B1F24"/>
-                          </a:solidFill>
-                          <a:latin typeface="Yu Gothic"/>
-                        </a:rPr>
-                        <a:t>11/12</a:t>
+                        <a:rPr sz="1400" b="0">
+                          <a:solidFill>
+                            <a:srgbClr val="1B1F24"/>
+                          </a:solidFill>
+                          <a:latin typeface="Yu Gothic"/>
+                        </a:rPr>
+                        <a:t>84.2 %</a:t>
                       </a:r>
                     </a:p>
                   </a:txBody>
@@ -12485,35 +13051,13 @@
                     <a:lstStyle/>
                     <a:p>
                       <a:r>
-                        <a:rPr sz="1350" b="0">
-                          <a:solidFill>
-                            <a:srgbClr val="1B1F24"/>
-                          </a:solidFill>
-                          <a:latin typeface="Yu Gothic"/>
-                        </a:rPr>
-                        <a:t>4/4</a:t>
-                      </a:r>
-                    </a:p>
-                  </a:txBody>
-                  <a:tcPr marT="38100" marB="38100">
-                    <a:solidFill>
-                      <a:srgbClr val="F2F5F9"/>
-                    </a:solidFill>
-                  </a:tcPr>
-                </a:tc>
-                <a:tc>
-                  <a:txBody>
-                    <a:bodyPr/>
-                    <a:lstStyle/>
-                    <a:p>
-                      <a:r>
-                        <a:rPr sz="1350" b="0">
-                          <a:solidFill>
-                            <a:srgbClr val="1B1F24"/>
-                          </a:solidFill>
-                          <a:latin typeface="Yu Gothic"/>
-                        </a:rPr>
-                        <a:t>1.30 秒</a:t>
+                        <a:rPr sz="1400" b="0">
+                          <a:solidFill>
+                            <a:srgbClr val="1B1F24"/>
+                          </a:solidFill>
+                          <a:latin typeface="Yu Gothic"/>
+                        </a:rPr>
+                        <a:t>204</a:t>
                       </a:r>
                     </a:p>
                   </a:txBody>
@@ -12531,13 +13075,13 @@
                     <a:lstStyle/>
                     <a:p>
                       <a:r>
-                        <a:rPr sz="1350" b="0">
-                          <a:solidFill>
-                            <a:srgbClr val="1B1F24"/>
-                          </a:solidFill>
-                          <a:latin typeface="Yu Gothic"/>
-                        </a:rPr>
-                        <a:t>qwen2.5-1.5b-instruct-q4_k_m.gguf</a:t>
+                        <a:rPr sz="1400" b="0">
+                          <a:solidFill>
+                            <a:srgbClr val="1B1F24"/>
+                          </a:solidFill>
+                          <a:latin typeface="Yu Gothic"/>
+                        </a:rPr>
+                        <a:t>達筆（連綿・寝せ字）</a:t>
                       </a:r>
                     </a:p>
                   </a:txBody>
@@ -12553,13 +13097,13 @@
                     <a:lstStyle/>
                     <a:p>
                       <a:r>
-                        <a:rPr sz="1350" b="0">
-                          <a:solidFill>
-                            <a:srgbClr val="1B1F24"/>
-                          </a:solidFill>
-                          <a:latin typeface="Yu Gothic"/>
-                        </a:rPr>
-                        <a:t>1.0 GB</a:t>
+                        <a:rPr sz="1400" b="0">
+                          <a:solidFill>
+                            <a:srgbClr val="1B1F24"/>
+                          </a:solidFill>
+                          <a:latin typeface="Yu Gothic"/>
+                        </a:rPr>
+                        <a:t>78.1 %</a:t>
                       </a:r>
                     </a:p>
                   </a:txBody>
@@ -12575,13 +13119,13 @@
                     <a:lstStyle/>
                     <a:p>
                       <a:r>
-                        <a:rPr sz="1350" b="0">
-                          <a:solidFill>
-                            <a:srgbClr val="1B1F24"/>
-                          </a:solidFill>
-                          <a:latin typeface="Yu Gothic"/>
-                        </a:rPr>
-                        <a:t>10/12</a:t>
+                        <a:rPr sz="1400" b="0">
+                          <a:solidFill>
+                            <a:srgbClr val="1B1F24"/>
+                          </a:solidFill>
+                          <a:latin typeface="Yu Gothic"/>
+                        </a:rPr>
+                        <a:t>39.7 %</a:t>
                       </a:r>
                     </a:p>
                   </a:txBody>
@@ -12597,35 +13141,13 @@
                     <a:lstStyle/>
                     <a:p>
                       <a:r>
-                        <a:rPr sz="1350" b="0">
-                          <a:solidFill>
-                            <a:srgbClr val="1B1F24"/>
-                          </a:solidFill>
-                          <a:latin typeface="Yu Gothic"/>
-                        </a:rPr>
-                        <a:t>4/4</a:t>
-                      </a:r>
-                    </a:p>
-                  </a:txBody>
-                  <a:tcPr marT="38100" marB="38100">
-                    <a:solidFill>
-                      <a:srgbClr val="FFFFFF"/>
-                    </a:solidFill>
-                  </a:tcPr>
-                </a:tc>
-                <a:tc>
-                  <a:txBody>
-                    <a:bodyPr/>
-                    <a:lstStyle/>
-                    <a:p>
-                      <a:r>
-                        <a:rPr sz="1350" b="0">
-                          <a:solidFill>
-                            <a:srgbClr val="1B1F24"/>
-                          </a:solidFill>
-                          <a:latin typeface="Yu Gothic"/>
-                        </a:rPr>
-                        <a:t>0.50 秒</a:t>
+                        <a:rPr sz="1400" b="0">
+                          <a:solidFill>
+                            <a:srgbClr val="1B1F24"/>
+                          </a:solidFill>
+                          <a:latin typeface="Yu Gothic"/>
+                        </a:rPr>
+                        <a:t>227</a:t>
                       </a:r>
                     </a:p>
                   </a:txBody>
@@ -12643,13 +13165,13 @@
                     <a:lstStyle/>
                     <a:p>
                       <a:r>
-                        <a:rPr sz="1350" b="0">
-                          <a:solidFill>
-                            <a:srgbClr val="1B1F24"/>
-                          </a:solidFill>
-                          <a:latin typeface="Yu Gothic"/>
-                        </a:rPr>
-                        <a:t>qwen2.5-3b-instruct-q4_k_m.gguf</a:t>
+                        <a:rPr sz="1400" b="0">
+                          <a:solidFill>
+                            <a:srgbClr val="1A7F4B"/>
+                          </a:solidFill>
+                          <a:latin typeface="Yu Gothic"/>
+                        </a:rPr>
+                        <a:t>汚い（つぶれ・重なり）</a:t>
                       </a:r>
                     </a:p>
                   </a:txBody>
@@ -12665,13 +13187,13 @@
                     <a:lstStyle/>
                     <a:p>
                       <a:r>
-                        <a:rPr sz="1350" b="0">
-                          <a:solidFill>
-                            <a:srgbClr val="1B1F24"/>
-                          </a:solidFill>
-                          <a:latin typeface="Yu Gothic"/>
-                        </a:rPr>
-                        <a:t>2.0 GB</a:t>
+                        <a:rPr sz="1400" b="0">
+                          <a:solidFill>
+                            <a:srgbClr val="1A7F4B"/>
+                          </a:solidFill>
+                          <a:latin typeface="Yu Gothic"/>
+                        </a:rPr>
+                        <a:t>66.4 %</a:t>
                       </a:r>
                     </a:p>
                   </a:txBody>
@@ -12687,13 +13209,13 @@
                     <a:lstStyle/>
                     <a:p>
                       <a:r>
-                        <a:rPr sz="1350" b="0">
-                          <a:solidFill>
-                            <a:srgbClr val="1B1F24"/>
-                          </a:solidFill>
-                          <a:latin typeface="Yu Gothic"/>
-                        </a:rPr>
-                        <a:t>10/12</a:t>
+                        <a:rPr sz="1400" b="0">
+                          <a:solidFill>
+                            <a:srgbClr val="1A7F4B"/>
+                          </a:solidFill>
+                          <a:latin typeface="Yu Gothic"/>
+                        </a:rPr>
+                        <a:t>16.1 %</a:t>
                       </a:r>
                     </a:p>
                   </a:txBody>
@@ -12709,35 +13231,13 @@
                     <a:lstStyle/>
                     <a:p>
                       <a:r>
-                        <a:rPr sz="1350" b="0">
-                          <a:solidFill>
-                            <a:srgbClr val="1B1F24"/>
-                          </a:solidFill>
-                          <a:latin typeface="Yu Gothic"/>
-                        </a:rPr>
-                        <a:t>4/4</a:t>
-                      </a:r>
-                    </a:p>
-                  </a:txBody>
-                  <a:tcPr marT="38100" marB="38100">
-                    <a:solidFill>
-                      <a:srgbClr val="F2F5F9"/>
-                    </a:solidFill>
-                  </a:tcPr>
-                </a:tc>
-                <a:tc>
-                  <a:txBody>
-                    <a:bodyPr/>
-                    <a:lstStyle/>
-                    <a:p>
-                      <a:r>
-                        <a:rPr sz="1350" b="0">
-                          <a:solidFill>
-                            <a:srgbClr val="1B1F24"/>
-                          </a:solidFill>
-                          <a:latin typeface="Yu Gothic"/>
-                        </a:rPr>
-                        <a:t>1.01 秒</a:t>
+                        <a:rPr sz="1400" b="0">
+                          <a:solidFill>
+                            <a:srgbClr val="1A7F4B"/>
+                          </a:solidFill>
+                          <a:latin typeface="Yu Gothic"/>
+                        </a:rPr>
+                        <a:t>219</a:t>
                       </a:r>
                     </a:p>
                   </a:txBody>
@@ -12760,7 +13260,7 @@
         </p:nvSpPr>
         <p:spPr>
           <a:xfrm>
-            <a:off x="685800" y="3794760"/>
+            <a:off x="685800" y="4023360"/>
             <a:ext cx="10881360" cy="4572000"/>
           </a:xfrm>
           <a:prstGeom prst="rect">
@@ -12786,7 +13286,23 @@
                 </a:solidFill>
                 <a:latin typeface="Yu Gothic"/>
               </a:rPr>
-              <a:t>・辞書だけでも 12問中9問は正しく直る。LLM は「辞書に無い表記ゆれ」への保険</a:t>
+              <a:t>・崩れているのは「汚い」の1種類に集中している</a:t>
+            </a:r>
+          </a:p>
+          <a:p>
+            <a:pPr algn="l">
+              <a:spcBef>
+                <a:spcPts val="200"/>
+              </a:spcBef>
+            </a:pPr>
+            <a:r>
+              <a:rPr sz="1200" b="0">
+                <a:solidFill>
+                  <a:srgbClr val="5B636E"/>
+                </a:solidFill>
+                <a:latin typeface="Yu Gothic"/>
+              </a:rPr>
+              <a:t>　　文字は 16.1%。実質読めていない。取り込みの品質がそのまま精度になる</a:t>
             </a:r>
           </a:p>
           <a:p>
@@ -12802,7 +13318,7 @@
                 </a:solidFill>
                 <a:latin typeface="Yu Gothic"/>
               </a:rPr>
-              <a:t>・短い欄（傷病名など）は候補を出すだけで、値は自動確定しない</a:t>
+              <a:t>・枠単位で数えると 89.36%（4,895枠）。seigo の 99.08% とは10ポイント差</a:t>
             </a:r>
           </a:p>
           <a:p>
@@ -12818,7 +13334,7 @@
                 </a:solidFill>
                 <a:latin typeface="Yu Gothic"/>
               </a:rPr>
-              <a:t>　　小型LLMは読み取り不能な文字列からも、もっともらしい病名を作り出すため</a:t>
+              <a:t>　　数え方を揃えた上での差なので、本物の差。しきい値は seigo に合わせたままで未調整</a:t>
             </a:r>
           </a:p>
           <a:p>
@@ -12834,7 +13350,7 @@
                 </a:solidFill>
                 <a:latin typeface="Yu Gothic"/>
               </a:rPr>
-              <a:t>・記述欄（経過及び治療内容・特記すべき事項）だけは校正結果を自動反映</a:t>
+              <a:t>・テンプレートの座標の取り違えで、中央寄せの欄がそろって壊れていた</a:t>
             </a:r>
           </a:p>
           <a:p>
@@ -12850,7 +13366,7 @@
                 </a:solidFill>
                 <a:latin typeface="Yu Gothic"/>
               </a:rPr>
-              <a:t>　　反映前の読みは「OCR生読み」として候補に残るので、1押しで戻せる</a:t>
+              <a:t>　　年齢12.5%→54.2% / 身長6.3%→48.1% / 体重15.6%→58.3%。目視では気づけなかった</a:t>
             </a:r>
           </a:p>
         </p:txBody>
@@ -12858,6 +13374,45 @@
       <p:sp>
         <p:nvSpPr>
           <p:cNvPr id="6" name="TextBox 5"/>
+          <p:cNvSpPr txBox="1"/>
+          <p:nvPr/>
+        </p:nvSpPr>
+        <p:spPr>
+          <a:xfrm>
+            <a:off x="685800" y="5943600"/>
+            <a:ext cx="10881360" cy="548640"/>
+          </a:xfrm>
+          <a:prstGeom prst="rect">
+            <a:avLst/>
+          </a:prstGeom>
+          <a:noFill/>
+        </p:spPr>
+        <p:txBody>
+          <a:bodyPr wrap="square">
+            <a:spAutoFit/>
+          </a:bodyPr>
+          <a:lstStyle/>
+          <a:p>
+            <a:pPr algn="l">
+              <a:spcBef>
+                <a:spcPts val="0"/>
+              </a:spcBef>
+            </a:pPr>
+            <a:r>
+              <a:rPr sz="1300" b="0">
+                <a:solidFill>
+                  <a:srgbClr val="5B636E"/>
+                </a:solidFill>
+                <a:latin typeface="Yu Gothic"/>
+              </a:rPr>
+              <a:t>数字は「どの正解データで、何を1件と数えたか」と必ず一緒に見てください。</a:t>
+            </a:r>
+          </a:p>
+        </p:txBody>
+      </p:sp>
+      <p:sp>
+        <p:nvSpPr>
+          <p:cNvPr id="7" name="TextBox 6"/>
           <p:cNvSpPr txBox="1"/>
           <p:nvPr/>
         </p:nvSpPr>
@@ -12942,7 +13497,23 @@
                 </a:solidFill>
                 <a:latin typeface="Yu Gothic"/>
               </a:rPr>
-              <a:t>ベンチマーク④ 数字の欄と、記述欄の検算</a:t>
+              <a:t>ベンチマーク③ LLMモデルの比較</a:t>
+            </a:r>
+          </a:p>
+          <a:p>
+            <a:pPr algn="l">
+              <a:spcBef>
+                <a:spcPts val="400"/>
+              </a:spcBef>
+            </a:pPr>
+            <a:r>
+              <a:rPr sz="1400" b="0">
+                <a:solidFill>
+                  <a:srgbClr val="5B636E"/>
+                </a:solidFill>
+                <a:latin typeface="Yu Gothic"/>
+              </a:rPr>
+              <a:t>16問（うち4問は「候補を出してはいけない」問題）／ CPU のみ</a:t>
             </a:r>
           </a:p>
         </p:txBody>
@@ -13001,7 +13572,7 @@
         </p:nvGraphicFramePr>
         <p:xfrm>
           <a:off x="685800" y="1783080"/>
-          <a:ext cx="10789920" cy="2011680"/>
+          <a:ext cx="10789918" cy="2011680"/>
         </p:xfrm>
         <a:graphic>
           <a:graphicData uri="http://schemas.openxmlformats.org/drawingml/2006/table">
@@ -13010,9 +13581,11 @@
                 <a:tableStyleId>{5C22544A-7EE6-4342-B048-85BDC9FD1C3A}</a:tableStyleId>
               </a:tblPr>
               <a:tblGrid>
-                <a:gridCol w="3057144"/>
-                <a:gridCol w="4675632"/>
-                <a:gridCol w="3057144"/>
+                <a:gridCol w="4068330"/>
+                <a:gridCol w="1415071"/>
+                <a:gridCol w="1415071"/>
+                <a:gridCol w="2122607"/>
+                <a:gridCol w="1768839"/>
               </a:tblGrid>
               <a:tr h="402336">
                 <a:tc>
@@ -13021,13 +13594,13 @@
                     <a:lstStyle/>
                     <a:p>
                       <a:r>
-                        <a:rPr sz="1250" b="1">
+                        <a:rPr sz="1350" b="1">
                           <a:solidFill>
                             <a:srgbClr val="FFFFFF"/>
                           </a:solidFill>
                           <a:latin typeface="Yu Gothic"/>
                         </a:rPr>
-                        <a:t>対象</a:t>
+                        <a:t>モデル</a:t>
                       </a:r>
                     </a:p>
                   </a:txBody>
@@ -13043,13 +13616,13 @@
                     <a:lstStyle/>
                     <a:p>
                       <a:r>
-                        <a:rPr sz="1250" b="1">
+                        <a:rPr sz="1350" b="1">
                           <a:solidFill>
                             <a:srgbClr val="FFFFFF"/>
                           </a:solidFill>
                           <a:latin typeface="Yu Gothic"/>
                         </a:rPr>
-                        <a:t>やり方</a:t>
+                        <a:t>サイズ</a:t>
                       </a:r>
                     </a:p>
                   </a:txBody>
@@ -13065,13 +13638,57 @@
                     <a:lstStyle/>
                     <a:p>
                       <a:r>
-                        <a:rPr sz="1250" b="1">
+                        <a:rPr sz="1350" b="1">
                           <a:solidFill>
                             <a:srgbClr val="FFFFFF"/>
                           </a:solidFill>
                           <a:latin typeface="Yu Gothic"/>
                         </a:rPr>
-                        <a:t>結果</a:t>
+                        <a:t>正答</a:t>
+                      </a:r>
+                    </a:p>
+                  </a:txBody>
+                  <a:tcPr marT="38100" marB="38100">
+                    <a:solidFill>
+                      <a:srgbClr val="1E5AA8"/>
+                    </a:solidFill>
+                  </a:tcPr>
+                </a:tc>
+                <a:tc>
+                  <a:txBody>
+                    <a:bodyPr/>
+                    <a:lstStyle/>
+                    <a:p>
+                      <a:r>
+                        <a:rPr sz="1350" b="1">
+                          <a:solidFill>
+                            <a:srgbClr val="FFFFFF"/>
+                          </a:solidFill>
+                          <a:latin typeface="Yu Gothic"/>
+                        </a:rPr>
+                        <a:t>安全（作り出さない）</a:t>
+                      </a:r>
+                    </a:p>
+                  </a:txBody>
+                  <a:tcPr marT="38100" marB="38100">
+                    <a:solidFill>
+                      <a:srgbClr val="1E5AA8"/>
+                    </a:solidFill>
+                  </a:tcPr>
+                </a:tc>
+                <a:tc>
+                  <a:txBody>
+                    <a:bodyPr/>
+                    <a:lstStyle/>
+                    <a:p>
+                      <a:r>
+                        <a:rPr sz="1350" b="1">
+                          <a:solidFill>
+                            <a:srgbClr val="FFFFFF"/>
+                          </a:solidFill>
+                          <a:latin typeface="Yu Gothic"/>
+                        </a:rPr>
+                        <a:t>1件あたり</a:t>
                       </a:r>
                     </a:p>
                   </a:txBody>
@@ -13089,13 +13706,13 @@
                     <a:lstStyle/>
                     <a:p>
                       <a:r>
-                        <a:rPr sz="1250" b="0">
-                          <a:solidFill>
-                            <a:srgbClr val="1B1F24"/>
-                          </a:solidFill>
-                          <a:latin typeface="Yu Gothic"/>
-                        </a:rPr>
-                        <a:t>記入日・生年月日・最終診察日・発症年月日</a:t>
+                        <a:rPr sz="1350" b="0">
+                          <a:solidFill>
+                            <a:srgbClr val="1B1F24"/>
+                          </a:solidFill>
+                          <a:latin typeface="Yu Gothic"/>
+                        </a:rPr>
+                        <a:t>辞書のみ（LLM不使用）</a:t>
                       </a:r>
                     </a:p>
                   </a:txBody>
@@ -13111,13 +13728,13 @@
                     <a:lstStyle/>
                     <a:p>
                       <a:r>
-                        <a:rPr sz="1250" b="0">
-                          <a:solidFill>
-                            <a:srgbClr val="1B1F24"/>
-                          </a:solidFill>
-                          <a:latin typeface="Yu Gothic"/>
-                        </a:rPr>
-                        <a:t>元号は読まず数字だけを読み、印刷された年／月／日で区切る</a:t>
+                        <a:rPr sz="1350" b="0">
+                          <a:solidFill>
+                            <a:srgbClr val="1B1F24"/>
+                          </a:solidFill>
+                          <a:latin typeface="Yu Gothic"/>
+                        </a:rPr>
+                        <a:t>—</a:t>
                       </a:r>
                     </a:p>
                   </a:txBody>
@@ -13133,13 +13750,57 @@
                     <a:lstStyle/>
                     <a:p>
                       <a:r>
-                        <a:rPr sz="1250" b="0">
-                          <a:solidFill>
-                            <a:srgbClr val="1B1F24"/>
-                          </a:solidFill>
-                          <a:latin typeface="Yu Gothic"/>
-                        </a:rPr>
-                        <a:t>10 / 10 正解</a:t>
+                        <a:rPr sz="1350" b="0">
+                          <a:solidFill>
+                            <a:srgbClr val="1B1F24"/>
+                          </a:solidFill>
+                          <a:latin typeface="Yu Gothic"/>
+                        </a:rPr>
+                        <a:t>9/12</a:t>
+                      </a:r>
+                    </a:p>
+                  </a:txBody>
+                  <a:tcPr marT="38100" marB="38100">
+                    <a:solidFill>
+                      <a:srgbClr val="FFFFFF"/>
+                    </a:solidFill>
+                  </a:tcPr>
+                </a:tc>
+                <a:tc>
+                  <a:txBody>
+                    <a:bodyPr/>
+                    <a:lstStyle/>
+                    <a:p>
+                      <a:r>
+                        <a:rPr sz="1350" b="0">
+                          <a:solidFill>
+                            <a:srgbClr val="1B1F24"/>
+                          </a:solidFill>
+                          <a:latin typeface="Yu Gothic"/>
+                        </a:rPr>
+                        <a:t>4/4</a:t>
+                      </a:r>
+                    </a:p>
+                  </a:txBody>
+                  <a:tcPr marT="38100" marB="38100">
+                    <a:solidFill>
+                      <a:srgbClr val="FFFFFF"/>
+                    </a:solidFill>
+                  </a:tcPr>
+                </a:tc>
+                <a:tc>
+                  <a:txBody>
+                    <a:bodyPr/>
+                    <a:lstStyle/>
+                    <a:p>
+                      <a:r>
+                        <a:rPr sz="1350" b="0">
+                          <a:solidFill>
+                            <a:srgbClr val="1B1F24"/>
+                          </a:solidFill>
+                          <a:latin typeface="Yu Gothic"/>
+                        </a:rPr>
+                        <a:t>即時</a:t>
                       </a:r>
                     </a:p>
                   </a:txBody>
@@ -13157,13 +13818,13 @@
                     <a:lstStyle/>
                     <a:p>
                       <a:r>
-                        <a:rPr sz="1250" b="0">
-                          <a:solidFill>
-                            <a:srgbClr val="1B1F24"/>
-                          </a:solidFill>
-                          <a:latin typeface="Yu Gothic"/>
-                        </a:rPr>
-                        <a:t>電話番号・郵便番号</a:t>
+                        <a:rPr sz="1350" b="0">
+                          <a:solidFill>
+                            <a:srgbClr val="1B1F24"/>
+                          </a:solidFill>
+                          <a:latin typeface="Yu Gothic"/>
+                        </a:rPr>
+                        <a:t>Qwen3-4B-Instruct-2507-Q4_K_M.gguf</a:t>
                       </a:r>
                     </a:p>
                   </a:txBody>
@@ -13179,13 +13840,13 @@
                     <a:lstStyle/>
                     <a:p>
                       <a:r>
-                        <a:rPr sz="1250" b="0">
-                          <a:solidFill>
-                            <a:srgbClr val="1B1F24"/>
-                          </a:solidFill>
-                          <a:latin typeface="Yu Gothic"/>
-                        </a:rPr>
-                        <a:t>文字種を限定し、書式を整える</a:t>
+                        <a:rPr sz="1350" b="0">
+                          <a:solidFill>
+                            <a:srgbClr val="1B1F24"/>
+                          </a:solidFill>
+                          <a:latin typeface="Yu Gothic"/>
+                        </a:rPr>
+                        <a:t>2.3 GB</a:t>
                       </a:r>
                     </a:p>
                   </a:txBody>
@@ -13201,13 +13862,57 @@
                     <a:lstStyle/>
                     <a:p>
                       <a:r>
-                        <a:rPr sz="1250" b="0">
-                          <a:solidFill>
-                            <a:srgbClr val="1B1F24"/>
-                          </a:solidFill>
-                          <a:latin typeface="Yu Gothic"/>
-                        </a:rPr>
-                        <a:t>029-873-3111 の形に統一</a:t>
+                        <a:rPr sz="1350" b="0">
+                          <a:solidFill>
+                            <a:srgbClr val="1B1F24"/>
+                          </a:solidFill>
+                          <a:latin typeface="Yu Gothic"/>
+                        </a:rPr>
+                        <a:t>11/12</a:t>
+                      </a:r>
+                    </a:p>
+                  </a:txBody>
+                  <a:tcPr marT="38100" marB="38100">
+                    <a:solidFill>
+                      <a:srgbClr val="F2F5F9"/>
+                    </a:solidFill>
+                  </a:tcPr>
+                </a:tc>
+                <a:tc>
+                  <a:txBody>
+                    <a:bodyPr/>
+                    <a:lstStyle/>
+                    <a:p>
+                      <a:r>
+                        <a:rPr sz="1350" b="0">
+                          <a:solidFill>
+                            <a:srgbClr val="1B1F24"/>
+                          </a:solidFill>
+                          <a:latin typeface="Yu Gothic"/>
+                        </a:rPr>
+                        <a:t>4/4</a:t>
+                      </a:r>
+                    </a:p>
+                  </a:txBody>
+                  <a:tcPr marT="38100" marB="38100">
+                    <a:solidFill>
+                      <a:srgbClr val="F2F5F9"/>
+                    </a:solidFill>
+                  </a:tcPr>
+                </a:tc>
+                <a:tc>
+                  <a:txBody>
+                    <a:bodyPr/>
+                    <a:lstStyle/>
+                    <a:p>
+                      <a:r>
+                        <a:rPr sz="1350" b="0">
+                          <a:solidFill>
+                            <a:srgbClr val="1B1F24"/>
+                          </a:solidFill>
+                          <a:latin typeface="Yu Gothic"/>
+                        </a:rPr>
+                        <a:t>1.30 秒</a:t>
                       </a:r>
                     </a:p>
                   </a:txBody>
@@ -13225,13 +13930,13 @@
                     <a:lstStyle/>
                     <a:p>
                       <a:r>
-                        <a:rPr sz="1250" b="0">
-                          <a:solidFill>
-                            <a:srgbClr val="1B1F24"/>
-                          </a:solidFill>
-                          <a:latin typeface="Yu Gothic"/>
-                        </a:rPr>
-                        <a:t>記述欄の左端</a:t>
+                        <a:rPr sz="1350" b="0">
+                          <a:solidFill>
+                            <a:srgbClr val="1B1F24"/>
+                          </a:solidFill>
+                          <a:latin typeface="Yu Gothic"/>
+                        </a:rPr>
+                        <a:t>qwen2.5-1.5b-instruct-q4_k_m.gguf</a:t>
                       </a:r>
                     </a:p>
                   </a:txBody>
@@ -13247,13 +13952,13 @@
                     <a:lstStyle/>
                     <a:p>
                       <a:r>
-                        <a:rPr sz="1250" b="0">
-                          <a:solidFill>
-                            <a:srgbClr val="1B1F24"/>
-                          </a:solidFill>
-                          <a:latin typeface="Yu Gothic"/>
-                        </a:rPr>
-                        <a:t>白紙様式を見て、印刷にぶつからない範囲で読み取り枠を広げる</a:t>
+                        <a:rPr sz="1350" b="0">
+                          <a:solidFill>
+                            <a:srgbClr val="1B1F24"/>
+                          </a:solidFill>
+                          <a:latin typeface="Yu Gothic"/>
+                        </a:rPr>
+                        <a:t>1.0 GB</a:t>
                       </a:r>
                     </a:p>
                   </a:txBody>
@@ -13269,13 +13974,57 @@
                     <a:lstStyle/>
                     <a:p>
                       <a:r>
-                        <a:rPr sz="1250" b="0">
-                          <a:solidFill>
-                            <a:srgbClr val="1B1F24"/>
-                          </a:solidFill>
-                          <a:latin typeface="Yu Gothic"/>
-                        </a:rPr>
-                        <a:t>症状名は9件中9件で先頭が切れていた → 解消</a:t>
+                        <a:rPr sz="1350" b="0">
+                          <a:solidFill>
+                            <a:srgbClr val="1B1F24"/>
+                          </a:solidFill>
+                          <a:latin typeface="Yu Gothic"/>
+                        </a:rPr>
+                        <a:t>10/12</a:t>
+                      </a:r>
+                    </a:p>
+                  </a:txBody>
+                  <a:tcPr marT="38100" marB="38100">
+                    <a:solidFill>
+                      <a:srgbClr val="FFFFFF"/>
+                    </a:solidFill>
+                  </a:tcPr>
+                </a:tc>
+                <a:tc>
+                  <a:txBody>
+                    <a:bodyPr/>
+                    <a:lstStyle/>
+                    <a:p>
+                      <a:r>
+                        <a:rPr sz="1350" b="0">
+                          <a:solidFill>
+                            <a:srgbClr val="1B1F24"/>
+                          </a:solidFill>
+                          <a:latin typeface="Yu Gothic"/>
+                        </a:rPr>
+                        <a:t>4/4</a:t>
+                      </a:r>
+                    </a:p>
+                  </a:txBody>
+                  <a:tcPr marT="38100" marB="38100">
+                    <a:solidFill>
+                      <a:srgbClr val="FFFFFF"/>
+                    </a:solidFill>
+                  </a:tcPr>
+                </a:tc>
+                <a:tc>
+                  <a:txBody>
+                    <a:bodyPr/>
+                    <a:lstStyle/>
+                    <a:p>
+                      <a:r>
+                        <a:rPr sz="1350" b="0">
+                          <a:solidFill>
+                            <a:srgbClr val="1B1F24"/>
+                          </a:solidFill>
+                          <a:latin typeface="Yu Gothic"/>
+                        </a:rPr>
+                        <a:t>0.50 秒</a:t>
                       </a:r>
                     </a:p>
                   </a:txBody>
@@ -13293,13 +14042,13 @@
                     <a:lstStyle/>
                     <a:p>
                       <a:r>
-                        <a:rPr sz="1250" b="0">
-                          <a:solidFill>
-                            <a:srgbClr val="1B1F24"/>
-                          </a:solidFill>
-                          <a:latin typeface="Yu Gothic"/>
-                        </a:rPr>
-                        <a:t>記入が無い欄の拾い読み</a:t>
+                        <a:rPr sz="1350" b="0">
+                          <a:solidFill>
+                            <a:srgbClr val="1B1F24"/>
+                          </a:solidFill>
+                          <a:latin typeface="Yu Gothic"/>
+                        </a:rPr>
+                        <a:t>qwen2.5-3b-instruct-q4_k_m.gguf</a:t>
                       </a:r>
                     </a:p>
                   </a:txBody>
@@ -13315,13 +14064,13 @@
                     <a:lstStyle/>
                     <a:p>
                       <a:r>
-                        <a:rPr sz="1250" b="0">
-                          <a:solidFill>
-                            <a:srgbClr val="1B1F24"/>
-                          </a:solidFill>
-                          <a:latin typeface="Yu Gothic"/>
-                        </a:rPr>
-                        <a:t>書き込みが1文字ぶんも無いのに文字が読めた場合を検出</a:t>
+                        <a:rPr sz="1350" b="0">
+                          <a:solidFill>
+                            <a:srgbClr val="1B1F24"/>
+                          </a:solidFill>
+                          <a:latin typeface="Yu Gothic"/>
+                        </a:rPr>
+                        <a:t>2.0 GB</a:t>
                       </a:r>
                     </a:p>
                   </a:txBody>
@@ -13337,13 +14086,57 @@
                     <a:lstStyle/>
                     <a:p>
                       <a:r>
-                        <a:rPr sz="1250" b="0">
-                          <a:solidFill>
-                            <a:srgbClr val="1B1F24"/>
-                          </a:solidFill>
-                          <a:latin typeface="Yu Gothic"/>
-                        </a:rPr>
-                        <a:t>449欄中28欄を検出（確信度0.8以上の誤りは0件）</a:t>
+                        <a:rPr sz="1350" b="0">
+                          <a:solidFill>
+                            <a:srgbClr val="1B1F24"/>
+                          </a:solidFill>
+                          <a:latin typeface="Yu Gothic"/>
+                        </a:rPr>
+                        <a:t>10/12</a:t>
+                      </a:r>
+                    </a:p>
+                  </a:txBody>
+                  <a:tcPr marT="38100" marB="38100">
+                    <a:solidFill>
+                      <a:srgbClr val="F2F5F9"/>
+                    </a:solidFill>
+                  </a:tcPr>
+                </a:tc>
+                <a:tc>
+                  <a:txBody>
+                    <a:bodyPr/>
+                    <a:lstStyle/>
+                    <a:p>
+                      <a:r>
+                        <a:rPr sz="1350" b="0">
+                          <a:solidFill>
+                            <a:srgbClr val="1B1F24"/>
+                          </a:solidFill>
+                          <a:latin typeface="Yu Gothic"/>
+                        </a:rPr>
+                        <a:t>4/4</a:t>
+                      </a:r>
+                    </a:p>
+                  </a:txBody>
+                  <a:tcPr marT="38100" marB="38100">
+                    <a:solidFill>
+                      <a:srgbClr val="F2F5F9"/>
+                    </a:solidFill>
+                  </a:tcPr>
+                </a:tc>
+                <a:tc>
+                  <a:txBody>
+                    <a:bodyPr/>
+                    <a:lstStyle/>
+                    <a:p>
+                      <a:r>
+                        <a:rPr sz="1350" b="0">
+                          <a:solidFill>
+                            <a:srgbClr val="1B1F24"/>
+                          </a:solidFill>
+                          <a:latin typeface="Yu Gothic"/>
+                        </a:rPr>
+                        <a:t>1.01 秒</a:t>
                       </a:r>
                     </a:p>
                   </a:txBody>
@@ -13366,8 +14159,8 @@
         </p:nvSpPr>
         <p:spPr>
           <a:xfrm>
-            <a:off x="685800" y="5029200"/>
-            <a:ext cx="10881360" cy="548640"/>
+            <a:off x="685800" y="3794760"/>
+            <a:ext cx="10881360" cy="4572000"/>
           </a:xfrm>
           <a:prstGeom prst="rect">
             <a:avLst/>
@@ -13382,17 +14175,81 @@
           <a:p>
             <a:pPr algn="l">
               <a:spcBef>
-                <a:spcPts val="0"/>
-              </a:spcBef>
-            </a:pPr>
-            <a:r>
-              <a:rPr sz="1300" b="0">
+                <a:spcPts val="1000"/>
+              </a:spcBef>
+            </a:pPr>
+            <a:r>
+              <a:rPr sz="1500" b="1">
+                <a:solidFill>
+                  <a:srgbClr val="1B1F24"/>
+                </a:solidFill>
+                <a:latin typeface="Yu Gothic"/>
+              </a:rPr>
+              <a:t>・辞書だけでも 12問中9問は正しく直る。LLM は「辞書に無い表記ゆれ」への保険</a:t>
+            </a:r>
+          </a:p>
+          <a:p>
+            <a:pPr algn="l">
+              <a:spcBef>
+                <a:spcPts val="1000"/>
+              </a:spcBef>
+            </a:pPr>
+            <a:r>
+              <a:rPr sz="1500" b="1">
+                <a:solidFill>
+                  <a:srgbClr val="1B1F24"/>
+                </a:solidFill>
+                <a:latin typeface="Yu Gothic"/>
+              </a:rPr>
+              <a:t>・短い欄（傷病名など）は候補を出すだけで、値は自動確定しない</a:t>
+            </a:r>
+          </a:p>
+          <a:p>
+            <a:pPr algn="l">
+              <a:spcBef>
+                <a:spcPts val="200"/>
+              </a:spcBef>
+            </a:pPr>
+            <a:r>
+              <a:rPr sz="1200" b="0">
                 <a:solidFill>
                   <a:srgbClr val="5B636E"/>
                 </a:solidFill>
                 <a:latin typeface="Yu Gothic"/>
               </a:rPr>
-              <a:t>値は書き換えず、確信度を下げて理由を出す。「読めた文字が少ないから補う」ことはしない（無い記載を作らないため）。</a:t>
+              <a:t>　　小型LLMは読み取り不能な文字列からも、もっともらしい病名を作り出すため</a:t>
+            </a:r>
+          </a:p>
+          <a:p>
+            <a:pPr algn="l">
+              <a:spcBef>
+                <a:spcPts val="1000"/>
+              </a:spcBef>
+            </a:pPr>
+            <a:r>
+              <a:rPr sz="1500" b="1">
+                <a:solidFill>
+                  <a:srgbClr val="1B1F24"/>
+                </a:solidFill>
+                <a:latin typeface="Yu Gothic"/>
+              </a:rPr>
+              <a:t>・記述欄（経過及び治療内容・特記すべき事項）だけは校正結果を自動反映</a:t>
+            </a:r>
+          </a:p>
+          <a:p>
+            <a:pPr algn="l">
+              <a:spcBef>
+                <a:spcPts val="200"/>
+              </a:spcBef>
+            </a:pPr>
+            <a:r>
+              <a:rPr sz="1200" b="0">
+                <a:solidFill>
+                  <a:srgbClr val="5B636E"/>
+                </a:solidFill>
+                <a:latin typeface="Yu Gothic"/>
+              </a:rPr>
+              <a:t>　　反映前の読みは「OCR生読み」として候補に残るので、1押しで戻せる</a:t>
             </a:r>
           </a:p>
         </p:txBody>
